--- a/figures/workflow.pptx
+++ b/figures/workflow.pptx
@@ -7,6 +7,8 @@
   <p:sldIdLst>
     <p:sldId id="334" r:id="rId2"/>
     <p:sldId id="335" r:id="rId3"/>
+    <p:sldId id="337" r:id="rId4"/>
+    <p:sldId id="338" r:id="rId5"/>
   </p:sldIdLst>
   <p:sldSz cx="12192000" cy="6858000"/>
   <p:notesSz cx="6858000" cy="9144000"/>
@@ -105,6 +107,11 @@
       </a:defRPr>
     </a:lvl9pPr>
   </p:defaultTextStyle>
+  <p:extLst>
+    <p:ext uri="{EFAFB233-063F-42B5-8137-9DF3F51BA10A}">
+      <p15:sldGuideLst xmlns:p15="http://schemas.microsoft.com/office/powerpoint/2012/main"/>
+    </p:ext>
+  </p:extLst>
 </p:presentation>
 </file>
 
@@ -257,7 +264,7 @@
           <a:p>
             <a:fld id="{CADD9ABC-66B6-7D48-895A-911411573354}" type="datetimeFigureOut">
               <a:rPr lang="en-US" smtClean="0"/>
-              <a:t>1/22/26</a:t>
+              <a:t>2/24/26</a:t>
             </a:fld>
             <a:endParaRPr lang="en-US"/>
           </a:p>
@@ -457,7 +464,7 @@
           <a:p>
             <a:fld id="{CADD9ABC-66B6-7D48-895A-911411573354}" type="datetimeFigureOut">
               <a:rPr lang="en-US" smtClean="0"/>
-              <a:t>1/22/26</a:t>
+              <a:t>2/24/26</a:t>
             </a:fld>
             <a:endParaRPr lang="en-US"/>
           </a:p>
@@ -667,7 +674,7 @@
           <a:p>
             <a:fld id="{CADD9ABC-66B6-7D48-895A-911411573354}" type="datetimeFigureOut">
               <a:rPr lang="en-US" smtClean="0"/>
-              <a:t>1/22/26</a:t>
+              <a:t>2/24/26</a:t>
             </a:fld>
             <a:endParaRPr lang="en-US"/>
           </a:p>
@@ -877,7 +884,7 @@
               <a:pPr>
                 <a:defRPr/>
               </a:pPr>
-              <a:t>1/22/26</a:t>
+              <a:t>2/24/26</a:t>
             </a:fld>
             <a:endParaRPr lang="en-US" dirty="0"/>
           </a:p>
@@ -1086,7 +1093,7 @@
           <a:p>
             <a:fld id="{CADD9ABC-66B6-7D48-895A-911411573354}" type="datetimeFigureOut">
               <a:rPr lang="en-US" smtClean="0"/>
-              <a:t>1/22/26</a:t>
+              <a:t>2/24/26</a:t>
             </a:fld>
             <a:endParaRPr lang="en-US"/>
           </a:p>
@@ -1362,7 +1369,7 @@
           <a:p>
             <a:fld id="{CADD9ABC-66B6-7D48-895A-911411573354}" type="datetimeFigureOut">
               <a:rPr lang="en-US" smtClean="0"/>
-              <a:t>1/22/26</a:t>
+              <a:t>2/24/26</a:t>
             </a:fld>
             <a:endParaRPr lang="en-US"/>
           </a:p>
@@ -1630,7 +1637,7 @@
           <a:p>
             <a:fld id="{CADD9ABC-66B6-7D48-895A-911411573354}" type="datetimeFigureOut">
               <a:rPr lang="en-US" smtClean="0"/>
-              <a:t>1/22/26</a:t>
+              <a:t>2/24/26</a:t>
             </a:fld>
             <a:endParaRPr lang="en-US"/>
           </a:p>
@@ -2045,7 +2052,7 @@
           <a:p>
             <a:fld id="{CADD9ABC-66B6-7D48-895A-911411573354}" type="datetimeFigureOut">
               <a:rPr lang="en-US" smtClean="0"/>
-              <a:t>1/22/26</a:t>
+              <a:t>2/24/26</a:t>
             </a:fld>
             <a:endParaRPr lang="en-US"/>
           </a:p>
@@ -2187,7 +2194,7 @@
           <a:p>
             <a:fld id="{CADD9ABC-66B6-7D48-895A-911411573354}" type="datetimeFigureOut">
               <a:rPr lang="en-US" smtClean="0"/>
-              <a:t>1/22/26</a:t>
+              <a:t>2/24/26</a:t>
             </a:fld>
             <a:endParaRPr lang="en-US"/>
           </a:p>
@@ -2300,7 +2307,7 @@
           <a:p>
             <a:fld id="{CADD9ABC-66B6-7D48-895A-911411573354}" type="datetimeFigureOut">
               <a:rPr lang="en-US" smtClean="0"/>
-              <a:t>1/22/26</a:t>
+              <a:t>2/24/26</a:t>
             </a:fld>
             <a:endParaRPr lang="en-US"/>
           </a:p>
@@ -2613,7 +2620,7 @@
           <a:p>
             <a:fld id="{CADD9ABC-66B6-7D48-895A-911411573354}" type="datetimeFigureOut">
               <a:rPr lang="en-US" smtClean="0"/>
-              <a:t>1/22/26</a:t>
+              <a:t>2/24/26</a:t>
             </a:fld>
             <a:endParaRPr lang="en-US"/>
           </a:p>
@@ -2902,7 +2909,7 @@
           <a:p>
             <a:fld id="{CADD9ABC-66B6-7D48-895A-911411573354}" type="datetimeFigureOut">
               <a:rPr lang="en-US" smtClean="0"/>
-              <a:t>1/22/26</a:t>
+              <a:t>2/24/26</a:t>
             </a:fld>
             <a:endParaRPr lang="en-US"/>
           </a:p>
@@ -3145,7 +3152,7 @@
           <a:p>
             <a:fld id="{CADD9ABC-66B6-7D48-895A-911411573354}" type="datetimeFigureOut">
               <a:rPr lang="en-US" smtClean="0"/>
-              <a:t>1/22/26</a:t>
+              <a:t>2/24/26</a:t>
             </a:fld>
             <a:endParaRPr lang="en-US"/>
           </a:p>
@@ -8399,6 +8406,5287 @@
 </p:sld>
 </file>
 
+<file path=ppt/slides/slide3.xml><?xml version="1.0" encoding="utf-8"?>
+<p:sld xmlns:a="http://schemas.openxmlformats.org/drawingml/2006/main" xmlns:r="http://schemas.openxmlformats.org/officeDocument/2006/relationships" xmlns:p="http://schemas.openxmlformats.org/presentationml/2006/main">
+  <p:cSld>
+    <p:spTree>
+      <p:nvGrpSpPr>
+        <p:cNvPr id="1" name="">
+          <a:extLst>
+            <a:ext uri="{FF2B5EF4-FFF2-40B4-BE49-F238E27FC236}">
+              <a16:creationId xmlns:a16="http://schemas.microsoft.com/office/drawing/2014/main" id="{7C7D2EC4-C2A0-399C-55D3-5C8B1CC4C6C2}"/>
+            </a:ext>
+          </a:extLst>
+        </p:cNvPr>
+        <p:cNvGrpSpPr/>
+        <p:nvPr/>
+      </p:nvGrpSpPr>
+      <p:grpSpPr>
+        <a:xfrm>
+          <a:off x="0" y="0"/>
+          <a:ext cx="0" cy="0"/>
+          <a:chOff x="0" y="0"/>
+          <a:chExt cx="0" cy="0"/>
+        </a:xfrm>
+      </p:grpSpPr>
+      <p:cxnSp>
+        <p:nvCxnSpPr>
+          <p:cNvPr id="31" name="Straight Arrow Connector 30">
+            <a:extLst>
+              <a:ext uri="{FF2B5EF4-FFF2-40B4-BE49-F238E27FC236}">
+                <a16:creationId xmlns:a16="http://schemas.microsoft.com/office/drawing/2014/main" id="{3955B9E5-FCEB-2AEB-759B-79F935115632}"/>
+              </a:ext>
+            </a:extLst>
+          </p:cNvPr>
+          <p:cNvCxnSpPr>
+            <a:cxnSpLocks/>
+            <a:endCxn id="139" idx="2"/>
+          </p:cNvCxnSpPr>
+          <p:nvPr/>
+        </p:nvCxnSpPr>
+        <p:spPr>
+          <a:xfrm flipH="1">
+            <a:off x="3011444" y="4523886"/>
+            <a:ext cx="5628553" cy="0"/>
+          </a:xfrm>
+          <a:prstGeom prst="straightConnector1">
+            <a:avLst/>
+          </a:prstGeom>
+          <a:ln>
+            <a:solidFill>
+              <a:schemeClr val="tx1"/>
+            </a:solidFill>
+            <a:tailEnd type="triangle"/>
+          </a:ln>
+        </p:spPr>
+        <p:style>
+          <a:lnRef idx="2">
+            <a:schemeClr val="accent1"/>
+          </a:lnRef>
+          <a:fillRef idx="0">
+            <a:schemeClr val="accent1"/>
+          </a:fillRef>
+          <a:effectRef idx="1">
+            <a:schemeClr val="accent1"/>
+          </a:effectRef>
+          <a:fontRef idx="minor">
+            <a:schemeClr val="tx1"/>
+          </a:fontRef>
+        </p:style>
+      </p:cxnSp>
+      <p:cxnSp>
+        <p:nvCxnSpPr>
+          <p:cNvPr id="61" name="Straight Arrow Connector 60">
+            <a:extLst>
+              <a:ext uri="{FF2B5EF4-FFF2-40B4-BE49-F238E27FC236}">
+                <a16:creationId xmlns:a16="http://schemas.microsoft.com/office/drawing/2014/main" id="{5D7F3DD1-AE5B-16FD-945C-B14938C0AB5F}"/>
+              </a:ext>
+            </a:extLst>
+          </p:cNvPr>
+          <p:cNvCxnSpPr>
+            <a:cxnSpLocks/>
+          </p:cNvCxnSpPr>
+          <p:nvPr/>
+        </p:nvCxnSpPr>
+        <p:spPr>
+          <a:xfrm flipV="1">
+            <a:off x="3495516" y="2647163"/>
+            <a:ext cx="588202" cy="8437"/>
+          </a:xfrm>
+          <a:prstGeom prst="straightConnector1">
+            <a:avLst/>
+          </a:prstGeom>
+          <a:ln>
+            <a:solidFill>
+              <a:schemeClr val="tx1"/>
+            </a:solidFill>
+            <a:tailEnd type="triangle"/>
+          </a:ln>
+        </p:spPr>
+        <p:style>
+          <a:lnRef idx="2">
+            <a:schemeClr val="accent1"/>
+          </a:lnRef>
+          <a:fillRef idx="0">
+            <a:schemeClr val="accent1"/>
+          </a:fillRef>
+          <a:effectRef idx="1">
+            <a:schemeClr val="accent1"/>
+          </a:effectRef>
+          <a:fontRef idx="minor">
+            <a:schemeClr val="tx1"/>
+          </a:fontRef>
+        </p:style>
+      </p:cxnSp>
+      <p:cxnSp>
+        <p:nvCxnSpPr>
+          <p:cNvPr id="75" name="Straight Arrow Connector 74">
+            <a:extLst>
+              <a:ext uri="{FF2B5EF4-FFF2-40B4-BE49-F238E27FC236}">
+                <a16:creationId xmlns:a16="http://schemas.microsoft.com/office/drawing/2014/main" id="{B77D7F28-1281-B2E5-9373-E064A14C7A00}"/>
+              </a:ext>
+            </a:extLst>
+          </p:cNvPr>
+          <p:cNvCxnSpPr>
+            <a:cxnSpLocks/>
+          </p:cNvCxnSpPr>
+          <p:nvPr/>
+        </p:nvCxnSpPr>
+        <p:spPr>
+          <a:xfrm>
+            <a:off x="5709220" y="1634701"/>
+            <a:ext cx="400878" cy="0"/>
+          </a:xfrm>
+          <a:prstGeom prst="straightConnector1">
+            <a:avLst/>
+          </a:prstGeom>
+          <a:ln>
+            <a:solidFill>
+              <a:schemeClr val="tx1"/>
+            </a:solidFill>
+            <a:tailEnd type="triangle"/>
+          </a:ln>
+        </p:spPr>
+        <p:style>
+          <a:lnRef idx="2">
+            <a:schemeClr val="accent1"/>
+          </a:lnRef>
+          <a:fillRef idx="0">
+            <a:schemeClr val="accent1"/>
+          </a:fillRef>
+          <a:effectRef idx="1">
+            <a:schemeClr val="accent1"/>
+          </a:effectRef>
+          <a:fontRef idx="minor">
+            <a:schemeClr val="tx1"/>
+          </a:fontRef>
+        </p:style>
+      </p:cxnSp>
+      <p:sp>
+        <p:nvSpPr>
+          <p:cNvPr id="172" name="Rectangle 171">
+            <a:extLst>
+              <a:ext uri="{FF2B5EF4-FFF2-40B4-BE49-F238E27FC236}">
+                <a16:creationId xmlns:a16="http://schemas.microsoft.com/office/drawing/2014/main" id="{A9635B44-BFBC-4C12-21C3-CEF3FA14F9EB}"/>
+              </a:ext>
+            </a:extLst>
+          </p:cNvPr>
+          <p:cNvSpPr/>
+          <p:nvPr/>
+        </p:nvSpPr>
+        <p:spPr>
+          <a:xfrm>
+            <a:off x="1947286" y="1191056"/>
+            <a:ext cx="3847065" cy="850047"/>
+          </a:xfrm>
+          <a:prstGeom prst="rect">
+            <a:avLst/>
+          </a:prstGeom>
+          <a:solidFill>
+            <a:schemeClr val="accent4">
+              <a:lumMod val="40000"/>
+              <a:lumOff val="60000"/>
+            </a:schemeClr>
+          </a:solidFill>
+          <a:ln>
+            <a:noFill/>
+          </a:ln>
+        </p:spPr>
+        <p:style>
+          <a:lnRef idx="2">
+            <a:schemeClr val="accent1">
+              <a:shade val="15000"/>
+            </a:schemeClr>
+          </a:lnRef>
+          <a:fillRef idx="1">
+            <a:schemeClr val="accent1"/>
+          </a:fillRef>
+          <a:effectRef idx="0">
+            <a:schemeClr val="accent1"/>
+          </a:effectRef>
+          <a:fontRef idx="minor">
+            <a:schemeClr val="lt1"/>
+          </a:fontRef>
+        </p:style>
+        <p:txBody>
+          <a:bodyPr rtlCol="0" anchor="ctr"/>
+          <a:lstStyle/>
+          <a:p>
+            <a:pPr algn="ctr"/>
+            <a:endParaRPr lang="en-US" sz="1200"/>
+          </a:p>
+        </p:txBody>
+      </p:sp>
+      <p:cxnSp>
+        <p:nvCxnSpPr>
+          <p:cNvPr id="63" name="Elbow Connector 62">
+            <a:extLst>
+              <a:ext uri="{FF2B5EF4-FFF2-40B4-BE49-F238E27FC236}">
+                <a16:creationId xmlns:a16="http://schemas.microsoft.com/office/drawing/2014/main" id="{4BB47D52-F6E0-3455-1F93-D6F8997A0645}"/>
+              </a:ext>
+            </a:extLst>
+          </p:cNvPr>
+          <p:cNvCxnSpPr>
+            <a:cxnSpLocks/>
+            <a:endCxn id="12" idx="5"/>
+          </p:cNvCxnSpPr>
+          <p:nvPr/>
+        </p:nvCxnSpPr>
+        <p:spPr>
+          <a:xfrm>
+            <a:off x="1462203" y="3185716"/>
+            <a:ext cx="9110282" cy="366652"/>
+          </a:xfrm>
+          <a:prstGeom prst="bentConnector3">
+            <a:avLst>
+              <a:gd name="adj1" fmla="val 7565"/>
+            </a:avLst>
+          </a:prstGeom>
+          <a:ln w="19050">
+            <a:solidFill>
+              <a:schemeClr val="tx1"/>
+            </a:solidFill>
+            <a:tailEnd type="triangle"/>
+          </a:ln>
+        </p:spPr>
+        <p:style>
+          <a:lnRef idx="1">
+            <a:schemeClr val="accent1"/>
+          </a:lnRef>
+          <a:fillRef idx="0">
+            <a:schemeClr val="accent1"/>
+          </a:fillRef>
+          <a:effectRef idx="0">
+            <a:schemeClr val="accent1"/>
+          </a:effectRef>
+          <a:fontRef idx="minor">
+            <a:schemeClr val="tx1"/>
+          </a:fontRef>
+        </p:style>
+      </p:cxnSp>
+      <p:cxnSp>
+        <p:nvCxnSpPr>
+          <p:cNvPr id="47" name="Elbow Connector 46">
+            <a:extLst>
+              <a:ext uri="{FF2B5EF4-FFF2-40B4-BE49-F238E27FC236}">
+                <a16:creationId xmlns:a16="http://schemas.microsoft.com/office/drawing/2014/main" id="{32BB8419-4FD6-1064-DC4C-309C78358A69}"/>
+              </a:ext>
+            </a:extLst>
+          </p:cNvPr>
+          <p:cNvCxnSpPr>
+            <a:cxnSpLocks/>
+            <a:endCxn id="5" idx="5"/>
+          </p:cNvCxnSpPr>
+          <p:nvPr/>
+        </p:nvCxnSpPr>
+        <p:spPr>
+          <a:xfrm flipV="1">
+            <a:off x="1503450" y="2677736"/>
+            <a:ext cx="1259171" cy="239915"/>
+          </a:xfrm>
+          <a:prstGeom prst="bentConnector3">
+            <a:avLst>
+              <a:gd name="adj1" fmla="val 50000"/>
+            </a:avLst>
+          </a:prstGeom>
+          <a:ln w="19050">
+            <a:solidFill>
+              <a:schemeClr val="tx1"/>
+            </a:solidFill>
+            <a:tailEnd type="triangle"/>
+          </a:ln>
+        </p:spPr>
+        <p:style>
+          <a:lnRef idx="1">
+            <a:schemeClr val="accent1"/>
+          </a:lnRef>
+          <a:fillRef idx="0">
+            <a:schemeClr val="accent1"/>
+          </a:fillRef>
+          <a:effectRef idx="0">
+            <a:schemeClr val="accent1"/>
+          </a:effectRef>
+          <a:fontRef idx="minor">
+            <a:schemeClr val="tx1"/>
+          </a:fontRef>
+        </p:style>
+      </p:cxnSp>
+      <p:sp>
+        <p:nvSpPr>
+          <p:cNvPr id="37" name="Rounded Rectangle 36">
+            <a:extLst>
+              <a:ext uri="{FF2B5EF4-FFF2-40B4-BE49-F238E27FC236}">
+                <a16:creationId xmlns:a16="http://schemas.microsoft.com/office/drawing/2014/main" id="{5C656F3B-4BC1-FDC4-C8B6-6984E21A9104}"/>
+              </a:ext>
+            </a:extLst>
+          </p:cNvPr>
+          <p:cNvSpPr/>
+          <p:nvPr/>
+        </p:nvSpPr>
+        <p:spPr>
+          <a:xfrm>
+            <a:off x="165974" y="2538086"/>
+            <a:ext cx="1482815" cy="995863"/>
+          </a:xfrm>
+          <a:prstGeom prst="roundRect">
+            <a:avLst/>
+          </a:prstGeom>
+          <a:solidFill>
+            <a:schemeClr val="bg1"/>
+          </a:solidFill>
+          <a:ln>
+            <a:solidFill>
+              <a:schemeClr val="tx2"/>
+            </a:solidFill>
+          </a:ln>
+        </p:spPr>
+        <p:style>
+          <a:lnRef idx="2">
+            <a:schemeClr val="accent1">
+              <a:shade val="15000"/>
+            </a:schemeClr>
+          </a:lnRef>
+          <a:fillRef idx="1">
+            <a:schemeClr val="accent1"/>
+          </a:fillRef>
+          <a:effectRef idx="0">
+            <a:schemeClr val="accent1"/>
+          </a:effectRef>
+          <a:fontRef idx="minor">
+            <a:schemeClr val="lt1"/>
+          </a:fontRef>
+        </p:style>
+        <p:txBody>
+          <a:bodyPr rtlCol="0" anchor="ctr"/>
+          <a:lstStyle/>
+          <a:p>
+            <a:pPr algn="ctr"/>
+            <a:endParaRPr lang="en-US" sz="1400" dirty="0">
+              <a:latin typeface="CMU Sans Serif Medium" panose="02000603000000000000" pitchFamily="2" charset="0"/>
+              <a:ea typeface="CMU Sans Serif Medium" panose="02000603000000000000" pitchFamily="2" charset="0"/>
+              <a:cs typeface="CMU Sans Serif Medium" panose="02000603000000000000" pitchFamily="2" charset="0"/>
+            </a:endParaRPr>
+          </a:p>
+        </p:txBody>
+      </p:sp>
+      <p:sp>
+        <p:nvSpPr>
+          <p:cNvPr id="182" name="Rounded Rectangle 181">
+            <a:extLst>
+              <a:ext uri="{FF2B5EF4-FFF2-40B4-BE49-F238E27FC236}">
+                <a16:creationId xmlns:a16="http://schemas.microsoft.com/office/drawing/2014/main" id="{E58BE569-D26E-057C-7838-6D9C8DF48D97}"/>
+              </a:ext>
+            </a:extLst>
+          </p:cNvPr>
+          <p:cNvSpPr/>
+          <p:nvPr/>
+        </p:nvSpPr>
+        <p:spPr>
+          <a:xfrm>
+            <a:off x="10312002" y="1030910"/>
+            <a:ext cx="1499287" cy="5117133"/>
+          </a:xfrm>
+          <a:prstGeom prst="roundRect">
+            <a:avLst/>
+          </a:prstGeom>
+          <a:solidFill>
+            <a:srgbClr val="C089D2"/>
+          </a:solidFill>
+          <a:ln>
+            <a:noFill/>
+          </a:ln>
+        </p:spPr>
+        <p:style>
+          <a:lnRef idx="2">
+            <a:schemeClr val="accent1">
+              <a:shade val="15000"/>
+            </a:schemeClr>
+          </a:lnRef>
+          <a:fillRef idx="1">
+            <a:schemeClr val="accent1"/>
+          </a:fillRef>
+          <a:effectRef idx="0">
+            <a:schemeClr val="accent1"/>
+          </a:effectRef>
+          <a:fontRef idx="minor">
+            <a:schemeClr val="lt1"/>
+          </a:fontRef>
+        </p:style>
+        <p:txBody>
+          <a:bodyPr rtlCol="0" anchor="ctr"/>
+          <a:lstStyle/>
+          <a:p>
+            <a:pPr algn="ctr"/>
+            <a:endParaRPr lang="en-US" sz="1200"/>
+          </a:p>
+        </p:txBody>
+      </p:sp>
+      <p:cxnSp>
+        <p:nvCxnSpPr>
+          <p:cNvPr id="43" name="Straight Arrow Connector 42">
+            <a:extLst>
+              <a:ext uri="{FF2B5EF4-FFF2-40B4-BE49-F238E27FC236}">
+                <a16:creationId xmlns:a16="http://schemas.microsoft.com/office/drawing/2014/main" id="{5BA23893-AF3D-EDCB-46EF-B1BEA195968D}"/>
+              </a:ext>
+            </a:extLst>
+          </p:cNvPr>
+          <p:cNvCxnSpPr>
+            <a:cxnSpLocks/>
+          </p:cNvCxnSpPr>
+          <p:nvPr/>
+        </p:nvCxnSpPr>
+        <p:spPr>
+          <a:xfrm>
+            <a:off x="9005868" y="5575442"/>
+            <a:ext cx="1519050" cy="0"/>
+          </a:xfrm>
+          <a:prstGeom prst="straightConnector1">
+            <a:avLst/>
+          </a:prstGeom>
+          <a:ln>
+            <a:solidFill>
+              <a:schemeClr val="tx1"/>
+            </a:solidFill>
+            <a:tailEnd type="triangle"/>
+          </a:ln>
+        </p:spPr>
+        <p:style>
+          <a:lnRef idx="2">
+            <a:schemeClr val="accent1"/>
+          </a:lnRef>
+          <a:fillRef idx="0">
+            <a:schemeClr val="accent1"/>
+          </a:fillRef>
+          <a:effectRef idx="1">
+            <a:schemeClr val="accent1"/>
+          </a:effectRef>
+          <a:fontRef idx="minor">
+            <a:schemeClr val="tx1"/>
+          </a:fontRef>
+        </p:style>
+      </p:cxnSp>
+      <p:cxnSp>
+        <p:nvCxnSpPr>
+          <p:cNvPr id="25" name="Straight Arrow Connector 24">
+            <a:extLst>
+              <a:ext uri="{FF2B5EF4-FFF2-40B4-BE49-F238E27FC236}">
+                <a16:creationId xmlns:a16="http://schemas.microsoft.com/office/drawing/2014/main" id="{F81FF33A-14AB-5BA4-EB7D-9E3899F03114}"/>
+              </a:ext>
+            </a:extLst>
+          </p:cNvPr>
+          <p:cNvCxnSpPr>
+            <a:cxnSpLocks/>
+          </p:cNvCxnSpPr>
+          <p:nvPr/>
+        </p:nvCxnSpPr>
+        <p:spPr>
+          <a:xfrm>
+            <a:off x="9005868" y="4498581"/>
+            <a:ext cx="1519050" cy="0"/>
+          </a:xfrm>
+          <a:prstGeom prst="straightConnector1">
+            <a:avLst/>
+          </a:prstGeom>
+          <a:ln>
+            <a:solidFill>
+              <a:schemeClr val="tx1"/>
+            </a:solidFill>
+            <a:tailEnd type="triangle"/>
+          </a:ln>
+        </p:spPr>
+        <p:style>
+          <a:lnRef idx="2">
+            <a:schemeClr val="accent1"/>
+          </a:lnRef>
+          <a:fillRef idx="0">
+            <a:schemeClr val="accent1"/>
+          </a:fillRef>
+          <a:effectRef idx="1">
+            <a:schemeClr val="accent1"/>
+          </a:effectRef>
+          <a:fontRef idx="minor">
+            <a:schemeClr val="tx1"/>
+          </a:fontRef>
+        </p:style>
+      </p:cxnSp>
+      <p:cxnSp>
+        <p:nvCxnSpPr>
+          <p:cNvPr id="34" name="Straight Arrow Connector 33">
+            <a:extLst>
+              <a:ext uri="{FF2B5EF4-FFF2-40B4-BE49-F238E27FC236}">
+                <a16:creationId xmlns:a16="http://schemas.microsoft.com/office/drawing/2014/main" id="{F2FC9D7A-3BD1-1A50-F3E8-7D0346ABC67B}"/>
+              </a:ext>
+            </a:extLst>
+          </p:cNvPr>
+          <p:cNvCxnSpPr>
+            <a:cxnSpLocks/>
+          </p:cNvCxnSpPr>
+          <p:nvPr/>
+        </p:nvCxnSpPr>
+        <p:spPr>
+          <a:xfrm flipH="1">
+            <a:off x="1462203" y="4531058"/>
+            <a:ext cx="486038" cy="0"/>
+          </a:xfrm>
+          <a:prstGeom prst="straightConnector1">
+            <a:avLst/>
+          </a:prstGeom>
+          <a:ln>
+            <a:solidFill>
+              <a:schemeClr val="tx1"/>
+            </a:solidFill>
+            <a:tailEnd type="triangle"/>
+          </a:ln>
+        </p:spPr>
+        <p:style>
+          <a:lnRef idx="2">
+            <a:schemeClr val="accent1"/>
+          </a:lnRef>
+          <a:fillRef idx="0">
+            <a:schemeClr val="accent1"/>
+          </a:fillRef>
+          <a:effectRef idx="1">
+            <a:schemeClr val="accent1"/>
+          </a:effectRef>
+          <a:fontRef idx="minor">
+            <a:schemeClr val="tx1"/>
+          </a:fontRef>
+        </p:style>
+      </p:cxnSp>
+      <p:cxnSp>
+        <p:nvCxnSpPr>
+          <p:cNvPr id="52" name="Straight Arrow Connector 51">
+            <a:extLst>
+              <a:ext uri="{FF2B5EF4-FFF2-40B4-BE49-F238E27FC236}">
+                <a16:creationId xmlns:a16="http://schemas.microsoft.com/office/drawing/2014/main" id="{79B04127-DEA6-8477-48AD-4867ED5E2D16}"/>
+              </a:ext>
+            </a:extLst>
+          </p:cNvPr>
+          <p:cNvCxnSpPr>
+            <a:cxnSpLocks/>
+          </p:cNvCxnSpPr>
+          <p:nvPr/>
+        </p:nvCxnSpPr>
+        <p:spPr>
+          <a:xfrm flipV="1">
+            <a:off x="4895880" y="2647164"/>
+            <a:ext cx="588202" cy="8437"/>
+          </a:xfrm>
+          <a:prstGeom prst="straightConnector1">
+            <a:avLst/>
+          </a:prstGeom>
+          <a:ln>
+            <a:solidFill>
+              <a:schemeClr val="tx1"/>
+            </a:solidFill>
+            <a:tailEnd type="triangle"/>
+          </a:ln>
+        </p:spPr>
+        <p:style>
+          <a:lnRef idx="2">
+            <a:schemeClr val="accent1"/>
+          </a:lnRef>
+          <a:fillRef idx="0">
+            <a:schemeClr val="accent1"/>
+          </a:fillRef>
+          <a:effectRef idx="1">
+            <a:schemeClr val="accent1"/>
+          </a:effectRef>
+          <a:fontRef idx="minor">
+            <a:schemeClr val="tx1"/>
+          </a:fontRef>
+        </p:style>
+      </p:cxnSp>
+      <p:sp>
+        <p:nvSpPr>
+          <p:cNvPr id="1048" name="Rounded Rectangle 1047">
+            <a:extLst>
+              <a:ext uri="{FF2B5EF4-FFF2-40B4-BE49-F238E27FC236}">
+                <a16:creationId xmlns:a16="http://schemas.microsoft.com/office/drawing/2014/main" id="{2B9F230B-FFDE-0DFD-19B5-A00782787E1D}"/>
+              </a:ext>
+            </a:extLst>
+          </p:cNvPr>
+          <p:cNvSpPr/>
+          <p:nvPr/>
+        </p:nvSpPr>
+        <p:spPr>
+          <a:xfrm>
+            <a:off x="7977095" y="3972235"/>
+            <a:ext cx="1482815" cy="995863"/>
+          </a:xfrm>
+          <a:prstGeom prst="roundRect">
+            <a:avLst/>
+          </a:prstGeom>
+          <a:solidFill>
+            <a:schemeClr val="bg1"/>
+          </a:solidFill>
+          <a:ln>
+            <a:solidFill>
+              <a:schemeClr val="tx2"/>
+            </a:solidFill>
+          </a:ln>
+        </p:spPr>
+        <p:style>
+          <a:lnRef idx="2">
+            <a:schemeClr val="accent1">
+              <a:shade val="15000"/>
+            </a:schemeClr>
+          </a:lnRef>
+          <a:fillRef idx="1">
+            <a:schemeClr val="accent1"/>
+          </a:fillRef>
+          <a:effectRef idx="0">
+            <a:schemeClr val="accent1"/>
+          </a:effectRef>
+          <a:fontRef idx="minor">
+            <a:schemeClr val="lt1"/>
+          </a:fontRef>
+        </p:style>
+        <p:txBody>
+          <a:bodyPr rtlCol="0" anchor="ctr"/>
+          <a:lstStyle/>
+          <a:p>
+            <a:pPr algn="ctr"/>
+            <a:endParaRPr lang="en-US" sz="1400" dirty="0">
+              <a:latin typeface="CMU Sans Serif Medium" panose="02000603000000000000" pitchFamily="2" charset="0"/>
+              <a:ea typeface="CMU Sans Serif Medium" panose="02000603000000000000" pitchFamily="2" charset="0"/>
+              <a:cs typeface="CMU Sans Serif Medium" panose="02000603000000000000" pitchFamily="2" charset="0"/>
+            </a:endParaRPr>
+          </a:p>
+        </p:txBody>
+      </p:sp>
+      <p:sp>
+        <p:nvSpPr>
+          <p:cNvPr id="5" name="Parallelogram 4">
+            <a:extLst>
+              <a:ext uri="{FF2B5EF4-FFF2-40B4-BE49-F238E27FC236}">
+                <a16:creationId xmlns:a16="http://schemas.microsoft.com/office/drawing/2014/main" id="{3A6F471E-423A-0DBB-C079-F2243F66B189}"/>
+              </a:ext>
+            </a:extLst>
+          </p:cNvPr>
+          <p:cNvSpPr/>
+          <p:nvPr/>
+        </p:nvSpPr>
+        <p:spPr>
+          <a:xfrm>
+            <a:off x="2674092" y="2323621"/>
+            <a:ext cx="1253965" cy="708229"/>
+          </a:xfrm>
+          <a:prstGeom prst="parallelogram">
+            <a:avLst/>
+          </a:prstGeom>
+          <a:solidFill>
+            <a:srgbClr val="868686"/>
+          </a:solidFill>
+          <a:ln>
+            <a:noFill/>
+          </a:ln>
+        </p:spPr>
+        <p:style>
+          <a:lnRef idx="2">
+            <a:schemeClr val="accent1">
+              <a:shade val="15000"/>
+            </a:schemeClr>
+          </a:lnRef>
+          <a:fillRef idx="1">
+            <a:schemeClr val="accent1"/>
+          </a:fillRef>
+          <a:effectRef idx="0">
+            <a:schemeClr val="accent1"/>
+          </a:effectRef>
+          <a:fontRef idx="minor">
+            <a:schemeClr val="lt1"/>
+          </a:fontRef>
+        </p:style>
+        <p:txBody>
+          <a:bodyPr rtlCol="0" anchor="ctr"/>
+          <a:lstStyle/>
+          <a:p>
+            <a:pPr algn="ctr"/>
+            <a:r>
+              <a:rPr lang="en-US" sz="1200" dirty="0">
+                <a:latin typeface="CMU Sans Serif Medium" panose="02000603000000000000" pitchFamily="2" charset="0"/>
+                <a:ea typeface="CMU Sans Serif Medium" panose="02000603000000000000" pitchFamily="2" charset="0"/>
+                <a:cs typeface="CMU Sans Serif Medium" panose="02000603000000000000" pitchFamily="2" charset="0"/>
+              </a:rPr>
+              <a:t>comment text</a:t>
+            </a:r>
+          </a:p>
+        </p:txBody>
+      </p:sp>
+      <p:sp>
+        <p:nvSpPr>
+          <p:cNvPr id="6" name="Rectangle 5">
+            <a:extLst>
+              <a:ext uri="{FF2B5EF4-FFF2-40B4-BE49-F238E27FC236}">
+                <a16:creationId xmlns:a16="http://schemas.microsoft.com/office/drawing/2014/main" id="{526E45E5-9EB6-1295-83FA-891A82D2131B}"/>
+              </a:ext>
+            </a:extLst>
+          </p:cNvPr>
+          <p:cNvSpPr/>
+          <p:nvPr/>
+        </p:nvSpPr>
+        <p:spPr>
+          <a:xfrm>
+            <a:off x="10522940" y="5146865"/>
+            <a:ext cx="1102679" cy="788229"/>
+          </a:xfrm>
+          <a:prstGeom prst="rect">
+            <a:avLst/>
+          </a:prstGeom>
+          <a:solidFill>
+            <a:srgbClr val="894D9F"/>
+          </a:solidFill>
+          <a:ln>
+            <a:noFill/>
+          </a:ln>
+        </p:spPr>
+        <p:style>
+          <a:lnRef idx="2">
+            <a:schemeClr val="accent1">
+              <a:shade val="15000"/>
+            </a:schemeClr>
+          </a:lnRef>
+          <a:fillRef idx="1">
+            <a:schemeClr val="accent1"/>
+          </a:fillRef>
+          <a:effectRef idx="0">
+            <a:schemeClr val="accent1"/>
+          </a:effectRef>
+          <a:fontRef idx="minor">
+            <a:schemeClr val="lt1"/>
+          </a:fontRef>
+        </p:style>
+        <p:txBody>
+          <a:bodyPr rtlCol="0" anchor="ctr"/>
+          <a:lstStyle/>
+          <a:p>
+            <a:pPr algn="ctr"/>
+            <a:endParaRPr lang="en-US" sz="1100" dirty="0">
+              <a:solidFill>
+                <a:schemeClr val="bg1"/>
+              </a:solidFill>
+              <a:latin typeface="CMU Sans Serif Medium" panose="02000603000000000000" pitchFamily="2" charset="0"/>
+              <a:ea typeface="CMU Sans Serif Medium" panose="02000603000000000000" pitchFamily="2" charset="0"/>
+              <a:cs typeface="CMU Sans Serif Medium" panose="02000603000000000000" pitchFamily="2" charset="0"/>
+            </a:endParaRPr>
+          </a:p>
+        </p:txBody>
+      </p:sp>
+      <p:sp>
+        <p:nvSpPr>
+          <p:cNvPr id="7" name="Parallelogram 6">
+            <a:extLst>
+              <a:ext uri="{FF2B5EF4-FFF2-40B4-BE49-F238E27FC236}">
+                <a16:creationId xmlns:a16="http://schemas.microsoft.com/office/drawing/2014/main" id="{D0A2EB7B-FCEA-053A-0452-247EDC755DFB}"/>
+              </a:ext>
+            </a:extLst>
+          </p:cNvPr>
+          <p:cNvSpPr/>
+          <p:nvPr/>
+        </p:nvSpPr>
+        <p:spPr>
+          <a:xfrm>
+            <a:off x="10505274" y="1248059"/>
+            <a:ext cx="1120345" cy="714460"/>
+          </a:xfrm>
+          <a:prstGeom prst="parallelogram">
+            <a:avLst/>
+          </a:prstGeom>
+          <a:solidFill>
+            <a:srgbClr val="894D9F"/>
+          </a:solidFill>
+          <a:ln>
+            <a:noFill/>
+          </a:ln>
+        </p:spPr>
+        <p:style>
+          <a:lnRef idx="2">
+            <a:schemeClr val="accent1">
+              <a:shade val="15000"/>
+            </a:schemeClr>
+          </a:lnRef>
+          <a:fillRef idx="1">
+            <a:schemeClr val="accent1"/>
+          </a:fillRef>
+          <a:effectRef idx="0">
+            <a:schemeClr val="accent1"/>
+          </a:effectRef>
+          <a:fontRef idx="minor">
+            <a:schemeClr val="lt1"/>
+          </a:fontRef>
+        </p:style>
+        <p:txBody>
+          <a:bodyPr rtlCol="0" anchor="ctr"/>
+          <a:lstStyle/>
+          <a:p>
+            <a:pPr algn="ctr"/>
+            <a:r>
+              <a:rPr lang="en-US" sz="1100" dirty="0">
+                <a:solidFill>
+                  <a:schemeClr val="bg1"/>
+                </a:solidFill>
+                <a:latin typeface="CMU Sans Serif Medium" panose="02000603000000000000" pitchFamily="2" charset="0"/>
+                <a:ea typeface="CMU Sans Serif Medium" panose="02000603000000000000" pitchFamily="2" charset="0"/>
+                <a:cs typeface="CMU Sans Serif Medium" panose="02000603000000000000" pitchFamily="2" charset="0"/>
+              </a:rPr>
+              <a:t>topics</a:t>
+            </a:r>
+          </a:p>
+        </p:txBody>
+      </p:sp>
+      <p:sp>
+        <p:nvSpPr>
+          <p:cNvPr id="8" name="Parallelogram 7">
+            <a:extLst>
+              <a:ext uri="{FF2B5EF4-FFF2-40B4-BE49-F238E27FC236}">
+                <a16:creationId xmlns:a16="http://schemas.microsoft.com/office/drawing/2014/main" id="{D3A97220-36F4-660B-CD95-E62579A05629}"/>
+              </a:ext>
+            </a:extLst>
+          </p:cNvPr>
+          <p:cNvSpPr/>
+          <p:nvPr/>
+        </p:nvSpPr>
+        <p:spPr>
+          <a:xfrm>
+            <a:off x="10509059" y="2266347"/>
+            <a:ext cx="1102678" cy="657567"/>
+          </a:xfrm>
+          <a:prstGeom prst="parallelogram">
+            <a:avLst/>
+          </a:prstGeom>
+          <a:solidFill>
+            <a:srgbClr val="894D9F"/>
+          </a:solidFill>
+          <a:ln>
+            <a:noFill/>
+          </a:ln>
+        </p:spPr>
+        <p:style>
+          <a:lnRef idx="2">
+            <a:schemeClr val="accent1">
+              <a:shade val="15000"/>
+            </a:schemeClr>
+          </a:lnRef>
+          <a:fillRef idx="1">
+            <a:schemeClr val="accent1"/>
+          </a:fillRef>
+          <a:effectRef idx="0">
+            <a:schemeClr val="accent1"/>
+          </a:effectRef>
+          <a:fontRef idx="minor">
+            <a:schemeClr val="lt1"/>
+          </a:fontRef>
+        </p:style>
+        <p:txBody>
+          <a:bodyPr rtlCol="0" anchor="ctr"/>
+          <a:lstStyle/>
+          <a:p>
+            <a:pPr algn="ctr"/>
+            <a:r>
+              <a:rPr lang="en-US" sz="1100" dirty="0">
+                <a:solidFill>
+                  <a:schemeClr val="bg1"/>
+                </a:solidFill>
+                <a:latin typeface="CMU Sans Serif Medium" panose="02000603000000000000" pitchFamily="2" charset="0"/>
+                <a:ea typeface="CMU Sans Serif Medium" panose="02000603000000000000" pitchFamily="2" charset="0"/>
+                <a:cs typeface="CMU Sans Serif Medium" panose="02000603000000000000" pitchFamily="2" charset="0"/>
+              </a:rPr>
+              <a:t>sentiment scores</a:t>
+            </a:r>
+          </a:p>
+        </p:txBody>
+      </p:sp>
+      <p:sp>
+        <p:nvSpPr>
+          <p:cNvPr id="11" name="Rectangle 10">
+            <a:extLst>
+              <a:ext uri="{FF2B5EF4-FFF2-40B4-BE49-F238E27FC236}">
+                <a16:creationId xmlns:a16="http://schemas.microsoft.com/office/drawing/2014/main" id="{D028CD1E-DD7A-700B-CBFC-E3A83957B058}"/>
+              </a:ext>
+            </a:extLst>
+          </p:cNvPr>
+          <p:cNvSpPr/>
+          <p:nvPr/>
+        </p:nvSpPr>
+        <p:spPr>
+          <a:xfrm>
+            <a:off x="2051592" y="1304135"/>
+            <a:ext cx="1074523" cy="623730"/>
+          </a:xfrm>
+          <a:prstGeom prst="rect">
+            <a:avLst/>
+          </a:prstGeom>
+          <a:solidFill>
+            <a:schemeClr val="bg1"/>
+          </a:solidFill>
+          <a:ln>
+            <a:noFill/>
+          </a:ln>
+        </p:spPr>
+        <p:style>
+          <a:lnRef idx="2">
+            <a:schemeClr val="accent1">
+              <a:shade val="15000"/>
+            </a:schemeClr>
+          </a:lnRef>
+          <a:fillRef idx="1">
+            <a:schemeClr val="accent1"/>
+          </a:fillRef>
+          <a:effectRef idx="0">
+            <a:schemeClr val="accent1"/>
+          </a:effectRef>
+          <a:fontRef idx="minor">
+            <a:schemeClr val="lt1"/>
+          </a:fontRef>
+        </p:style>
+        <p:txBody>
+          <a:bodyPr rtlCol="0" anchor="ctr"/>
+          <a:lstStyle/>
+          <a:p>
+            <a:pPr algn="ctr"/>
+            <a:r>
+              <a:rPr lang="en-US" sz="1200" dirty="0">
+                <a:solidFill>
+                  <a:schemeClr val="tx1">
+                    <a:lumMod val="95000"/>
+                    <a:lumOff val="5000"/>
+                  </a:schemeClr>
+                </a:solidFill>
+                <a:latin typeface="CMU Sans Serif Medium" panose="02000603000000000000" pitchFamily="2" charset="0"/>
+                <a:ea typeface="CMU Sans Serif Medium" panose="02000603000000000000" pitchFamily="2" charset="0"/>
+                <a:cs typeface="CMU Sans Serif Medium" panose="02000603000000000000" pitchFamily="2" charset="0"/>
+              </a:rPr>
+              <a:t>chunk</a:t>
+            </a:r>
+          </a:p>
+        </p:txBody>
+      </p:sp>
+      <p:sp>
+        <p:nvSpPr>
+          <p:cNvPr id="12" name="Parallelogram 11">
+            <a:extLst>
+              <a:ext uri="{FF2B5EF4-FFF2-40B4-BE49-F238E27FC236}">
+                <a16:creationId xmlns:a16="http://schemas.microsoft.com/office/drawing/2014/main" id="{C7F128DE-0C62-F904-DA42-54701CF1E93C}"/>
+              </a:ext>
+            </a:extLst>
+          </p:cNvPr>
+          <p:cNvSpPr/>
+          <p:nvPr/>
+        </p:nvSpPr>
+        <p:spPr>
+          <a:xfrm>
+            <a:off x="10492842" y="3233795"/>
+            <a:ext cx="1102678" cy="637145"/>
+          </a:xfrm>
+          <a:prstGeom prst="parallelogram">
+            <a:avLst/>
+          </a:prstGeom>
+          <a:solidFill>
+            <a:srgbClr val="894D9F"/>
+          </a:solidFill>
+          <a:ln>
+            <a:noFill/>
+          </a:ln>
+        </p:spPr>
+        <p:style>
+          <a:lnRef idx="2">
+            <a:schemeClr val="accent1">
+              <a:shade val="15000"/>
+            </a:schemeClr>
+          </a:lnRef>
+          <a:fillRef idx="1">
+            <a:schemeClr val="accent1"/>
+          </a:fillRef>
+          <a:effectRef idx="0">
+            <a:schemeClr val="accent1"/>
+          </a:effectRef>
+          <a:fontRef idx="minor">
+            <a:schemeClr val="lt1"/>
+          </a:fontRef>
+        </p:style>
+        <p:txBody>
+          <a:bodyPr rtlCol="0" anchor="ctr"/>
+          <a:lstStyle/>
+          <a:p>
+            <a:pPr algn="ctr"/>
+            <a:endParaRPr lang="en-US" sz="1100" dirty="0">
+              <a:solidFill>
+                <a:schemeClr val="bg1"/>
+              </a:solidFill>
+              <a:latin typeface="CMU Sans Serif Medium" panose="02000603000000000000" pitchFamily="2" charset="0"/>
+              <a:ea typeface="CMU Sans Serif Medium" panose="02000603000000000000" pitchFamily="2" charset="0"/>
+              <a:cs typeface="CMU Sans Serif Medium" panose="02000603000000000000" pitchFamily="2" charset="0"/>
+            </a:endParaRPr>
+          </a:p>
+        </p:txBody>
+      </p:sp>
+      <p:sp>
+        <p:nvSpPr>
+          <p:cNvPr id="13" name="Rectangle 12">
+            <a:extLst>
+              <a:ext uri="{FF2B5EF4-FFF2-40B4-BE49-F238E27FC236}">
+                <a16:creationId xmlns:a16="http://schemas.microsoft.com/office/drawing/2014/main" id="{00E5A97D-4BDF-9C6A-6AC6-AFDD518DBC13}"/>
+              </a:ext>
+            </a:extLst>
+          </p:cNvPr>
+          <p:cNvSpPr/>
+          <p:nvPr/>
+        </p:nvSpPr>
+        <p:spPr>
+          <a:xfrm>
+            <a:off x="3244018" y="1309342"/>
+            <a:ext cx="1225377" cy="623730"/>
+          </a:xfrm>
+          <a:prstGeom prst="rect">
+            <a:avLst/>
+          </a:prstGeom>
+          <a:solidFill>
+            <a:schemeClr val="bg1"/>
+          </a:solidFill>
+          <a:ln>
+            <a:noFill/>
+          </a:ln>
+        </p:spPr>
+        <p:style>
+          <a:lnRef idx="2">
+            <a:schemeClr val="accent1">
+              <a:shade val="15000"/>
+            </a:schemeClr>
+          </a:lnRef>
+          <a:fillRef idx="1">
+            <a:schemeClr val="accent1"/>
+          </a:fillRef>
+          <a:effectRef idx="0">
+            <a:schemeClr val="accent1"/>
+          </a:effectRef>
+          <a:fontRef idx="minor">
+            <a:schemeClr val="lt1"/>
+          </a:fontRef>
+        </p:style>
+        <p:txBody>
+          <a:bodyPr rtlCol="0" anchor="ctr"/>
+          <a:lstStyle/>
+          <a:p>
+            <a:pPr algn="ctr"/>
+            <a:r>
+              <a:rPr lang="en-US" sz="1200" dirty="0">
+                <a:solidFill>
+                  <a:sysClr val="windowText" lastClr="000000"/>
+                </a:solidFill>
+                <a:latin typeface="CMU Sans Serif Medium" panose="02000603000000000000" pitchFamily="2" charset="0"/>
+                <a:ea typeface="CMU Sans Serif Medium" panose="02000603000000000000" pitchFamily="2" charset="0"/>
+                <a:cs typeface="CMU Sans Serif Medium" panose="02000603000000000000" pitchFamily="2" charset="0"/>
+              </a:rPr>
+              <a:t>generate soft-labelled set </a:t>
+            </a:r>
+          </a:p>
+        </p:txBody>
+      </p:sp>
+      <p:sp>
+        <p:nvSpPr>
+          <p:cNvPr id="14" name="Rectangle 13">
+            <a:extLst>
+              <a:ext uri="{FF2B5EF4-FFF2-40B4-BE49-F238E27FC236}">
+                <a16:creationId xmlns:a16="http://schemas.microsoft.com/office/drawing/2014/main" id="{D772B7A3-F73F-6D8B-C952-26987A3B4EED}"/>
+              </a:ext>
+            </a:extLst>
+          </p:cNvPr>
+          <p:cNvSpPr/>
+          <p:nvPr/>
+        </p:nvSpPr>
+        <p:spPr>
+          <a:xfrm>
+            <a:off x="4583180" y="1304135"/>
+            <a:ext cx="1074523" cy="623730"/>
+          </a:xfrm>
+          <a:prstGeom prst="rect">
+            <a:avLst/>
+          </a:prstGeom>
+          <a:solidFill>
+            <a:schemeClr val="bg1"/>
+          </a:solidFill>
+          <a:ln>
+            <a:noFill/>
+          </a:ln>
+        </p:spPr>
+        <p:style>
+          <a:lnRef idx="2">
+            <a:schemeClr val="accent1">
+              <a:shade val="15000"/>
+            </a:schemeClr>
+          </a:lnRef>
+          <a:fillRef idx="1">
+            <a:schemeClr val="accent1"/>
+          </a:fillRef>
+          <a:effectRef idx="0">
+            <a:schemeClr val="accent1"/>
+          </a:effectRef>
+          <a:fontRef idx="minor">
+            <a:schemeClr val="lt1"/>
+          </a:fontRef>
+        </p:style>
+        <p:txBody>
+          <a:bodyPr rtlCol="0" anchor="ctr"/>
+          <a:lstStyle/>
+          <a:p>
+            <a:pPr algn="ctr"/>
+            <a:r>
+              <a:rPr lang="en-US" sz="1200" dirty="0">
+                <a:solidFill>
+                  <a:sysClr val="windowText" lastClr="000000"/>
+                </a:solidFill>
+                <a:latin typeface="CMU Sans Serif Medium" panose="02000603000000000000" pitchFamily="2" charset="0"/>
+                <a:ea typeface="CMU Sans Serif Medium" panose="02000603000000000000" pitchFamily="2" charset="0"/>
+                <a:cs typeface="CMU Sans Serif Medium" panose="02000603000000000000" pitchFamily="2" charset="0"/>
+              </a:rPr>
+              <a:t>train</a:t>
+            </a:r>
+          </a:p>
+        </p:txBody>
+      </p:sp>
+      <p:sp>
+        <p:nvSpPr>
+          <p:cNvPr id="16" name="TextBox 15">
+            <a:extLst>
+              <a:ext uri="{FF2B5EF4-FFF2-40B4-BE49-F238E27FC236}">
+                <a16:creationId xmlns:a16="http://schemas.microsoft.com/office/drawing/2014/main" id="{81064B6B-9B67-4301-5F55-3B320187E984}"/>
+              </a:ext>
+            </a:extLst>
+          </p:cNvPr>
+          <p:cNvSpPr txBox="1"/>
+          <p:nvPr/>
+        </p:nvSpPr>
+        <p:spPr>
+          <a:xfrm>
+            <a:off x="1944687" y="1008461"/>
+            <a:ext cx="3849663" cy="276999"/>
+          </a:xfrm>
+          <a:prstGeom prst="rect">
+            <a:avLst/>
+          </a:prstGeom>
+          <a:noFill/>
+        </p:spPr>
+        <p:txBody>
+          <a:bodyPr wrap="square" rtlCol="0">
+            <a:spAutoFit/>
+          </a:bodyPr>
+          <a:lstStyle/>
+          <a:p>
+            <a:pPr algn="r"/>
+            <a:r>
+              <a:rPr lang="en-US" sz="1200" i="1" dirty="0">
+                <a:solidFill>
+                  <a:schemeClr val="tx1">
+                    <a:lumMod val="95000"/>
+                    <a:lumOff val="5000"/>
+                  </a:schemeClr>
+                </a:solidFill>
+                <a:latin typeface="CMU Sans Serif Medium" panose="02000603000000000000" pitchFamily="2" charset="0"/>
+                <a:ea typeface="CMU Sans Serif Medium" panose="02000603000000000000" pitchFamily="2" charset="0"/>
+                <a:cs typeface="CMU Sans Serif Medium" panose="02000603000000000000" pitchFamily="2" charset="0"/>
+              </a:rPr>
+              <a:t>weak learning</a:t>
+            </a:r>
+          </a:p>
+        </p:txBody>
+      </p:sp>
+      <p:sp>
+        <p:nvSpPr>
+          <p:cNvPr id="44" name="TextBox 43">
+            <a:extLst>
+              <a:ext uri="{FF2B5EF4-FFF2-40B4-BE49-F238E27FC236}">
+                <a16:creationId xmlns:a16="http://schemas.microsoft.com/office/drawing/2014/main" id="{A7CB5740-EFEB-58B3-5D5D-071018618F66}"/>
+              </a:ext>
+            </a:extLst>
+          </p:cNvPr>
+          <p:cNvSpPr txBox="1"/>
+          <p:nvPr/>
+        </p:nvSpPr>
+        <p:spPr>
+          <a:xfrm>
+            <a:off x="118519" y="2530996"/>
+            <a:ext cx="1554750" cy="880369"/>
+          </a:xfrm>
+          <a:prstGeom prst="rect">
+            <a:avLst/>
+          </a:prstGeom>
+          <a:noFill/>
+        </p:spPr>
+        <p:txBody>
+          <a:bodyPr wrap="square" rtlCol="0">
+            <a:spAutoFit/>
+          </a:bodyPr>
+          <a:lstStyle/>
+          <a:p>
+            <a:pPr algn="ctr">
+              <a:lnSpc>
+                <a:spcPct val="150000"/>
+              </a:lnSpc>
+            </a:pPr>
+            <a:r>
+              <a:rPr lang="en-US" b="1" dirty="0">
+                <a:solidFill>
+                  <a:schemeClr val="tx1">
+                    <a:lumMod val="75000"/>
+                    <a:lumOff val="25000"/>
+                  </a:schemeClr>
+                </a:solidFill>
+                <a:latin typeface="Calibri" panose="020F0502020204030204" pitchFamily="34" charset="0"/>
+                <a:cs typeface="Calibri" panose="020F0502020204030204" pitchFamily="34" charset="0"/>
+              </a:rPr>
+              <a:t>community </a:t>
+            </a:r>
+          </a:p>
+          <a:p>
+            <a:pPr algn="ctr">
+              <a:lnSpc>
+                <a:spcPct val="150000"/>
+              </a:lnSpc>
+            </a:pPr>
+            <a:r>
+              <a:rPr lang="en-US" b="1" dirty="0">
+                <a:solidFill>
+                  <a:schemeClr val="tx1">
+                    <a:lumMod val="75000"/>
+                    <a:lumOff val="25000"/>
+                  </a:schemeClr>
+                </a:solidFill>
+                <a:latin typeface="Calibri" panose="020F0502020204030204" pitchFamily="34" charset="0"/>
+                <a:cs typeface="Calibri" panose="020F0502020204030204" pitchFamily="34" charset="0"/>
+              </a:rPr>
+              <a:t>comments</a:t>
+            </a:r>
+          </a:p>
+        </p:txBody>
+      </p:sp>
+      <p:sp>
+        <p:nvSpPr>
+          <p:cNvPr id="45" name="TextBox 44">
+            <a:extLst>
+              <a:ext uri="{FF2B5EF4-FFF2-40B4-BE49-F238E27FC236}">
+                <a16:creationId xmlns:a16="http://schemas.microsoft.com/office/drawing/2014/main" id="{8B356B94-D48F-82A7-130B-3DD4D75D7914}"/>
+              </a:ext>
+            </a:extLst>
+          </p:cNvPr>
+          <p:cNvSpPr txBox="1"/>
+          <p:nvPr/>
+        </p:nvSpPr>
+        <p:spPr>
+          <a:xfrm>
+            <a:off x="118519" y="2734938"/>
+            <a:ext cx="1554750" cy="523220"/>
+          </a:xfrm>
+          <a:prstGeom prst="rect">
+            <a:avLst/>
+          </a:prstGeom>
+          <a:noFill/>
+        </p:spPr>
+        <p:txBody>
+          <a:bodyPr wrap="square">
+            <a:spAutoFit/>
+          </a:bodyPr>
+          <a:lstStyle/>
+          <a:p>
+            <a:pPr algn="ctr"/>
+            <a:r>
+              <a:rPr lang="en-US" sz="2800" i="1" dirty="0">
+                <a:solidFill>
+                  <a:srgbClr val="F657C9"/>
+                </a:solidFill>
+                <a:latin typeface="AngsanaUPC" panose="020B0604020202020204" pitchFamily="34" charset="0"/>
+                <a:cs typeface="AngsanaUPC" panose="020B0604020202020204" pitchFamily="34" charset="0"/>
+              </a:rPr>
+              <a:t>web-scraped</a:t>
+            </a:r>
+            <a:endParaRPr lang="en-US" sz="2800" dirty="0">
+              <a:solidFill>
+                <a:srgbClr val="F657C9"/>
+              </a:solidFill>
+            </a:endParaRPr>
+          </a:p>
+        </p:txBody>
+      </p:sp>
+      <p:pic>
+        <p:nvPicPr>
+          <p:cNvPr id="66" name="Picture 65" descr="A logo with colorful dots and lines&#10;&#10;AI-generated content may be incorrect.">
+            <a:extLst>
+              <a:ext uri="{FF2B5EF4-FFF2-40B4-BE49-F238E27FC236}">
+                <a16:creationId xmlns:a16="http://schemas.microsoft.com/office/drawing/2014/main" id="{9DD3ADE3-97F8-0659-3106-EBA1E977AA4E}"/>
+              </a:ext>
+            </a:extLst>
+          </p:cNvPr>
+          <p:cNvPicPr>
+            <a:picLocks noChangeAspect="1"/>
+          </p:cNvPicPr>
+          <p:nvPr/>
+        </p:nvPicPr>
+        <p:blipFill>
+          <a:blip r:embed="rId2"/>
+          <a:stretch>
+            <a:fillRect/>
+          </a:stretch>
+        </p:blipFill>
+        <p:spPr>
+          <a:xfrm>
+            <a:off x="8098607" y="4076815"/>
+            <a:ext cx="1256270" cy="802617"/>
+          </a:xfrm>
+          <a:prstGeom prst="rect">
+            <a:avLst/>
+          </a:prstGeom>
+          <a:ln>
+            <a:noFill/>
+          </a:ln>
+        </p:spPr>
+      </p:pic>
+      <p:sp>
+        <p:nvSpPr>
+          <p:cNvPr id="138" name="Rectangle 137">
+            <a:extLst>
+              <a:ext uri="{FF2B5EF4-FFF2-40B4-BE49-F238E27FC236}">
+                <a16:creationId xmlns:a16="http://schemas.microsoft.com/office/drawing/2014/main" id="{11A05189-C3F6-8AE7-BC37-86B2F068992D}"/>
+              </a:ext>
+            </a:extLst>
+          </p:cNvPr>
+          <p:cNvSpPr/>
+          <p:nvPr/>
+        </p:nvSpPr>
+        <p:spPr>
+          <a:xfrm>
+            <a:off x="10522941" y="4187084"/>
+            <a:ext cx="1102678" cy="637145"/>
+          </a:xfrm>
+          <a:prstGeom prst="rect">
+            <a:avLst/>
+          </a:prstGeom>
+          <a:solidFill>
+            <a:srgbClr val="894D9F"/>
+          </a:solidFill>
+          <a:ln>
+            <a:noFill/>
+          </a:ln>
+        </p:spPr>
+        <p:style>
+          <a:lnRef idx="2">
+            <a:schemeClr val="accent1">
+              <a:shade val="15000"/>
+            </a:schemeClr>
+          </a:lnRef>
+          <a:fillRef idx="1">
+            <a:schemeClr val="accent1"/>
+          </a:fillRef>
+          <a:effectRef idx="0">
+            <a:schemeClr val="accent1"/>
+          </a:effectRef>
+          <a:fontRef idx="minor">
+            <a:schemeClr val="lt1"/>
+          </a:fontRef>
+        </p:style>
+        <p:txBody>
+          <a:bodyPr rtlCol="0" anchor="ctr"/>
+          <a:lstStyle/>
+          <a:p>
+            <a:pPr algn="ctr"/>
+            <a:r>
+              <a:rPr lang="en-US" sz="1100" dirty="0">
+                <a:solidFill>
+                  <a:schemeClr val="bg1"/>
+                </a:solidFill>
+                <a:latin typeface="CMU Sans Serif Medium" panose="02000603000000000000" pitchFamily="2" charset="0"/>
+                <a:ea typeface="CMU Sans Serif Medium" panose="02000603000000000000" pitchFamily="2" charset="0"/>
+                <a:cs typeface="CMU Sans Serif Medium" panose="02000603000000000000" pitchFamily="2" charset="0"/>
+              </a:rPr>
+              <a:t>planning application</a:t>
+            </a:r>
+          </a:p>
+          <a:p>
+            <a:pPr algn="ctr"/>
+            <a:r>
+              <a:rPr lang="en-US" sz="1100" dirty="0">
+                <a:solidFill>
+                  <a:schemeClr val="bg1"/>
+                </a:solidFill>
+                <a:latin typeface="CMU Sans Serif Medium" panose="02000603000000000000" pitchFamily="2" charset="0"/>
+                <a:ea typeface="CMU Sans Serif Medium" panose="02000603000000000000" pitchFamily="2" charset="0"/>
+                <a:cs typeface="CMU Sans Serif Medium" panose="02000603000000000000" pitchFamily="2" charset="0"/>
+              </a:rPr>
+              <a:t>details</a:t>
+            </a:r>
+          </a:p>
+        </p:txBody>
+      </p:sp>
+      <p:sp>
+        <p:nvSpPr>
+          <p:cNvPr id="139" name="Parallelogram 138">
+            <a:extLst>
+              <a:ext uri="{FF2B5EF4-FFF2-40B4-BE49-F238E27FC236}">
+                <a16:creationId xmlns:a16="http://schemas.microsoft.com/office/drawing/2014/main" id="{B533E0DB-19FC-5DA9-D79B-B05BA69671DD}"/>
+              </a:ext>
+            </a:extLst>
+          </p:cNvPr>
+          <p:cNvSpPr/>
+          <p:nvPr/>
+        </p:nvSpPr>
+        <p:spPr>
+          <a:xfrm>
+            <a:off x="1815033" y="4163944"/>
+            <a:ext cx="1286396" cy="719883"/>
+          </a:xfrm>
+          <a:prstGeom prst="parallelogram">
+            <a:avLst/>
+          </a:prstGeom>
+          <a:solidFill>
+            <a:srgbClr val="868686"/>
+          </a:solidFill>
+          <a:ln>
+            <a:noFill/>
+          </a:ln>
+        </p:spPr>
+        <p:style>
+          <a:lnRef idx="2">
+            <a:schemeClr val="accent1">
+              <a:shade val="15000"/>
+            </a:schemeClr>
+          </a:lnRef>
+          <a:fillRef idx="1">
+            <a:schemeClr val="accent1"/>
+          </a:fillRef>
+          <a:effectRef idx="0">
+            <a:schemeClr val="accent1"/>
+          </a:effectRef>
+          <a:fontRef idx="minor">
+            <a:schemeClr val="lt1"/>
+          </a:fontRef>
+        </p:style>
+        <p:txBody>
+          <a:bodyPr rtlCol="0" anchor="ctr"/>
+          <a:lstStyle/>
+          <a:p>
+            <a:pPr algn="ctr"/>
+            <a:r>
+              <a:rPr lang="en-US" sz="1200" dirty="0">
+                <a:latin typeface="CMU Sans Serif Medium" panose="02000603000000000000" pitchFamily="2" charset="0"/>
+                <a:ea typeface="CMU Sans Serif Medium" panose="02000603000000000000" pitchFamily="2" charset="0"/>
+                <a:cs typeface="CMU Sans Serif Medium" panose="02000603000000000000" pitchFamily="2" charset="0"/>
+              </a:rPr>
+              <a:t>planning application IDs</a:t>
+            </a:r>
+          </a:p>
+        </p:txBody>
+      </p:sp>
+      <p:sp>
+        <p:nvSpPr>
+          <p:cNvPr id="146" name="Rectangle 145">
+            <a:extLst>
+              <a:ext uri="{FF2B5EF4-FFF2-40B4-BE49-F238E27FC236}">
+                <a16:creationId xmlns:a16="http://schemas.microsoft.com/office/drawing/2014/main" id="{73286D20-F0DF-0258-AECB-8EC4464A6404}"/>
+              </a:ext>
+            </a:extLst>
+          </p:cNvPr>
+          <p:cNvSpPr/>
+          <p:nvPr/>
+        </p:nvSpPr>
+        <p:spPr>
+          <a:xfrm>
+            <a:off x="372203" y="4233517"/>
+            <a:ext cx="1102678" cy="637145"/>
+          </a:xfrm>
+          <a:prstGeom prst="rect">
+            <a:avLst/>
+          </a:prstGeom>
+          <a:solidFill>
+            <a:srgbClr val="868686"/>
+          </a:solidFill>
+          <a:ln>
+            <a:noFill/>
+          </a:ln>
+        </p:spPr>
+        <p:style>
+          <a:lnRef idx="2">
+            <a:schemeClr val="accent1">
+              <a:shade val="15000"/>
+            </a:schemeClr>
+          </a:lnRef>
+          <a:fillRef idx="1">
+            <a:schemeClr val="accent1"/>
+          </a:fillRef>
+          <a:effectRef idx="0">
+            <a:schemeClr val="accent1"/>
+          </a:effectRef>
+          <a:fontRef idx="minor">
+            <a:schemeClr val="lt1"/>
+          </a:fontRef>
+        </p:style>
+        <p:txBody>
+          <a:bodyPr rtlCol="0" anchor="ctr"/>
+          <a:lstStyle/>
+          <a:p>
+            <a:pPr algn="ctr"/>
+            <a:r>
+              <a:rPr lang="en-US" sz="1200" dirty="0">
+                <a:latin typeface="CMU Sans Serif Medium" panose="02000603000000000000" pitchFamily="2" charset="0"/>
+                <a:ea typeface="CMU Sans Serif Medium" panose="02000603000000000000" pitchFamily="2" charset="0"/>
+                <a:cs typeface="CMU Sans Serif Medium" panose="02000603000000000000" pitchFamily="2" charset="0"/>
+              </a:rPr>
+              <a:t>web-scraping pipeline</a:t>
+            </a:r>
+          </a:p>
+        </p:txBody>
+      </p:sp>
+      <p:sp>
+        <p:nvSpPr>
+          <p:cNvPr id="1051" name="Rounded Rectangle 1050">
+            <a:extLst>
+              <a:ext uri="{FF2B5EF4-FFF2-40B4-BE49-F238E27FC236}">
+                <a16:creationId xmlns:a16="http://schemas.microsoft.com/office/drawing/2014/main" id="{C3688217-DF0F-5F70-8568-11B0A449482C}"/>
+              </a:ext>
+            </a:extLst>
+          </p:cNvPr>
+          <p:cNvSpPr/>
+          <p:nvPr/>
+        </p:nvSpPr>
+        <p:spPr>
+          <a:xfrm>
+            <a:off x="7977095" y="5039140"/>
+            <a:ext cx="1482815" cy="995863"/>
+          </a:xfrm>
+          <a:prstGeom prst="roundRect">
+            <a:avLst/>
+          </a:prstGeom>
+          <a:solidFill>
+            <a:schemeClr val="bg1"/>
+          </a:solidFill>
+          <a:ln>
+            <a:solidFill>
+              <a:schemeClr val="tx2"/>
+            </a:solidFill>
+          </a:ln>
+        </p:spPr>
+        <p:style>
+          <a:lnRef idx="2">
+            <a:schemeClr val="accent1">
+              <a:shade val="15000"/>
+            </a:schemeClr>
+          </a:lnRef>
+          <a:fillRef idx="1">
+            <a:schemeClr val="accent1"/>
+          </a:fillRef>
+          <a:effectRef idx="0">
+            <a:schemeClr val="accent1"/>
+          </a:effectRef>
+          <a:fontRef idx="minor">
+            <a:schemeClr val="lt1"/>
+          </a:fontRef>
+        </p:style>
+        <p:txBody>
+          <a:bodyPr rtlCol="0" anchor="ctr"/>
+          <a:lstStyle/>
+          <a:p>
+            <a:pPr algn="ctr"/>
+            <a:endParaRPr lang="en-US" sz="1400" dirty="0">
+              <a:latin typeface="CMU Sans Serif Medium" panose="02000603000000000000" pitchFamily="2" charset="0"/>
+              <a:ea typeface="CMU Sans Serif Medium" panose="02000603000000000000" pitchFamily="2" charset="0"/>
+              <a:cs typeface="CMU Sans Serif Medium" panose="02000603000000000000" pitchFamily="2" charset="0"/>
+            </a:endParaRPr>
+          </a:p>
+        </p:txBody>
+      </p:sp>
+      <p:pic>
+        <p:nvPicPr>
+          <p:cNvPr id="1026" name="Picture 2" descr="2021–2022 United Kingdom censuses - Wikipedia">
+            <a:extLst>
+              <a:ext uri="{FF2B5EF4-FFF2-40B4-BE49-F238E27FC236}">
+                <a16:creationId xmlns:a16="http://schemas.microsoft.com/office/drawing/2014/main" id="{6E545F29-2A51-ADFF-FA44-77623E4EE9F1}"/>
+              </a:ext>
+            </a:extLst>
+          </p:cNvPr>
+          <p:cNvPicPr>
+            <a:picLocks noChangeAspect="1" noChangeArrowheads="1"/>
+          </p:cNvPicPr>
+          <p:nvPr/>
+        </p:nvPicPr>
+        <p:blipFill>
+          <a:blip r:embed="rId3">
+            <a:extLst>
+              <a:ext uri="{28A0092B-C50C-407E-A947-70E740481C1C}">
+                <a14:useLocalDpi xmlns:a14="http://schemas.microsoft.com/office/drawing/2010/main" val="0"/>
+              </a:ext>
+            </a:extLst>
+          </a:blip>
+          <a:srcRect/>
+          <a:stretch>
+            <a:fillRect/>
+          </a:stretch>
+        </p:blipFill>
+        <p:spPr bwMode="auto">
+          <a:xfrm>
+            <a:off x="8119589" y="5313640"/>
+            <a:ext cx="1123349" cy="443782"/>
+          </a:xfrm>
+          <a:prstGeom prst="rect">
+            <a:avLst/>
+          </a:prstGeom>
+          <a:noFill/>
+          <a:ln>
+            <a:noFill/>
+          </a:ln>
+          <a:extLst>
+            <a:ext uri="{909E8E84-426E-40DD-AFC4-6F175D3DCCD1}">
+              <a14:hiddenFill xmlns:a14="http://schemas.microsoft.com/office/drawing/2010/main">
+                <a:solidFill>
+                  <a:srgbClr val="FFFFFF"/>
+                </a:solidFill>
+              </a14:hiddenFill>
+            </a:ext>
+          </a:extLst>
+        </p:spPr>
+      </p:pic>
+      <p:cxnSp>
+        <p:nvCxnSpPr>
+          <p:cNvPr id="175" name="Elbow Connector 174">
+            <a:extLst>
+              <a:ext uri="{FF2B5EF4-FFF2-40B4-BE49-F238E27FC236}">
+                <a16:creationId xmlns:a16="http://schemas.microsoft.com/office/drawing/2014/main" id="{CBB031F5-B534-F96D-160E-F9B69BEB6135}"/>
+              </a:ext>
+            </a:extLst>
+          </p:cNvPr>
+          <p:cNvCxnSpPr>
+            <a:cxnSpLocks/>
+            <a:stCxn id="3" idx="0"/>
+            <a:endCxn id="172" idx="2"/>
+          </p:cNvCxnSpPr>
+          <p:nvPr/>
+        </p:nvCxnSpPr>
+        <p:spPr>
+          <a:xfrm rot="16200000" flipV="1">
+            <a:off x="4799063" y="1112859"/>
+            <a:ext cx="282518" cy="2139006"/>
+          </a:xfrm>
+          <a:prstGeom prst="bentConnector3">
+            <a:avLst>
+              <a:gd name="adj1" fmla="val 50000"/>
+            </a:avLst>
+          </a:prstGeom>
+          <a:ln w="19050">
+            <a:solidFill>
+              <a:schemeClr val="tx1"/>
+            </a:solidFill>
+            <a:tailEnd type="triangle"/>
+          </a:ln>
+        </p:spPr>
+        <p:style>
+          <a:lnRef idx="1">
+            <a:schemeClr val="accent1"/>
+          </a:lnRef>
+          <a:fillRef idx="0">
+            <a:schemeClr val="accent1"/>
+          </a:fillRef>
+          <a:effectRef idx="0">
+            <a:schemeClr val="accent1"/>
+          </a:effectRef>
+          <a:fontRef idx="minor">
+            <a:schemeClr val="tx1"/>
+          </a:fontRef>
+        </p:style>
+      </p:cxnSp>
+      <p:sp>
+        <p:nvSpPr>
+          <p:cNvPr id="183" name="TextBox 182">
+            <a:extLst>
+              <a:ext uri="{FF2B5EF4-FFF2-40B4-BE49-F238E27FC236}">
+                <a16:creationId xmlns:a16="http://schemas.microsoft.com/office/drawing/2014/main" id="{CB585C7F-FBC4-8939-FEB7-A2B1038E1AF9}"/>
+              </a:ext>
+            </a:extLst>
+          </p:cNvPr>
+          <p:cNvSpPr txBox="1"/>
+          <p:nvPr/>
+        </p:nvSpPr>
+        <p:spPr>
+          <a:xfrm rot="16200000">
+            <a:off x="10936542" y="4913522"/>
+            <a:ext cx="1965963" cy="276999"/>
+          </a:xfrm>
+          <a:prstGeom prst="rect">
+            <a:avLst/>
+          </a:prstGeom>
+          <a:noFill/>
+        </p:spPr>
+        <p:txBody>
+          <a:bodyPr wrap="square" rtlCol="0">
+            <a:spAutoFit/>
+          </a:bodyPr>
+          <a:lstStyle/>
+          <a:p>
+            <a:pPr algn="l"/>
+            <a:r>
+              <a:rPr lang="en-US" sz="1200" dirty="0">
+                <a:solidFill>
+                  <a:schemeClr val="tx1">
+                    <a:lumMod val="95000"/>
+                    <a:lumOff val="5000"/>
+                  </a:schemeClr>
+                </a:solidFill>
+                <a:latin typeface="CMU Sans Serif Medium" panose="02000603000000000000" pitchFamily="2" charset="0"/>
+                <a:ea typeface="CMU Sans Serif Medium" panose="02000603000000000000" pitchFamily="2" charset="0"/>
+                <a:cs typeface="CMU Sans Serif Medium" panose="02000603000000000000" pitchFamily="2" charset="0"/>
+              </a:rPr>
+              <a:t>variables used in analysis</a:t>
+            </a:r>
+          </a:p>
+        </p:txBody>
+      </p:sp>
+      <p:sp>
+        <p:nvSpPr>
+          <p:cNvPr id="1035" name="TextBox 1034">
+            <a:extLst>
+              <a:ext uri="{FF2B5EF4-FFF2-40B4-BE49-F238E27FC236}">
+                <a16:creationId xmlns:a16="http://schemas.microsoft.com/office/drawing/2014/main" id="{517A98ED-8A50-3C73-4120-B0FA0779EB84}"/>
+              </a:ext>
+            </a:extLst>
+          </p:cNvPr>
+          <p:cNvSpPr txBox="1"/>
+          <p:nvPr/>
+        </p:nvSpPr>
+        <p:spPr>
+          <a:xfrm>
+            <a:off x="8868715" y="2117660"/>
+            <a:ext cx="1150023" cy="246221"/>
+          </a:xfrm>
+          <a:prstGeom prst="rect">
+            <a:avLst/>
+          </a:prstGeom>
+          <a:noFill/>
+        </p:spPr>
+        <p:txBody>
+          <a:bodyPr wrap="square" rtlCol="0">
+            <a:spAutoFit/>
+          </a:bodyPr>
+          <a:lstStyle/>
+          <a:p>
+            <a:pPr algn="r"/>
+            <a:r>
+              <a:rPr lang="en-US" sz="1000" i="1" dirty="0">
+                <a:solidFill>
+                  <a:schemeClr val="tx1">
+                    <a:lumMod val="95000"/>
+                    <a:lumOff val="5000"/>
+                  </a:schemeClr>
+                </a:solidFill>
+                <a:latin typeface="CMU Sans Serif Medium" panose="02000603000000000000" pitchFamily="2" charset="0"/>
+                <a:ea typeface="CMU Sans Serif Medium" panose="02000603000000000000" pitchFamily="2" charset="0"/>
+                <a:cs typeface="CMU Sans Serif Medium" panose="02000603000000000000" pitchFamily="2" charset="0"/>
+              </a:rPr>
+              <a:t>All-MiniLM-L6-v2</a:t>
+            </a:r>
+          </a:p>
+        </p:txBody>
+      </p:sp>
+      <p:cxnSp>
+        <p:nvCxnSpPr>
+          <p:cNvPr id="40" name="Straight Arrow Connector 39">
+            <a:extLst>
+              <a:ext uri="{FF2B5EF4-FFF2-40B4-BE49-F238E27FC236}">
+                <a16:creationId xmlns:a16="http://schemas.microsoft.com/office/drawing/2014/main" id="{AB54D18B-4A7E-04B9-F7B4-5636F792778E}"/>
+              </a:ext>
+            </a:extLst>
+          </p:cNvPr>
+          <p:cNvCxnSpPr>
+            <a:cxnSpLocks/>
+          </p:cNvCxnSpPr>
+          <p:nvPr/>
+        </p:nvCxnSpPr>
+        <p:spPr>
+          <a:xfrm flipV="1">
+            <a:off x="900392" y="3533949"/>
+            <a:ext cx="0" cy="718998"/>
+          </a:xfrm>
+          <a:prstGeom prst="straightConnector1">
+            <a:avLst/>
+          </a:prstGeom>
+          <a:ln>
+            <a:solidFill>
+              <a:schemeClr val="tx1"/>
+            </a:solidFill>
+            <a:tailEnd type="triangle"/>
+          </a:ln>
+        </p:spPr>
+        <p:style>
+          <a:lnRef idx="2">
+            <a:schemeClr val="accent1"/>
+          </a:lnRef>
+          <a:fillRef idx="0">
+            <a:schemeClr val="accent1"/>
+          </a:fillRef>
+          <a:effectRef idx="1">
+            <a:schemeClr val="accent1"/>
+          </a:effectRef>
+          <a:fontRef idx="minor">
+            <a:schemeClr val="tx1"/>
+          </a:fontRef>
+        </p:style>
+      </p:cxnSp>
+      <p:cxnSp>
+        <p:nvCxnSpPr>
+          <p:cNvPr id="22" name="Elbow Connector 21">
+            <a:extLst>
+              <a:ext uri="{FF2B5EF4-FFF2-40B4-BE49-F238E27FC236}">
+                <a16:creationId xmlns:a16="http://schemas.microsoft.com/office/drawing/2014/main" id="{29E8B6D7-8046-F303-A2B1-3E1BD9937DBB}"/>
+              </a:ext>
+            </a:extLst>
+          </p:cNvPr>
+          <p:cNvCxnSpPr>
+            <a:cxnSpLocks/>
+            <a:endCxn id="10" idx="2"/>
+          </p:cNvCxnSpPr>
+          <p:nvPr/>
+        </p:nvCxnSpPr>
+        <p:spPr>
+          <a:xfrm flipV="1">
+            <a:off x="6454850" y="1978199"/>
+            <a:ext cx="1627574" cy="543702"/>
+          </a:xfrm>
+          <a:prstGeom prst="bentConnector2">
+            <a:avLst/>
+          </a:prstGeom>
+          <a:ln w="19050">
+            <a:solidFill>
+              <a:schemeClr val="tx1"/>
+            </a:solidFill>
+            <a:tailEnd type="triangle"/>
+          </a:ln>
+        </p:spPr>
+        <p:style>
+          <a:lnRef idx="1">
+            <a:schemeClr val="accent1"/>
+          </a:lnRef>
+          <a:fillRef idx="0">
+            <a:schemeClr val="accent1"/>
+          </a:fillRef>
+          <a:effectRef idx="0">
+            <a:schemeClr val="accent1"/>
+          </a:effectRef>
+          <a:fontRef idx="minor">
+            <a:schemeClr val="tx1"/>
+          </a:fontRef>
+        </p:style>
+      </p:cxnSp>
+      <p:cxnSp>
+        <p:nvCxnSpPr>
+          <p:cNvPr id="60" name="Straight Arrow Connector 59">
+            <a:extLst>
+              <a:ext uri="{FF2B5EF4-FFF2-40B4-BE49-F238E27FC236}">
+                <a16:creationId xmlns:a16="http://schemas.microsoft.com/office/drawing/2014/main" id="{47FFF3D2-5393-7192-92B1-4C88809DD591}"/>
+              </a:ext>
+            </a:extLst>
+          </p:cNvPr>
+          <p:cNvCxnSpPr>
+            <a:cxnSpLocks/>
+          </p:cNvCxnSpPr>
+          <p:nvPr/>
+        </p:nvCxnSpPr>
+        <p:spPr>
+          <a:xfrm>
+            <a:off x="6487322" y="2644139"/>
+            <a:ext cx="2428505" cy="0"/>
+          </a:xfrm>
+          <a:prstGeom prst="straightConnector1">
+            <a:avLst/>
+          </a:prstGeom>
+          <a:ln w="19050">
+            <a:solidFill>
+              <a:schemeClr val="tx1"/>
+            </a:solidFill>
+            <a:tailEnd type="triangle"/>
+          </a:ln>
+        </p:spPr>
+        <p:style>
+          <a:lnRef idx="2">
+            <a:schemeClr val="accent1"/>
+          </a:lnRef>
+          <a:fillRef idx="0">
+            <a:schemeClr val="accent1"/>
+          </a:fillRef>
+          <a:effectRef idx="1">
+            <a:schemeClr val="accent1"/>
+          </a:effectRef>
+          <a:fontRef idx="minor">
+            <a:schemeClr val="tx1"/>
+          </a:fontRef>
+        </p:style>
+      </p:cxnSp>
+      <p:cxnSp>
+        <p:nvCxnSpPr>
+          <p:cNvPr id="67" name="Straight Arrow Connector 66">
+            <a:extLst>
+              <a:ext uri="{FF2B5EF4-FFF2-40B4-BE49-F238E27FC236}">
+                <a16:creationId xmlns:a16="http://schemas.microsoft.com/office/drawing/2014/main" id="{65D3ADEC-D902-7D88-3D92-E5B0B9D43C72}"/>
+              </a:ext>
+            </a:extLst>
+          </p:cNvPr>
+          <p:cNvCxnSpPr>
+            <a:cxnSpLocks/>
+          </p:cNvCxnSpPr>
+          <p:nvPr/>
+        </p:nvCxnSpPr>
+        <p:spPr>
+          <a:xfrm>
+            <a:off x="10003042" y="2609414"/>
+            <a:ext cx="617920" cy="0"/>
+          </a:xfrm>
+          <a:prstGeom prst="straightConnector1">
+            <a:avLst/>
+          </a:prstGeom>
+          <a:ln>
+            <a:solidFill>
+              <a:schemeClr val="tx1"/>
+            </a:solidFill>
+            <a:tailEnd type="triangle"/>
+          </a:ln>
+        </p:spPr>
+        <p:style>
+          <a:lnRef idx="2">
+            <a:schemeClr val="accent1"/>
+          </a:lnRef>
+          <a:fillRef idx="0">
+            <a:schemeClr val="accent1"/>
+          </a:fillRef>
+          <a:effectRef idx="1">
+            <a:schemeClr val="accent1"/>
+          </a:effectRef>
+          <a:fontRef idx="minor">
+            <a:schemeClr val="tx1"/>
+          </a:fontRef>
+        </p:style>
+      </p:cxnSp>
+      <p:cxnSp>
+        <p:nvCxnSpPr>
+          <p:cNvPr id="69" name="Straight Arrow Connector 68">
+            <a:extLst>
+              <a:ext uri="{FF2B5EF4-FFF2-40B4-BE49-F238E27FC236}">
+                <a16:creationId xmlns:a16="http://schemas.microsoft.com/office/drawing/2014/main" id="{59E15114-3970-FB71-DFF8-2ADDA5AB3646}"/>
+              </a:ext>
+            </a:extLst>
+          </p:cNvPr>
+          <p:cNvCxnSpPr>
+            <a:cxnSpLocks/>
+          </p:cNvCxnSpPr>
+          <p:nvPr/>
+        </p:nvCxnSpPr>
+        <p:spPr>
+          <a:xfrm>
+            <a:off x="10003042" y="1659985"/>
+            <a:ext cx="617920" cy="0"/>
+          </a:xfrm>
+          <a:prstGeom prst="straightConnector1">
+            <a:avLst/>
+          </a:prstGeom>
+          <a:ln>
+            <a:solidFill>
+              <a:schemeClr val="tx1"/>
+            </a:solidFill>
+            <a:tailEnd type="triangle"/>
+          </a:ln>
+        </p:spPr>
+        <p:style>
+          <a:lnRef idx="2">
+            <a:schemeClr val="accent1"/>
+          </a:lnRef>
+          <a:fillRef idx="0">
+            <a:schemeClr val="accent1"/>
+          </a:fillRef>
+          <a:effectRef idx="1">
+            <a:schemeClr val="accent1"/>
+          </a:effectRef>
+          <a:fontRef idx="minor">
+            <a:schemeClr val="tx1"/>
+          </a:fontRef>
+        </p:style>
+      </p:cxnSp>
+      <p:cxnSp>
+        <p:nvCxnSpPr>
+          <p:cNvPr id="70" name="Straight Arrow Connector 69">
+            <a:extLst>
+              <a:ext uri="{FF2B5EF4-FFF2-40B4-BE49-F238E27FC236}">
+                <a16:creationId xmlns:a16="http://schemas.microsoft.com/office/drawing/2014/main" id="{421B8E3B-2A40-3283-2EFD-8F9F99FF8747}"/>
+              </a:ext>
+            </a:extLst>
+          </p:cNvPr>
+          <p:cNvCxnSpPr>
+            <a:cxnSpLocks/>
+          </p:cNvCxnSpPr>
+          <p:nvPr/>
+        </p:nvCxnSpPr>
+        <p:spPr>
+          <a:xfrm>
+            <a:off x="8521714" y="1634701"/>
+            <a:ext cx="400878" cy="0"/>
+          </a:xfrm>
+          <a:prstGeom prst="straightConnector1">
+            <a:avLst/>
+          </a:prstGeom>
+          <a:ln>
+            <a:solidFill>
+              <a:schemeClr val="tx1"/>
+            </a:solidFill>
+            <a:tailEnd type="triangle"/>
+          </a:ln>
+        </p:spPr>
+        <p:style>
+          <a:lnRef idx="2">
+            <a:schemeClr val="accent1"/>
+          </a:lnRef>
+          <a:fillRef idx="0">
+            <a:schemeClr val="accent1"/>
+          </a:fillRef>
+          <a:effectRef idx="1">
+            <a:schemeClr val="accent1"/>
+          </a:effectRef>
+          <a:fontRef idx="minor">
+            <a:schemeClr val="tx1"/>
+          </a:fontRef>
+        </p:style>
+      </p:cxnSp>
+      <p:cxnSp>
+        <p:nvCxnSpPr>
+          <p:cNvPr id="72" name="Straight Arrow Connector 71">
+            <a:extLst>
+              <a:ext uri="{FF2B5EF4-FFF2-40B4-BE49-F238E27FC236}">
+                <a16:creationId xmlns:a16="http://schemas.microsoft.com/office/drawing/2014/main" id="{DEB7FD85-830F-2E89-04F0-5BF80AC9BE32}"/>
+              </a:ext>
+            </a:extLst>
+          </p:cNvPr>
+          <p:cNvCxnSpPr>
+            <a:cxnSpLocks/>
+          </p:cNvCxnSpPr>
+          <p:nvPr/>
+        </p:nvCxnSpPr>
+        <p:spPr>
+          <a:xfrm>
+            <a:off x="7133336" y="1634701"/>
+            <a:ext cx="400878" cy="0"/>
+          </a:xfrm>
+          <a:prstGeom prst="straightConnector1">
+            <a:avLst/>
+          </a:prstGeom>
+          <a:ln>
+            <a:solidFill>
+              <a:schemeClr val="tx1"/>
+            </a:solidFill>
+            <a:tailEnd type="triangle"/>
+          </a:ln>
+        </p:spPr>
+        <p:style>
+          <a:lnRef idx="2">
+            <a:schemeClr val="accent1"/>
+          </a:lnRef>
+          <a:fillRef idx="0">
+            <a:schemeClr val="accent1"/>
+          </a:fillRef>
+          <a:effectRef idx="1">
+            <a:schemeClr val="accent1"/>
+          </a:effectRef>
+          <a:fontRef idx="minor">
+            <a:schemeClr val="tx1"/>
+          </a:fontRef>
+        </p:style>
+      </p:cxnSp>
+      <p:sp>
+        <p:nvSpPr>
+          <p:cNvPr id="3" name="Parallelogram 2">
+            <a:extLst>
+              <a:ext uri="{FF2B5EF4-FFF2-40B4-BE49-F238E27FC236}">
+                <a16:creationId xmlns:a16="http://schemas.microsoft.com/office/drawing/2014/main" id="{2DD10FA1-89D8-A34B-6BE9-EEF30A850D50}"/>
+              </a:ext>
+            </a:extLst>
+          </p:cNvPr>
+          <p:cNvSpPr/>
+          <p:nvPr/>
+        </p:nvSpPr>
+        <p:spPr>
+          <a:xfrm>
+            <a:off x="5382842" y="2323621"/>
+            <a:ext cx="1253965" cy="708229"/>
+          </a:xfrm>
+          <a:prstGeom prst="parallelogram">
+            <a:avLst/>
+          </a:prstGeom>
+          <a:solidFill>
+            <a:srgbClr val="868686"/>
+          </a:solidFill>
+          <a:ln>
+            <a:noFill/>
+          </a:ln>
+        </p:spPr>
+        <p:style>
+          <a:lnRef idx="2">
+            <a:schemeClr val="accent1">
+              <a:shade val="15000"/>
+            </a:schemeClr>
+          </a:lnRef>
+          <a:fillRef idx="1">
+            <a:schemeClr val="accent1"/>
+          </a:fillRef>
+          <a:effectRef idx="0">
+            <a:schemeClr val="accent1"/>
+          </a:effectRef>
+          <a:fontRef idx="minor">
+            <a:schemeClr val="lt1"/>
+          </a:fontRef>
+        </p:style>
+        <p:txBody>
+          <a:bodyPr rtlCol="0" anchor="ctr"/>
+          <a:lstStyle/>
+          <a:p>
+            <a:pPr algn="ctr"/>
+            <a:r>
+              <a:rPr lang="en-US" sz="1200" dirty="0">
+                <a:latin typeface="CMU Sans Serif Medium" panose="02000603000000000000" pitchFamily="2" charset="0"/>
+                <a:ea typeface="CMU Sans Serif Medium" panose="02000603000000000000" pitchFamily="2" charset="0"/>
+                <a:cs typeface="CMU Sans Serif Medium" panose="02000603000000000000" pitchFamily="2" charset="0"/>
+              </a:rPr>
+              <a:t>cleaned comment text</a:t>
+            </a:r>
+          </a:p>
+        </p:txBody>
+      </p:sp>
+      <p:sp>
+        <p:nvSpPr>
+          <p:cNvPr id="9" name="Rectangle 8">
+            <a:extLst>
+              <a:ext uri="{FF2B5EF4-FFF2-40B4-BE49-F238E27FC236}">
+                <a16:creationId xmlns:a16="http://schemas.microsoft.com/office/drawing/2014/main" id="{932DF7BF-B3DD-E727-13B3-6634EF820F09}"/>
+              </a:ext>
+            </a:extLst>
+          </p:cNvPr>
+          <p:cNvSpPr/>
+          <p:nvPr/>
+        </p:nvSpPr>
+        <p:spPr>
+          <a:xfrm>
+            <a:off x="8915827" y="2285490"/>
+            <a:ext cx="1102678" cy="657567"/>
+          </a:xfrm>
+          <a:prstGeom prst="rect">
+            <a:avLst/>
+          </a:prstGeom>
+          <a:solidFill>
+            <a:srgbClr val="868686"/>
+          </a:solidFill>
+          <a:ln>
+            <a:noFill/>
+          </a:ln>
+        </p:spPr>
+        <p:style>
+          <a:lnRef idx="2">
+            <a:schemeClr val="accent1">
+              <a:shade val="15000"/>
+            </a:schemeClr>
+          </a:lnRef>
+          <a:fillRef idx="1">
+            <a:schemeClr val="accent1"/>
+          </a:fillRef>
+          <a:effectRef idx="0">
+            <a:schemeClr val="accent1"/>
+          </a:effectRef>
+          <a:fontRef idx="minor">
+            <a:schemeClr val="lt1"/>
+          </a:fontRef>
+        </p:style>
+        <p:txBody>
+          <a:bodyPr rtlCol="0" anchor="ctr"/>
+          <a:lstStyle/>
+          <a:p>
+            <a:pPr algn="ctr"/>
+            <a:r>
+              <a:rPr lang="en-US" sz="1200" dirty="0">
+                <a:latin typeface="CMU Sans Serif Medium" panose="02000603000000000000" pitchFamily="2" charset="0"/>
+                <a:ea typeface="CMU Sans Serif Medium" panose="02000603000000000000" pitchFamily="2" charset="0"/>
+                <a:cs typeface="CMU Sans Serif Medium" panose="02000603000000000000" pitchFamily="2" charset="0"/>
+              </a:rPr>
+              <a:t>sentiment model</a:t>
+            </a:r>
+          </a:p>
+        </p:txBody>
+      </p:sp>
+      <p:sp>
+        <p:nvSpPr>
+          <p:cNvPr id="108" name="Rectangle 107">
+            <a:extLst>
+              <a:ext uri="{FF2B5EF4-FFF2-40B4-BE49-F238E27FC236}">
+                <a16:creationId xmlns:a16="http://schemas.microsoft.com/office/drawing/2014/main" id="{F57D1615-4176-0D97-5B8A-D9010F37C135}"/>
+              </a:ext>
+            </a:extLst>
+          </p:cNvPr>
+          <p:cNvSpPr/>
+          <p:nvPr/>
+        </p:nvSpPr>
+        <p:spPr>
+          <a:xfrm>
+            <a:off x="8915827" y="1265546"/>
+            <a:ext cx="1120345" cy="714460"/>
+          </a:xfrm>
+          <a:prstGeom prst="rect">
+            <a:avLst/>
+          </a:prstGeom>
+          <a:solidFill>
+            <a:srgbClr val="868686"/>
+          </a:solidFill>
+          <a:ln>
+            <a:noFill/>
+          </a:ln>
+        </p:spPr>
+        <p:style>
+          <a:lnRef idx="2">
+            <a:schemeClr val="accent1">
+              <a:shade val="15000"/>
+            </a:schemeClr>
+          </a:lnRef>
+          <a:fillRef idx="1">
+            <a:schemeClr val="accent1"/>
+          </a:fillRef>
+          <a:effectRef idx="0">
+            <a:schemeClr val="accent1"/>
+          </a:effectRef>
+          <a:fontRef idx="minor">
+            <a:schemeClr val="lt1"/>
+          </a:fontRef>
+        </p:style>
+        <p:txBody>
+          <a:bodyPr rtlCol="0" anchor="ctr"/>
+          <a:lstStyle/>
+          <a:p>
+            <a:pPr algn="ctr"/>
+            <a:r>
+              <a:rPr lang="en-US" sz="1200" dirty="0">
+                <a:latin typeface="CMU Sans Serif Medium" panose="02000603000000000000" pitchFamily="2" charset="0"/>
+                <a:ea typeface="CMU Sans Serif Medium" panose="02000603000000000000" pitchFamily="2" charset="0"/>
+                <a:cs typeface="CMU Sans Serif Medium" panose="02000603000000000000" pitchFamily="2" charset="0"/>
+              </a:rPr>
+              <a:t>manual topic reduction</a:t>
+            </a:r>
+          </a:p>
+        </p:txBody>
+      </p:sp>
+      <p:sp>
+        <p:nvSpPr>
+          <p:cNvPr id="10" name="Rectangle 9">
+            <a:extLst>
+              <a:ext uri="{FF2B5EF4-FFF2-40B4-BE49-F238E27FC236}">
+                <a16:creationId xmlns:a16="http://schemas.microsoft.com/office/drawing/2014/main" id="{90082C41-8FF9-C012-C5A3-2AFD1FBE5A8B}"/>
+              </a:ext>
+            </a:extLst>
+          </p:cNvPr>
+          <p:cNvSpPr/>
+          <p:nvPr/>
+        </p:nvSpPr>
+        <p:spPr>
+          <a:xfrm>
+            <a:off x="7522251" y="1263739"/>
+            <a:ext cx="1120345" cy="714460"/>
+          </a:xfrm>
+          <a:prstGeom prst="rect">
+            <a:avLst/>
+          </a:prstGeom>
+          <a:solidFill>
+            <a:srgbClr val="868686"/>
+          </a:solidFill>
+          <a:ln>
+            <a:noFill/>
+          </a:ln>
+        </p:spPr>
+        <p:style>
+          <a:lnRef idx="2">
+            <a:schemeClr val="accent1">
+              <a:shade val="15000"/>
+            </a:schemeClr>
+          </a:lnRef>
+          <a:fillRef idx="1">
+            <a:schemeClr val="accent1"/>
+          </a:fillRef>
+          <a:effectRef idx="0">
+            <a:schemeClr val="accent1"/>
+          </a:effectRef>
+          <a:fontRef idx="minor">
+            <a:schemeClr val="lt1"/>
+          </a:fontRef>
+        </p:style>
+        <p:txBody>
+          <a:bodyPr rtlCol="0" anchor="ctr"/>
+          <a:lstStyle/>
+          <a:p>
+            <a:pPr algn="ctr"/>
+            <a:r>
+              <a:rPr lang="en-US" sz="1200" dirty="0">
+                <a:latin typeface="CMU Sans Serif Medium" panose="02000603000000000000" pitchFamily="2" charset="0"/>
+                <a:ea typeface="CMU Sans Serif Medium" panose="02000603000000000000" pitchFamily="2" charset="0"/>
+                <a:cs typeface="CMU Sans Serif Medium" panose="02000603000000000000" pitchFamily="2" charset="0"/>
+              </a:rPr>
+              <a:t>topic model</a:t>
+            </a:r>
+          </a:p>
+        </p:txBody>
+      </p:sp>
+      <p:sp>
+        <p:nvSpPr>
+          <p:cNvPr id="2" name="Parallelogram 1">
+            <a:extLst>
+              <a:ext uri="{FF2B5EF4-FFF2-40B4-BE49-F238E27FC236}">
+                <a16:creationId xmlns:a16="http://schemas.microsoft.com/office/drawing/2014/main" id="{7E4A6562-C8DC-7176-81A6-3EAD4557038D}"/>
+              </a:ext>
+            </a:extLst>
+          </p:cNvPr>
+          <p:cNvSpPr/>
+          <p:nvPr/>
+        </p:nvSpPr>
+        <p:spPr>
+          <a:xfrm>
+            <a:off x="6014431" y="1252042"/>
+            <a:ext cx="1253965" cy="708229"/>
+          </a:xfrm>
+          <a:prstGeom prst="parallelogram">
+            <a:avLst/>
+          </a:prstGeom>
+          <a:solidFill>
+            <a:srgbClr val="868686"/>
+          </a:solidFill>
+          <a:ln>
+            <a:noFill/>
+          </a:ln>
+        </p:spPr>
+        <p:style>
+          <a:lnRef idx="2">
+            <a:schemeClr val="accent1">
+              <a:shade val="15000"/>
+            </a:schemeClr>
+          </a:lnRef>
+          <a:fillRef idx="1">
+            <a:schemeClr val="accent1"/>
+          </a:fillRef>
+          <a:effectRef idx="0">
+            <a:schemeClr val="accent1"/>
+          </a:effectRef>
+          <a:fontRef idx="minor">
+            <a:schemeClr val="lt1"/>
+          </a:fontRef>
+        </p:style>
+        <p:txBody>
+          <a:bodyPr rtlCol="0" anchor="ctr"/>
+          <a:lstStyle/>
+          <a:p>
+            <a:pPr algn="ctr"/>
+            <a:r>
+              <a:rPr lang="en-US" sz="1100" dirty="0">
+                <a:latin typeface="CMU Sans Serif Medium" panose="02000603000000000000" pitchFamily="2" charset="0"/>
+                <a:ea typeface="CMU Sans Serif Medium" panose="02000603000000000000" pitchFamily="2" charset="0"/>
+                <a:cs typeface="CMU Sans Serif Medium" panose="02000603000000000000" pitchFamily="2" charset="0"/>
+              </a:rPr>
+              <a:t>fine-tuned sentence transformer</a:t>
+            </a:r>
+          </a:p>
+        </p:txBody>
+      </p:sp>
+      <p:sp>
+        <p:nvSpPr>
+          <p:cNvPr id="1034" name="TextBox 1033">
+            <a:extLst>
+              <a:ext uri="{FF2B5EF4-FFF2-40B4-BE49-F238E27FC236}">
+                <a16:creationId xmlns:a16="http://schemas.microsoft.com/office/drawing/2014/main" id="{273B9CA1-7AE6-E83C-3237-82DA2FBFE1EB}"/>
+              </a:ext>
+            </a:extLst>
+          </p:cNvPr>
+          <p:cNvSpPr txBox="1"/>
+          <p:nvPr/>
+        </p:nvSpPr>
+        <p:spPr>
+          <a:xfrm>
+            <a:off x="7522251" y="1098774"/>
+            <a:ext cx="1117746" cy="246221"/>
+          </a:xfrm>
+          <a:prstGeom prst="rect">
+            <a:avLst/>
+          </a:prstGeom>
+          <a:noFill/>
+        </p:spPr>
+        <p:txBody>
+          <a:bodyPr wrap="square" rtlCol="0">
+            <a:spAutoFit/>
+          </a:bodyPr>
+          <a:lstStyle/>
+          <a:p>
+            <a:pPr algn="r"/>
+            <a:r>
+              <a:rPr lang="en-US" sz="1000" i="1" dirty="0">
+                <a:solidFill>
+                  <a:schemeClr val="tx1">
+                    <a:lumMod val="95000"/>
+                    <a:lumOff val="5000"/>
+                  </a:schemeClr>
+                </a:solidFill>
+                <a:latin typeface="CMU Sans Serif Medium" panose="02000603000000000000" pitchFamily="2" charset="0"/>
+                <a:ea typeface="CMU Sans Serif Medium" panose="02000603000000000000" pitchFamily="2" charset="0"/>
+                <a:cs typeface="CMU Sans Serif Medium" panose="02000603000000000000" pitchFamily="2" charset="0"/>
+              </a:rPr>
+              <a:t>BERTopic</a:t>
+            </a:r>
+          </a:p>
+        </p:txBody>
+      </p:sp>
+      <p:sp>
+        <p:nvSpPr>
+          <p:cNvPr id="56" name="TextBox 55">
+            <a:extLst>
+              <a:ext uri="{FF2B5EF4-FFF2-40B4-BE49-F238E27FC236}">
+                <a16:creationId xmlns:a16="http://schemas.microsoft.com/office/drawing/2014/main" id="{55C38227-111A-A7D7-A51A-33F588E2FC73}"/>
+              </a:ext>
+            </a:extLst>
+          </p:cNvPr>
+          <p:cNvSpPr txBox="1"/>
+          <p:nvPr/>
+        </p:nvSpPr>
+        <p:spPr>
+          <a:xfrm>
+            <a:off x="10414953" y="3435784"/>
+            <a:ext cx="1258455" cy="261610"/>
+          </a:xfrm>
+          <a:prstGeom prst="rect">
+            <a:avLst/>
+          </a:prstGeom>
+          <a:noFill/>
+        </p:spPr>
+        <p:txBody>
+          <a:bodyPr wrap="square">
+            <a:spAutoFit/>
+          </a:bodyPr>
+          <a:lstStyle/>
+          <a:p>
+            <a:pPr algn="ctr"/>
+            <a:r>
+              <a:rPr lang="en-US" sz="1100" dirty="0">
+                <a:solidFill>
+                  <a:schemeClr val="bg1"/>
+                </a:solidFill>
+                <a:latin typeface="CMU Sans Serif Medium" panose="02000603000000000000" pitchFamily="2" charset="0"/>
+                <a:ea typeface="CMU Sans Serif Medium" panose="02000603000000000000" pitchFamily="2" charset="0"/>
+                <a:cs typeface="CMU Sans Serif Medium" panose="02000603000000000000" pitchFamily="2" charset="0"/>
+              </a:rPr>
+              <a:t>coordinates</a:t>
+            </a:r>
+          </a:p>
+        </p:txBody>
+      </p:sp>
+      <p:sp>
+        <p:nvSpPr>
+          <p:cNvPr id="58" name="TextBox 57">
+            <a:extLst>
+              <a:ext uri="{FF2B5EF4-FFF2-40B4-BE49-F238E27FC236}">
+                <a16:creationId xmlns:a16="http://schemas.microsoft.com/office/drawing/2014/main" id="{133856DD-AD8B-4025-7475-9818D958184B}"/>
+              </a:ext>
+            </a:extLst>
+          </p:cNvPr>
+          <p:cNvSpPr txBox="1"/>
+          <p:nvPr/>
+        </p:nvSpPr>
+        <p:spPr>
+          <a:xfrm>
+            <a:off x="10393158" y="5350575"/>
+            <a:ext cx="1364222" cy="430887"/>
+          </a:xfrm>
+          <a:prstGeom prst="rect">
+            <a:avLst/>
+          </a:prstGeom>
+          <a:noFill/>
+        </p:spPr>
+        <p:txBody>
+          <a:bodyPr wrap="square">
+            <a:spAutoFit/>
+          </a:bodyPr>
+          <a:lstStyle/>
+          <a:p>
+            <a:pPr algn="ctr"/>
+            <a:r>
+              <a:rPr lang="en-US" sz="1100" dirty="0">
+                <a:solidFill>
+                  <a:schemeClr val="bg1"/>
+                </a:solidFill>
+                <a:latin typeface="CMU Sans Serif Medium" panose="02000603000000000000" pitchFamily="2" charset="0"/>
+                <a:ea typeface="CMU Sans Serif Medium" panose="02000603000000000000" pitchFamily="2" charset="0"/>
+                <a:cs typeface="CMU Sans Serif Medium" panose="02000603000000000000" pitchFamily="2" charset="0"/>
+              </a:rPr>
+              <a:t>sociodemographic variables</a:t>
+            </a:r>
+          </a:p>
+        </p:txBody>
+      </p:sp>
+      <p:sp>
+        <p:nvSpPr>
+          <p:cNvPr id="59" name="Rectangle 58">
+            <a:extLst>
+              <a:ext uri="{FF2B5EF4-FFF2-40B4-BE49-F238E27FC236}">
+                <a16:creationId xmlns:a16="http://schemas.microsoft.com/office/drawing/2014/main" id="{C36B3EC7-B9F1-47C3-86AD-7790C6D1FDE4}"/>
+              </a:ext>
+            </a:extLst>
+          </p:cNvPr>
+          <p:cNvSpPr/>
+          <p:nvPr/>
+        </p:nvSpPr>
+        <p:spPr>
+          <a:xfrm>
+            <a:off x="4071763" y="2334265"/>
+            <a:ext cx="1120345" cy="714460"/>
+          </a:xfrm>
+          <a:prstGeom prst="rect">
+            <a:avLst/>
+          </a:prstGeom>
+          <a:solidFill>
+            <a:srgbClr val="868686"/>
+          </a:solidFill>
+          <a:ln>
+            <a:noFill/>
+          </a:ln>
+        </p:spPr>
+        <p:style>
+          <a:lnRef idx="2">
+            <a:schemeClr val="accent1">
+              <a:shade val="15000"/>
+            </a:schemeClr>
+          </a:lnRef>
+          <a:fillRef idx="1">
+            <a:schemeClr val="accent1"/>
+          </a:fillRef>
+          <a:effectRef idx="0">
+            <a:schemeClr val="accent1"/>
+          </a:effectRef>
+          <a:fontRef idx="minor">
+            <a:schemeClr val="lt1"/>
+          </a:fontRef>
+        </p:style>
+        <p:txBody>
+          <a:bodyPr rtlCol="0" anchor="ctr"/>
+          <a:lstStyle/>
+          <a:p>
+            <a:pPr algn="ctr"/>
+            <a:r>
+              <a:rPr lang="en-US" sz="1200" dirty="0">
+                <a:latin typeface="CMU Sans Serif Medium" panose="02000603000000000000" pitchFamily="2" charset="0"/>
+                <a:ea typeface="CMU Sans Serif Medium" panose="02000603000000000000" pitchFamily="2" charset="0"/>
+                <a:cs typeface="CMU Sans Serif Medium" panose="02000603000000000000" pitchFamily="2" charset="0"/>
+              </a:rPr>
+              <a:t>anonymisation</a:t>
+            </a:r>
+          </a:p>
+        </p:txBody>
+      </p:sp>
+      <p:sp>
+        <p:nvSpPr>
+          <p:cNvPr id="68" name="TextBox 67">
+            <a:extLst>
+              <a:ext uri="{FF2B5EF4-FFF2-40B4-BE49-F238E27FC236}">
+                <a16:creationId xmlns:a16="http://schemas.microsoft.com/office/drawing/2014/main" id="{8A5B0464-9375-5646-C219-FED27777A862}"/>
+              </a:ext>
+            </a:extLst>
+          </p:cNvPr>
+          <p:cNvSpPr txBox="1"/>
+          <p:nvPr/>
+        </p:nvSpPr>
+        <p:spPr>
+          <a:xfrm>
+            <a:off x="4127181" y="2178094"/>
+            <a:ext cx="1117746" cy="246221"/>
+          </a:xfrm>
+          <a:prstGeom prst="rect">
+            <a:avLst/>
+          </a:prstGeom>
+          <a:noFill/>
+        </p:spPr>
+        <p:txBody>
+          <a:bodyPr wrap="square" rtlCol="0">
+            <a:spAutoFit/>
+          </a:bodyPr>
+          <a:lstStyle/>
+          <a:p>
+            <a:pPr algn="r"/>
+            <a:r>
+              <a:rPr lang="en-US" sz="1000" i="1" dirty="0">
+                <a:solidFill>
+                  <a:schemeClr val="tx1">
+                    <a:lumMod val="95000"/>
+                    <a:lumOff val="5000"/>
+                  </a:schemeClr>
+                </a:solidFill>
+                <a:latin typeface="CMU Sans Serif Medium" panose="02000603000000000000" pitchFamily="2" charset="0"/>
+                <a:ea typeface="CMU Sans Serif Medium" panose="02000603000000000000" pitchFamily="2" charset="0"/>
+                <a:cs typeface="CMU Sans Serif Medium" panose="02000603000000000000" pitchFamily="2" charset="0"/>
+              </a:rPr>
+              <a:t>NER</a:t>
+            </a:r>
+          </a:p>
+        </p:txBody>
+      </p:sp>
+    </p:spTree>
+    <p:extLst>
+      <p:ext uri="{BB962C8B-B14F-4D97-AF65-F5344CB8AC3E}">
+        <p14:creationId xmlns:p14="http://schemas.microsoft.com/office/powerpoint/2010/main" val="3763931335"/>
+      </p:ext>
+    </p:extLst>
+  </p:cSld>
+  <p:clrMapOvr>
+    <a:masterClrMapping/>
+  </p:clrMapOvr>
+</p:sld>
+</file>
+
+<file path=ppt/slides/slide4.xml><?xml version="1.0" encoding="utf-8"?>
+<p:sld xmlns:a="http://schemas.openxmlformats.org/drawingml/2006/main" xmlns:r="http://schemas.openxmlformats.org/officeDocument/2006/relationships" xmlns:p="http://schemas.openxmlformats.org/presentationml/2006/main">
+  <p:cSld>
+    <p:spTree>
+      <p:nvGrpSpPr>
+        <p:cNvPr id="1" name="">
+          <a:extLst>
+            <a:ext uri="{FF2B5EF4-FFF2-40B4-BE49-F238E27FC236}">
+              <a16:creationId xmlns:a16="http://schemas.microsoft.com/office/drawing/2014/main" id="{2C5F38DE-2BFD-AD0D-2FFE-49417A40348B}"/>
+            </a:ext>
+          </a:extLst>
+        </p:cNvPr>
+        <p:cNvGrpSpPr/>
+        <p:nvPr/>
+      </p:nvGrpSpPr>
+      <p:grpSpPr>
+        <a:xfrm>
+          <a:off x="0" y="0"/>
+          <a:ext cx="0" cy="0"/>
+          <a:chOff x="0" y="0"/>
+          <a:chExt cx="0" cy="0"/>
+        </a:xfrm>
+      </p:grpSpPr>
+      <p:grpSp>
+        <p:nvGrpSpPr>
+          <p:cNvPr id="4" name="Group 3">
+            <a:extLst>
+              <a:ext uri="{FF2B5EF4-FFF2-40B4-BE49-F238E27FC236}">
+                <a16:creationId xmlns:a16="http://schemas.microsoft.com/office/drawing/2014/main" id="{FF97A97B-1214-8320-A6CD-805949B92E59}"/>
+              </a:ext>
+            </a:extLst>
+          </p:cNvPr>
+          <p:cNvGrpSpPr/>
+          <p:nvPr/>
+        </p:nvGrpSpPr>
+        <p:grpSpPr>
+          <a:xfrm>
+            <a:off x="118519" y="1008461"/>
+            <a:ext cx="11939504" cy="5139582"/>
+            <a:chOff x="118519" y="1008461"/>
+            <a:chExt cx="11939504" cy="5139582"/>
+          </a:xfrm>
+        </p:grpSpPr>
+        <p:cxnSp>
+          <p:nvCxnSpPr>
+            <p:cNvPr id="31" name="Straight Arrow Connector 30">
+              <a:extLst>
+                <a:ext uri="{FF2B5EF4-FFF2-40B4-BE49-F238E27FC236}">
+                  <a16:creationId xmlns:a16="http://schemas.microsoft.com/office/drawing/2014/main" id="{AB620EB3-FD51-463A-506A-508DCC4F3BE6}"/>
+                </a:ext>
+              </a:extLst>
+            </p:cNvPr>
+            <p:cNvCxnSpPr>
+              <a:cxnSpLocks/>
+              <a:endCxn id="139" idx="2"/>
+            </p:cNvCxnSpPr>
+            <p:nvPr/>
+          </p:nvCxnSpPr>
+          <p:spPr>
+            <a:xfrm flipH="1">
+              <a:off x="3011444" y="4523886"/>
+              <a:ext cx="5628553" cy="0"/>
+            </a:xfrm>
+            <a:prstGeom prst="straightConnector1">
+              <a:avLst/>
+            </a:prstGeom>
+            <a:ln>
+              <a:solidFill>
+                <a:schemeClr val="tx1"/>
+              </a:solidFill>
+              <a:tailEnd type="triangle"/>
+            </a:ln>
+          </p:spPr>
+          <p:style>
+            <a:lnRef idx="2">
+              <a:schemeClr val="accent1"/>
+            </a:lnRef>
+            <a:fillRef idx="0">
+              <a:schemeClr val="accent1"/>
+            </a:fillRef>
+            <a:effectRef idx="1">
+              <a:schemeClr val="accent1"/>
+            </a:effectRef>
+            <a:fontRef idx="minor">
+              <a:schemeClr val="tx1"/>
+            </a:fontRef>
+          </p:style>
+        </p:cxnSp>
+        <p:cxnSp>
+          <p:nvCxnSpPr>
+            <p:cNvPr id="61" name="Straight Arrow Connector 60">
+              <a:extLst>
+                <a:ext uri="{FF2B5EF4-FFF2-40B4-BE49-F238E27FC236}">
+                  <a16:creationId xmlns:a16="http://schemas.microsoft.com/office/drawing/2014/main" id="{F4063696-DD26-876A-719F-536822AE90DA}"/>
+                </a:ext>
+              </a:extLst>
+            </p:cNvPr>
+            <p:cNvCxnSpPr>
+              <a:cxnSpLocks/>
+            </p:cNvCxnSpPr>
+            <p:nvPr/>
+          </p:nvCxnSpPr>
+          <p:spPr>
+            <a:xfrm flipV="1">
+              <a:off x="3495516" y="2647163"/>
+              <a:ext cx="588202" cy="8437"/>
+            </a:xfrm>
+            <a:prstGeom prst="straightConnector1">
+              <a:avLst/>
+            </a:prstGeom>
+            <a:ln>
+              <a:solidFill>
+                <a:schemeClr val="tx1"/>
+              </a:solidFill>
+              <a:tailEnd type="triangle"/>
+            </a:ln>
+          </p:spPr>
+          <p:style>
+            <a:lnRef idx="2">
+              <a:schemeClr val="accent1"/>
+            </a:lnRef>
+            <a:fillRef idx="0">
+              <a:schemeClr val="accent1"/>
+            </a:fillRef>
+            <a:effectRef idx="1">
+              <a:schemeClr val="accent1"/>
+            </a:effectRef>
+            <a:fontRef idx="minor">
+              <a:schemeClr val="tx1"/>
+            </a:fontRef>
+          </p:style>
+        </p:cxnSp>
+        <p:cxnSp>
+          <p:nvCxnSpPr>
+            <p:cNvPr id="75" name="Straight Arrow Connector 74">
+              <a:extLst>
+                <a:ext uri="{FF2B5EF4-FFF2-40B4-BE49-F238E27FC236}">
+                  <a16:creationId xmlns:a16="http://schemas.microsoft.com/office/drawing/2014/main" id="{A622B7FC-4FBF-5037-3A56-D1D647CC39E0}"/>
+                </a:ext>
+              </a:extLst>
+            </p:cNvPr>
+            <p:cNvCxnSpPr>
+              <a:cxnSpLocks/>
+            </p:cNvCxnSpPr>
+            <p:nvPr/>
+          </p:nvCxnSpPr>
+          <p:spPr>
+            <a:xfrm>
+              <a:off x="5709220" y="1634701"/>
+              <a:ext cx="400878" cy="0"/>
+            </a:xfrm>
+            <a:prstGeom prst="straightConnector1">
+              <a:avLst/>
+            </a:prstGeom>
+            <a:ln>
+              <a:solidFill>
+                <a:schemeClr val="tx1"/>
+              </a:solidFill>
+              <a:tailEnd type="triangle"/>
+            </a:ln>
+          </p:spPr>
+          <p:style>
+            <a:lnRef idx="2">
+              <a:schemeClr val="accent1"/>
+            </a:lnRef>
+            <a:fillRef idx="0">
+              <a:schemeClr val="accent1"/>
+            </a:fillRef>
+            <a:effectRef idx="1">
+              <a:schemeClr val="accent1"/>
+            </a:effectRef>
+            <a:fontRef idx="minor">
+              <a:schemeClr val="tx1"/>
+            </a:fontRef>
+          </p:style>
+        </p:cxnSp>
+        <p:sp>
+          <p:nvSpPr>
+            <p:cNvPr id="172" name="Rectangle 171">
+              <a:extLst>
+                <a:ext uri="{FF2B5EF4-FFF2-40B4-BE49-F238E27FC236}">
+                  <a16:creationId xmlns:a16="http://schemas.microsoft.com/office/drawing/2014/main" id="{01CACA02-0636-03C9-7196-789C83E62FDE}"/>
+                </a:ext>
+              </a:extLst>
+            </p:cNvPr>
+            <p:cNvSpPr/>
+            <p:nvPr/>
+          </p:nvSpPr>
+          <p:spPr>
+            <a:xfrm>
+              <a:off x="1947286" y="1191056"/>
+              <a:ext cx="3847065" cy="850047"/>
+            </a:xfrm>
+            <a:prstGeom prst="rect">
+              <a:avLst/>
+            </a:prstGeom>
+            <a:solidFill>
+              <a:schemeClr val="accent4">
+                <a:lumMod val="40000"/>
+                <a:lumOff val="60000"/>
+              </a:schemeClr>
+            </a:solidFill>
+            <a:ln>
+              <a:noFill/>
+            </a:ln>
+          </p:spPr>
+          <p:style>
+            <a:lnRef idx="2">
+              <a:schemeClr val="accent1">
+                <a:shade val="15000"/>
+              </a:schemeClr>
+            </a:lnRef>
+            <a:fillRef idx="1">
+              <a:schemeClr val="accent1"/>
+            </a:fillRef>
+            <a:effectRef idx="0">
+              <a:schemeClr val="accent1"/>
+            </a:effectRef>
+            <a:fontRef idx="minor">
+              <a:schemeClr val="lt1"/>
+            </a:fontRef>
+          </p:style>
+          <p:txBody>
+            <a:bodyPr rtlCol="0" anchor="ctr"/>
+            <a:lstStyle/>
+            <a:p>
+              <a:pPr algn="ctr"/>
+              <a:endParaRPr lang="en-US" sz="1200"/>
+            </a:p>
+          </p:txBody>
+        </p:sp>
+        <p:cxnSp>
+          <p:nvCxnSpPr>
+            <p:cNvPr id="63" name="Elbow Connector 62">
+              <a:extLst>
+                <a:ext uri="{FF2B5EF4-FFF2-40B4-BE49-F238E27FC236}">
+                  <a16:creationId xmlns:a16="http://schemas.microsoft.com/office/drawing/2014/main" id="{4D4AF5AF-A64B-A13A-05A4-484027F43080}"/>
+                </a:ext>
+              </a:extLst>
+            </p:cNvPr>
+            <p:cNvCxnSpPr>
+              <a:cxnSpLocks/>
+              <a:endCxn id="12" idx="5"/>
+            </p:cNvCxnSpPr>
+            <p:nvPr/>
+          </p:nvCxnSpPr>
+          <p:spPr>
+            <a:xfrm>
+              <a:off x="1462203" y="3185716"/>
+              <a:ext cx="9110282" cy="366652"/>
+            </a:xfrm>
+            <a:prstGeom prst="bentConnector3">
+              <a:avLst>
+                <a:gd name="adj1" fmla="val 7565"/>
+              </a:avLst>
+            </a:prstGeom>
+            <a:ln w="19050">
+              <a:solidFill>
+                <a:schemeClr val="tx1"/>
+              </a:solidFill>
+              <a:tailEnd type="triangle"/>
+            </a:ln>
+          </p:spPr>
+          <p:style>
+            <a:lnRef idx="1">
+              <a:schemeClr val="accent1"/>
+            </a:lnRef>
+            <a:fillRef idx="0">
+              <a:schemeClr val="accent1"/>
+            </a:fillRef>
+            <a:effectRef idx="0">
+              <a:schemeClr val="accent1"/>
+            </a:effectRef>
+            <a:fontRef idx="minor">
+              <a:schemeClr val="tx1"/>
+            </a:fontRef>
+          </p:style>
+        </p:cxnSp>
+        <p:cxnSp>
+          <p:nvCxnSpPr>
+            <p:cNvPr id="47" name="Elbow Connector 46">
+              <a:extLst>
+                <a:ext uri="{FF2B5EF4-FFF2-40B4-BE49-F238E27FC236}">
+                  <a16:creationId xmlns:a16="http://schemas.microsoft.com/office/drawing/2014/main" id="{9163CB86-EB09-E943-1AA3-CAD96D0837F3}"/>
+                </a:ext>
+              </a:extLst>
+            </p:cNvPr>
+            <p:cNvCxnSpPr>
+              <a:cxnSpLocks/>
+              <a:endCxn id="5" idx="5"/>
+            </p:cNvCxnSpPr>
+            <p:nvPr/>
+          </p:nvCxnSpPr>
+          <p:spPr>
+            <a:xfrm flipV="1">
+              <a:off x="1503450" y="2677736"/>
+              <a:ext cx="1259171" cy="239915"/>
+            </a:xfrm>
+            <a:prstGeom prst="bentConnector3">
+              <a:avLst>
+                <a:gd name="adj1" fmla="val 50000"/>
+              </a:avLst>
+            </a:prstGeom>
+            <a:ln w="19050">
+              <a:solidFill>
+                <a:schemeClr val="tx1"/>
+              </a:solidFill>
+              <a:tailEnd type="triangle"/>
+            </a:ln>
+          </p:spPr>
+          <p:style>
+            <a:lnRef idx="1">
+              <a:schemeClr val="accent1"/>
+            </a:lnRef>
+            <a:fillRef idx="0">
+              <a:schemeClr val="accent1"/>
+            </a:fillRef>
+            <a:effectRef idx="0">
+              <a:schemeClr val="accent1"/>
+            </a:effectRef>
+            <a:fontRef idx="minor">
+              <a:schemeClr val="tx1"/>
+            </a:fontRef>
+          </p:style>
+        </p:cxnSp>
+        <p:sp>
+          <p:nvSpPr>
+            <p:cNvPr id="37" name="Rounded Rectangle 36">
+              <a:extLst>
+                <a:ext uri="{FF2B5EF4-FFF2-40B4-BE49-F238E27FC236}">
+                  <a16:creationId xmlns:a16="http://schemas.microsoft.com/office/drawing/2014/main" id="{79204399-83D8-50CB-351A-A4C4DA919FB6}"/>
+                </a:ext>
+              </a:extLst>
+            </p:cNvPr>
+            <p:cNvSpPr/>
+            <p:nvPr/>
+          </p:nvSpPr>
+          <p:spPr>
+            <a:xfrm>
+              <a:off x="165974" y="2538086"/>
+              <a:ext cx="1482815" cy="995863"/>
+            </a:xfrm>
+            <a:prstGeom prst="roundRect">
+              <a:avLst/>
+            </a:prstGeom>
+            <a:solidFill>
+              <a:schemeClr val="bg1"/>
+            </a:solidFill>
+            <a:ln>
+              <a:solidFill>
+                <a:schemeClr val="tx2"/>
+              </a:solidFill>
+            </a:ln>
+          </p:spPr>
+          <p:style>
+            <a:lnRef idx="2">
+              <a:schemeClr val="accent1">
+                <a:shade val="15000"/>
+              </a:schemeClr>
+            </a:lnRef>
+            <a:fillRef idx="1">
+              <a:schemeClr val="accent1"/>
+            </a:fillRef>
+            <a:effectRef idx="0">
+              <a:schemeClr val="accent1"/>
+            </a:effectRef>
+            <a:fontRef idx="minor">
+              <a:schemeClr val="lt1"/>
+            </a:fontRef>
+          </p:style>
+          <p:txBody>
+            <a:bodyPr rtlCol="0" anchor="ctr"/>
+            <a:lstStyle/>
+            <a:p>
+              <a:pPr algn="ctr"/>
+              <a:endParaRPr lang="en-US" sz="1400" dirty="0">
+                <a:latin typeface="CMU Sans Serif Medium" panose="02000603000000000000" pitchFamily="2" charset="0"/>
+                <a:ea typeface="CMU Sans Serif Medium" panose="02000603000000000000" pitchFamily="2" charset="0"/>
+                <a:cs typeface="CMU Sans Serif Medium" panose="02000603000000000000" pitchFamily="2" charset="0"/>
+              </a:endParaRPr>
+            </a:p>
+          </p:txBody>
+        </p:sp>
+        <p:sp>
+          <p:nvSpPr>
+            <p:cNvPr id="182" name="Rounded Rectangle 181">
+              <a:extLst>
+                <a:ext uri="{FF2B5EF4-FFF2-40B4-BE49-F238E27FC236}">
+                  <a16:creationId xmlns:a16="http://schemas.microsoft.com/office/drawing/2014/main" id="{4E095F73-4EBB-BFE1-C5BF-D3324F6BF4D6}"/>
+                </a:ext>
+              </a:extLst>
+            </p:cNvPr>
+            <p:cNvSpPr/>
+            <p:nvPr/>
+          </p:nvSpPr>
+          <p:spPr>
+            <a:xfrm>
+              <a:off x="10312002" y="1030910"/>
+              <a:ext cx="1499287" cy="5117133"/>
+            </a:xfrm>
+            <a:prstGeom prst="roundRect">
+              <a:avLst/>
+            </a:prstGeom>
+            <a:solidFill>
+              <a:srgbClr val="C089D2"/>
+            </a:solidFill>
+            <a:ln>
+              <a:noFill/>
+            </a:ln>
+          </p:spPr>
+          <p:style>
+            <a:lnRef idx="2">
+              <a:schemeClr val="accent1">
+                <a:shade val="15000"/>
+              </a:schemeClr>
+            </a:lnRef>
+            <a:fillRef idx="1">
+              <a:schemeClr val="accent1"/>
+            </a:fillRef>
+            <a:effectRef idx="0">
+              <a:schemeClr val="accent1"/>
+            </a:effectRef>
+            <a:fontRef idx="minor">
+              <a:schemeClr val="lt1"/>
+            </a:fontRef>
+          </p:style>
+          <p:txBody>
+            <a:bodyPr rtlCol="0" anchor="ctr"/>
+            <a:lstStyle/>
+            <a:p>
+              <a:pPr algn="ctr"/>
+              <a:endParaRPr lang="en-US" sz="1200"/>
+            </a:p>
+          </p:txBody>
+        </p:sp>
+        <p:cxnSp>
+          <p:nvCxnSpPr>
+            <p:cNvPr id="43" name="Straight Arrow Connector 42">
+              <a:extLst>
+                <a:ext uri="{FF2B5EF4-FFF2-40B4-BE49-F238E27FC236}">
+                  <a16:creationId xmlns:a16="http://schemas.microsoft.com/office/drawing/2014/main" id="{09F233B7-49D4-26FB-9D33-F694947C4DE9}"/>
+                </a:ext>
+              </a:extLst>
+            </p:cNvPr>
+            <p:cNvCxnSpPr>
+              <a:cxnSpLocks/>
+            </p:cNvCxnSpPr>
+            <p:nvPr/>
+          </p:nvCxnSpPr>
+          <p:spPr>
+            <a:xfrm>
+              <a:off x="9005868" y="5575442"/>
+              <a:ext cx="1519050" cy="0"/>
+            </a:xfrm>
+            <a:prstGeom prst="straightConnector1">
+              <a:avLst/>
+            </a:prstGeom>
+            <a:ln>
+              <a:solidFill>
+                <a:schemeClr val="tx1"/>
+              </a:solidFill>
+              <a:tailEnd type="triangle"/>
+            </a:ln>
+          </p:spPr>
+          <p:style>
+            <a:lnRef idx="2">
+              <a:schemeClr val="accent1"/>
+            </a:lnRef>
+            <a:fillRef idx="0">
+              <a:schemeClr val="accent1"/>
+            </a:fillRef>
+            <a:effectRef idx="1">
+              <a:schemeClr val="accent1"/>
+            </a:effectRef>
+            <a:fontRef idx="minor">
+              <a:schemeClr val="tx1"/>
+            </a:fontRef>
+          </p:style>
+        </p:cxnSp>
+        <p:cxnSp>
+          <p:nvCxnSpPr>
+            <p:cNvPr id="25" name="Straight Arrow Connector 24">
+              <a:extLst>
+                <a:ext uri="{FF2B5EF4-FFF2-40B4-BE49-F238E27FC236}">
+                  <a16:creationId xmlns:a16="http://schemas.microsoft.com/office/drawing/2014/main" id="{3BEB27FB-4BB9-72A0-006F-F05BE58C8016}"/>
+                </a:ext>
+              </a:extLst>
+            </p:cNvPr>
+            <p:cNvCxnSpPr>
+              <a:cxnSpLocks/>
+            </p:cNvCxnSpPr>
+            <p:nvPr/>
+          </p:nvCxnSpPr>
+          <p:spPr>
+            <a:xfrm>
+              <a:off x="9005868" y="4498581"/>
+              <a:ext cx="1519050" cy="0"/>
+            </a:xfrm>
+            <a:prstGeom prst="straightConnector1">
+              <a:avLst/>
+            </a:prstGeom>
+            <a:ln>
+              <a:solidFill>
+                <a:schemeClr val="tx1"/>
+              </a:solidFill>
+              <a:tailEnd type="triangle"/>
+            </a:ln>
+          </p:spPr>
+          <p:style>
+            <a:lnRef idx="2">
+              <a:schemeClr val="accent1"/>
+            </a:lnRef>
+            <a:fillRef idx="0">
+              <a:schemeClr val="accent1"/>
+            </a:fillRef>
+            <a:effectRef idx="1">
+              <a:schemeClr val="accent1"/>
+            </a:effectRef>
+            <a:fontRef idx="minor">
+              <a:schemeClr val="tx1"/>
+            </a:fontRef>
+          </p:style>
+        </p:cxnSp>
+        <p:cxnSp>
+          <p:nvCxnSpPr>
+            <p:cNvPr id="34" name="Straight Arrow Connector 33">
+              <a:extLst>
+                <a:ext uri="{FF2B5EF4-FFF2-40B4-BE49-F238E27FC236}">
+                  <a16:creationId xmlns:a16="http://schemas.microsoft.com/office/drawing/2014/main" id="{16F58A6D-3E05-5284-C0A5-91E9BA6B09C1}"/>
+                </a:ext>
+              </a:extLst>
+            </p:cNvPr>
+            <p:cNvCxnSpPr>
+              <a:cxnSpLocks/>
+            </p:cNvCxnSpPr>
+            <p:nvPr/>
+          </p:nvCxnSpPr>
+          <p:spPr>
+            <a:xfrm flipH="1">
+              <a:off x="1462203" y="4531058"/>
+              <a:ext cx="486038" cy="0"/>
+            </a:xfrm>
+            <a:prstGeom prst="straightConnector1">
+              <a:avLst/>
+            </a:prstGeom>
+            <a:ln>
+              <a:solidFill>
+                <a:schemeClr val="tx1"/>
+              </a:solidFill>
+              <a:tailEnd type="triangle"/>
+            </a:ln>
+          </p:spPr>
+          <p:style>
+            <a:lnRef idx="2">
+              <a:schemeClr val="accent1"/>
+            </a:lnRef>
+            <a:fillRef idx="0">
+              <a:schemeClr val="accent1"/>
+            </a:fillRef>
+            <a:effectRef idx="1">
+              <a:schemeClr val="accent1"/>
+            </a:effectRef>
+            <a:fontRef idx="minor">
+              <a:schemeClr val="tx1"/>
+            </a:fontRef>
+          </p:style>
+        </p:cxnSp>
+        <p:cxnSp>
+          <p:nvCxnSpPr>
+            <p:cNvPr id="52" name="Straight Arrow Connector 51">
+              <a:extLst>
+                <a:ext uri="{FF2B5EF4-FFF2-40B4-BE49-F238E27FC236}">
+                  <a16:creationId xmlns:a16="http://schemas.microsoft.com/office/drawing/2014/main" id="{994FBDFD-9B4E-C1EC-B817-05226E7A3913}"/>
+                </a:ext>
+              </a:extLst>
+            </p:cNvPr>
+            <p:cNvCxnSpPr>
+              <a:cxnSpLocks/>
+            </p:cNvCxnSpPr>
+            <p:nvPr/>
+          </p:nvCxnSpPr>
+          <p:spPr>
+            <a:xfrm flipV="1">
+              <a:off x="4895880" y="2647164"/>
+              <a:ext cx="588202" cy="8437"/>
+            </a:xfrm>
+            <a:prstGeom prst="straightConnector1">
+              <a:avLst/>
+            </a:prstGeom>
+            <a:ln>
+              <a:solidFill>
+                <a:schemeClr val="tx1"/>
+              </a:solidFill>
+              <a:tailEnd type="triangle"/>
+            </a:ln>
+          </p:spPr>
+          <p:style>
+            <a:lnRef idx="2">
+              <a:schemeClr val="accent1"/>
+            </a:lnRef>
+            <a:fillRef idx="0">
+              <a:schemeClr val="accent1"/>
+            </a:fillRef>
+            <a:effectRef idx="1">
+              <a:schemeClr val="accent1"/>
+            </a:effectRef>
+            <a:fontRef idx="minor">
+              <a:schemeClr val="tx1"/>
+            </a:fontRef>
+          </p:style>
+        </p:cxnSp>
+        <p:sp>
+          <p:nvSpPr>
+            <p:cNvPr id="1048" name="Rounded Rectangle 1047">
+              <a:extLst>
+                <a:ext uri="{FF2B5EF4-FFF2-40B4-BE49-F238E27FC236}">
+                  <a16:creationId xmlns:a16="http://schemas.microsoft.com/office/drawing/2014/main" id="{DC78BFEF-FDC5-889E-1047-69213847F7CB}"/>
+                </a:ext>
+              </a:extLst>
+            </p:cNvPr>
+            <p:cNvSpPr/>
+            <p:nvPr/>
+          </p:nvSpPr>
+          <p:spPr>
+            <a:xfrm>
+              <a:off x="7977095" y="3972235"/>
+              <a:ext cx="1482815" cy="995863"/>
+            </a:xfrm>
+            <a:prstGeom prst="roundRect">
+              <a:avLst/>
+            </a:prstGeom>
+            <a:solidFill>
+              <a:schemeClr val="bg1"/>
+            </a:solidFill>
+            <a:ln>
+              <a:solidFill>
+                <a:schemeClr val="tx2"/>
+              </a:solidFill>
+            </a:ln>
+          </p:spPr>
+          <p:style>
+            <a:lnRef idx="2">
+              <a:schemeClr val="accent1">
+                <a:shade val="15000"/>
+              </a:schemeClr>
+            </a:lnRef>
+            <a:fillRef idx="1">
+              <a:schemeClr val="accent1"/>
+            </a:fillRef>
+            <a:effectRef idx="0">
+              <a:schemeClr val="accent1"/>
+            </a:effectRef>
+            <a:fontRef idx="minor">
+              <a:schemeClr val="lt1"/>
+            </a:fontRef>
+          </p:style>
+          <p:txBody>
+            <a:bodyPr rtlCol="0" anchor="ctr"/>
+            <a:lstStyle/>
+            <a:p>
+              <a:pPr algn="ctr"/>
+              <a:endParaRPr lang="en-US" sz="1400" dirty="0">
+                <a:latin typeface="CMU Sans Serif Medium" panose="02000603000000000000" pitchFamily="2" charset="0"/>
+                <a:ea typeface="CMU Sans Serif Medium" panose="02000603000000000000" pitchFamily="2" charset="0"/>
+                <a:cs typeface="CMU Sans Serif Medium" panose="02000603000000000000" pitchFamily="2" charset="0"/>
+              </a:endParaRPr>
+            </a:p>
+          </p:txBody>
+        </p:sp>
+        <p:sp>
+          <p:nvSpPr>
+            <p:cNvPr id="5" name="Parallelogram 4">
+              <a:extLst>
+                <a:ext uri="{FF2B5EF4-FFF2-40B4-BE49-F238E27FC236}">
+                  <a16:creationId xmlns:a16="http://schemas.microsoft.com/office/drawing/2014/main" id="{5BE055D7-5CCA-7D1A-9AAF-711B0961FBFE}"/>
+                </a:ext>
+              </a:extLst>
+            </p:cNvPr>
+            <p:cNvSpPr/>
+            <p:nvPr/>
+          </p:nvSpPr>
+          <p:spPr>
+            <a:xfrm>
+              <a:off x="2674092" y="2323621"/>
+              <a:ext cx="1253965" cy="708229"/>
+            </a:xfrm>
+            <a:prstGeom prst="parallelogram">
+              <a:avLst/>
+            </a:prstGeom>
+            <a:solidFill>
+              <a:srgbClr val="868686"/>
+            </a:solidFill>
+            <a:ln>
+              <a:noFill/>
+            </a:ln>
+          </p:spPr>
+          <p:style>
+            <a:lnRef idx="2">
+              <a:schemeClr val="accent1">
+                <a:shade val="15000"/>
+              </a:schemeClr>
+            </a:lnRef>
+            <a:fillRef idx="1">
+              <a:schemeClr val="accent1"/>
+            </a:fillRef>
+            <a:effectRef idx="0">
+              <a:schemeClr val="accent1"/>
+            </a:effectRef>
+            <a:fontRef idx="minor">
+              <a:schemeClr val="lt1"/>
+            </a:fontRef>
+          </p:style>
+          <p:txBody>
+            <a:bodyPr rtlCol="0" anchor="ctr"/>
+            <a:lstStyle/>
+            <a:p>
+              <a:pPr algn="ctr"/>
+              <a:r>
+                <a:rPr lang="en-US" sz="1200" dirty="0">
+                  <a:latin typeface="CMU Sans Serif Medium" panose="02000603000000000000" pitchFamily="2" charset="0"/>
+                  <a:ea typeface="CMU Sans Serif Medium" panose="02000603000000000000" pitchFamily="2" charset="0"/>
+                  <a:cs typeface="CMU Sans Serif Medium" panose="02000603000000000000" pitchFamily="2" charset="0"/>
+                </a:rPr>
+                <a:t>comment text</a:t>
+              </a:r>
+            </a:p>
+          </p:txBody>
+        </p:sp>
+        <p:sp>
+          <p:nvSpPr>
+            <p:cNvPr id="6" name="Rectangle 5">
+              <a:extLst>
+                <a:ext uri="{FF2B5EF4-FFF2-40B4-BE49-F238E27FC236}">
+                  <a16:creationId xmlns:a16="http://schemas.microsoft.com/office/drawing/2014/main" id="{95F186EF-E3DD-415E-D565-F3C9615F713B}"/>
+                </a:ext>
+              </a:extLst>
+            </p:cNvPr>
+            <p:cNvSpPr/>
+            <p:nvPr/>
+          </p:nvSpPr>
+          <p:spPr>
+            <a:xfrm>
+              <a:off x="10522940" y="5146865"/>
+              <a:ext cx="1102679" cy="788229"/>
+            </a:xfrm>
+            <a:prstGeom prst="rect">
+              <a:avLst/>
+            </a:prstGeom>
+            <a:solidFill>
+              <a:srgbClr val="894D9F"/>
+            </a:solidFill>
+            <a:ln>
+              <a:noFill/>
+            </a:ln>
+          </p:spPr>
+          <p:style>
+            <a:lnRef idx="2">
+              <a:schemeClr val="accent1">
+                <a:shade val="15000"/>
+              </a:schemeClr>
+            </a:lnRef>
+            <a:fillRef idx="1">
+              <a:schemeClr val="accent1"/>
+            </a:fillRef>
+            <a:effectRef idx="0">
+              <a:schemeClr val="accent1"/>
+            </a:effectRef>
+            <a:fontRef idx="minor">
+              <a:schemeClr val="lt1"/>
+            </a:fontRef>
+          </p:style>
+          <p:txBody>
+            <a:bodyPr rtlCol="0" anchor="ctr"/>
+            <a:lstStyle/>
+            <a:p>
+              <a:pPr algn="ctr"/>
+              <a:endParaRPr lang="en-US" sz="1100" dirty="0">
+                <a:solidFill>
+                  <a:schemeClr val="bg1"/>
+                </a:solidFill>
+                <a:latin typeface="CMU Sans Serif Medium" panose="02000603000000000000" pitchFamily="2" charset="0"/>
+                <a:ea typeface="CMU Sans Serif Medium" panose="02000603000000000000" pitchFamily="2" charset="0"/>
+                <a:cs typeface="CMU Sans Serif Medium" panose="02000603000000000000" pitchFamily="2" charset="0"/>
+              </a:endParaRPr>
+            </a:p>
+          </p:txBody>
+        </p:sp>
+        <p:sp>
+          <p:nvSpPr>
+            <p:cNvPr id="7" name="Parallelogram 6">
+              <a:extLst>
+                <a:ext uri="{FF2B5EF4-FFF2-40B4-BE49-F238E27FC236}">
+                  <a16:creationId xmlns:a16="http://schemas.microsoft.com/office/drawing/2014/main" id="{F3FE337F-DD25-C4E1-5D40-C88D2774BE05}"/>
+                </a:ext>
+              </a:extLst>
+            </p:cNvPr>
+            <p:cNvSpPr/>
+            <p:nvPr/>
+          </p:nvSpPr>
+          <p:spPr>
+            <a:xfrm>
+              <a:off x="10505274" y="1248059"/>
+              <a:ext cx="1120345" cy="714460"/>
+            </a:xfrm>
+            <a:prstGeom prst="parallelogram">
+              <a:avLst/>
+            </a:prstGeom>
+            <a:solidFill>
+              <a:srgbClr val="894D9F"/>
+            </a:solidFill>
+            <a:ln>
+              <a:noFill/>
+            </a:ln>
+          </p:spPr>
+          <p:style>
+            <a:lnRef idx="2">
+              <a:schemeClr val="accent1">
+                <a:shade val="15000"/>
+              </a:schemeClr>
+            </a:lnRef>
+            <a:fillRef idx="1">
+              <a:schemeClr val="accent1"/>
+            </a:fillRef>
+            <a:effectRef idx="0">
+              <a:schemeClr val="accent1"/>
+            </a:effectRef>
+            <a:fontRef idx="minor">
+              <a:schemeClr val="lt1"/>
+            </a:fontRef>
+          </p:style>
+          <p:txBody>
+            <a:bodyPr rtlCol="0" anchor="ctr"/>
+            <a:lstStyle/>
+            <a:p>
+              <a:pPr algn="ctr"/>
+              <a:r>
+                <a:rPr lang="en-US" sz="1100" dirty="0">
+                  <a:solidFill>
+                    <a:schemeClr val="bg1"/>
+                  </a:solidFill>
+                  <a:latin typeface="CMU Sans Serif Medium" panose="02000603000000000000" pitchFamily="2" charset="0"/>
+                  <a:ea typeface="CMU Sans Serif Medium" panose="02000603000000000000" pitchFamily="2" charset="0"/>
+                  <a:cs typeface="CMU Sans Serif Medium" panose="02000603000000000000" pitchFamily="2" charset="0"/>
+                </a:rPr>
+                <a:t>topics</a:t>
+              </a:r>
+            </a:p>
+          </p:txBody>
+        </p:sp>
+        <p:sp>
+          <p:nvSpPr>
+            <p:cNvPr id="8" name="Parallelogram 7">
+              <a:extLst>
+                <a:ext uri="{FF2B5EF4-FFF2-40B4-BE49-F238E27FC236}">
+                  <a16:creationId xmlns:a16="http://schemas.microsoft.com/office/drawing/2014/main" id="{A05854D5-B58C-FC62-1D39-5CE953C8BE2F}"/>
+                </a:ext>
+              </a:extLst>
+            </p:cNvPr>
+            <p:cNvSpPr/>
+            <p:nvPr/>
+          </p:nvSpPr>
+          <p:spPr>
+            <a:xfrm>
+              <a:off x="10509059" y="2266347"/>
+              <a:ext cx="1102678" cy="657567"/>
+            </a:xfrm>
+            <a:prstGeom prst="parallelogram">
+              <a:avLst/>
+            </a:prstGeom>
+            <a:solidFill>
+              <a:srgbClr val="894D9F"/>
+            </a:solidFill>
+            <a:ln>
+              <a:noFill/>
+            </a:ln>
+          </p:spPr>
+          <p:style>
+            <a:lnRef idx="2">
+              <a:schemeClr val="accent1">
+                <a:shade val="15000"/>
+              </a:schemeClr>
+            </a:lnRef>
+            <a:fillRef idx="1">
+              <a:schemeClr val="accent1"/>
+            </a:fillRef>
+            <a:effectRef idx="0">
+              <a:schemeClr val="accent1"/>
+            </a:effectRef>
+            <a:fontRef idx="minor">
+              <a:schemeClr val="lt1"/>
+            </a:fontRef>
+          </p:style>
+          <p:txBody>
+            <a:bodyPr rtlCol="0" anchor="ctr"/>
+            <a:lstStyle/>
+            <a:p>
+              <a:pPr algn="ctr"/>
+              <a:r>
+                <a:rPr lang="en-US" sz="1100" dirty="0">
+                  <a:solidFill>
+                    <a:schemeClr val="bg1"/>
+                  </a:solidFill>
+                  <a:latin typeface="CMU Sans Serif Medium" panose="02000603000000000000" pitchFamily="2" charset="0"/>
+                  <a:ea typeface="CMU Sans Serif Medium" panose="02000603000000000000" pitchFamily="2" charset="0"/>
+                  <a:cs typeface="CMU Sans Serif Medium" panose="02000603000000000000" pitchFamily="2" charset="0"/>
+                </a:rPr>
+                <a:t>sentiment scores</a:t>
+              </a:r>
+            </a:p>
+          </p:txBody>
+        </p:sp>
+        <p:sp>
+          <p:nvSpPr>
+            <p:cNvPr id="11" name="Rectangle 10">
+              <a:extLst>
+                <a:ext uri="{FF2B5EF4-FFF2-40B4-BE49-F238E27FC236}">
+                  <a16:creationId xmlns:a16="http://schemas.microsoft.com/office/drawing/2014/main" id="{DAD97CB3-DFDE-4D43-5329-AB698C416BF8}"/>
+                </a:ext>
+              </a:extLst>
+            </p:cNvPr>
+            <p:cNvSpPr/>
+            <p:nvPr/>
+          </p:nvSpPr>
+          <p:spPr>
+            <a:xfrm>
+              <a:off x="2051592" y="1304135"/>
+              <a:ext cx="1074523" cy="623730"/>
+            </a:xfrm>
+            <a:prstGeom prst="rect">
+              <a:avLst/>
+            </a:prstGeom>
+            <a:solidFill>
+              <a:schemeClr val="bg1"/>
+            </a:solidFill>
+            <a:ln>
+              <a:noFill/>
+            </a:ln>
+          </p:spPr>
+          <p:style>
+            <a:lnRef idx="2">
+              <a:schemeClr val="accent1">
+                <a:shade val="15000"/>
+              </a:schemeClr>
+            </a:lnRef>
+            <a:fillRef idx="1">
+              <a:schemeClr val="accent1"/>
+            </a:fillRef>
+            <a:effectRef idx="0">
+              <a:schemeClr val="accent1"/>
+            </a:effectRef>
+            <a:fontRef idx="minor">
+              <a:schemeClr val="lt1"/>
+            </a:fontRef>
+          </p:style>
+          <p:txBody>
+            <a:bodyPr rtlCol="0" anchor="ctr"/>
+            <a:lstStyle/>
+            <a:p>
+              <a:pPr algn="ctr"/>
+              <a:r>
+                <a:rPr lang="en-US" sz="1200" dirty="0">
+                  <a:solidFill>
+                    <a:schemeClr val="tx1">
+                      <a:lumMod val="95000"/>
+                      <a:lumOff val="5000"/>
+                    </a:schemeClr>
+                  </a:solidFill>
+                  <a:latin typeface="CMU Sans Serif Medium" panose="02000603000000000000" pitchFamily="2" charset="0"/>
+                  <a:ea typeface="CMU Sans Serif Medium" panose="02000603000000000000" pitchFamily="2" charset="0"/>
+                  <a:cs typeface="CMU Sans Serif Medium" panose="02000603000000000000" pitchFamily="2" charset="0"/>
+                </a:rPr>
+                <a:t>chunk</a:t>
+              </a:r>
+            </a:p>
+          </p:txBody>
+        </p:sp>
+        <p:sp>
+          <p:nvSpPr>
+            <p:cNvPr id="12" name="Parallelogram 11">
+              <a:extLst>
+                <a:ext uri="{FF2B5EF4-FFF2-40B4-BE49-F238E27FC236}">
+                  <a16:creationId xmlns:a16="http://schemas.microsoft.com/office/drawing/2014/main" id="{F1194234-2539-A37F-3FBA-A11C8EE56BDF}"/>
+                </a:ext>
+              </a:extLst>
+            </p:cNvPr>
+            <p:cNvSpPr/>
+            <p:nvPr/>
+          </p:nvSpPr>
+          <p:spPr>
+            <a:xfrm>
+              <a:off x="10492842" y="3233795"/>
+              <a:ext cx="1102678" cy="637145"/>
+            </a:xfrm>
+            <a:prstGeom prst="parallelogram">
+              <a:avLst/>
+            </a:prstGeom>
+            <a:solidFill>
+              <a:srgbClr val="894D9F"/>
+            </a:solidFill>
+            <a:ln>
+              <a:noFill/>
+            </a:ln>
+          </p:spPr>
+          <p:style>
+            <a:lnRef idx="2">
+              <a:schemeClr val="accent1">
+                <a:shade val="15000"/>
+              </a:schemeClr>
+            </a:lnRef>
+            <a:fillRef idx="1">
+              <a:schemeClr val="accent1"/>
+            </a:fillRef>
+            <a:effectRef idx="0">
+              <a:schemeClr val="accent1"/>
+            </a:effectRef>
+            <a:fontRef idx="minor">
+              <a:schemeClr val="lt1"/>
+            </a:fontRef>
+          </p:style>
+          <p:txBody>
+            <a:bodyPr rtlCol="0" anchor="ctr"/>
+            <a:lstStyle/>
+            <a:p>
+              <a:pPr algn="ctr"/>
+              <a:endParaRPr lang="en-US" sz="1100" dirty="0">
+                <a:solidFill>
+                  <a:schemeClr val="bg1"/>
+                </a:solidFill>
+                <a:latin typeface="CMU Sans Serif Medium" panose="02000603000000000000" pitchFamily="2" charset="0"/>
+                <a:ea typeface="CMU Sans Serif Medium" panose="02000603000000000000" pitchFamily="2" charset="0"/>
+                <a:cs typeface="CMU Sans Serif Medium" panose="02000603000000000000" pitchFamily="2" charset="0"/>
+              </a:endParaRPr>
+            </a:p>
+          </p:txBody>
+        </p:sp>
+        <p:sp>
+          <p:nvSpPr>
+            <p:cNvPr id="13" name="Rectangle 12">
+              <a:extLst>
+                <a:ext uri="{FF2B5EF4-FFF2-40B4-BE49-F238E27FC236}">
+                  <a16:creationId xmlns:a16="http://schemas.microsoft.com/office/drawing/2014/main" id="{58F52331-1FD3-8B8B-D087-79DA18481045}"/>
+                </a:ext>
+              </a:extLst>
+            </p:cNvPr>
+            <p:cNvSpPr/>
+            <p:nvPr/>
+          </p:nvSpPr>
+          <p:spPr>
+            <a:xfrm>
+              <a:off x="3244018" y="1309342"/>
+              <a:ext cx="1225377" cy="623730"/>
+            </a:xfrm>
+            <a:prstGeom prst="rect">
+              <a:avLst/>
+            </a:prstGeom>
+            <a:solidFill>
+              <a:schemeClr val="bg1"/>
+            </a:solidFill>
+            <a:ln>
+              <a:noFill/>
+            </a:ln>
+          </p:spPr>
+          <p:style>
+            <a:lnRef idx="2">
+              <a:schemeClr val="accent1">
+                <a:shade val="15000"/>
+              </a:schemeClr>
+            </a:lnRef>
+            <a:fillRef idx="1">
+              <a:schemeClr val="accent1"/>
+            </a:fillRef>
+            <a:effectRef idx="0">
+              <a:schemeClr val="accent1"/>
+            </a:effectRef>
+            <a:fontRef idx="minor">
+              <a:schemeClr val="lt1"/>
+            </a:fontRef>
+          </p:style>
+          <p:txBody>
+            <a:bodyPr rtlCol="0" anchor="ctr"/>
+            <a:lstStyle/>
+            <a:p>
+              <a:pPr algn="ctr"/>
+              <a:r>
+                <a:rPr lang="en-US" sz="1200" dirty="0">
+                  <a:solidFill>
+                    <a:sysClr val="windowText" lastClr="000000"/>
+                  </a:solidFill>
+                  <a:latin typeface="CMU Sans Serif Medium" panose="02000603000000000000" pitchFamily="2" charset="0"/>
+                  <a:ea typeface="CMU Sans Serif Medium" panose="02000603000000000000" pitchFamily="2" charset="0"/>
+                  <a:cs typeface="CMU Sans Serif Medium" panose="02000603000000000000" pitchFamily="2" charset="0"/>
+                </a:rPr>
+                <a:t>generate soft-labelled set </a:t>
+              </a:r>
+            </a:p>
+          </p:txBody>
+        </p:sp>
+        <p:sp>
+          <p:nvSpPr>
+            <p:cNvPr id="14" name="Rectangle 13">
+              <a:extLst>
+                <a:ext uri="{FF2B5EF4-FFF2-40B4-BE49-F238E27FC236}">
+                  <a16:creationId xmlns:a16="http://schemas.microsoft.com/office/drawing/2014/main" id="{56683D85-FE89-9106-87F3-A0641F6C5C39}"/>
+                </a:ext>
+              </a:extLst>
+            </p:cNvPr>
+            <p:cNvSpPr/>
+            <p:nvPr/>
+          </p:nvSpPr>
+          <p:spPr>
+            <a:xfrm>
+              <a:off x="4583180" y="1304135"/>
+              <a:ext cx="1074523" cy="623730"/>
+            </a:xfrm>
+            <a:prstGeom prst="rect">
+              <a:avLst/>
+            </a:prstGeom>
+            <a:solidFill>
+              <a:schemeClr val="bg1"/>
+            </a:solidFill>
+            <a:ln>
+              <a:noFill/>
+            </a:ln>
+          </p:spPr>
+          <p:style>
+            <a:lnRef idx="2">
+              <a:schemeClr val="accent1">
+                <a:shade val="15000"/>
+              </a:schemeClr>
+            </a:lnRef>
+            <a:fillRef idx="1">
+              <a:schemeClr val="accent1"/>
+            </a:fillRef>
+            <a:effectRef idx="0">
+              <a:schemeClr val="accent1"/>
+            </a:effectRef>
+            <a:fontRef idx="minor">
+              <a:schemeClr val="lt1"/>
+            </a:fontRef>
+          </p:style>
+          <p:txBody>
+            <a:bodyPr rtlCol="0" anchor="ctr"/>
+            <a:lstStyle/>
+            <a:p>
+              <a:pPr algn="ctr"/>
+              <a:r>
+                <a:rPr lang="en-US" sz="1200" dirty="0">
+                  <a:solidFill>
+                    <a:sysClr val="windowText" lastClr="000000"/>
+                  </a:solidFill>
+                  <a:latin typeface="CMU Sans Serif Medium" panose="02000603000000000000" pitchFamily="2" charset="0"/>
+                  <a:ea typeface="CMU Sans Serif Medium" panose="02000603000000000000" pitchFamily="2" charset="0"/>
+                  <a:cs typeface="CMU Sans Serif Medium" panose="02000603000000000000" pitchFamily="2" charset="0"/>
+                </a:rPr>
+                <a:t>train</a:t>
+              </a:r>
+            </a:p>
+          </p:txBody>
+        </p:sp>
+        <p:sp>
+          <p:nvSpPr>
+            <p:cNvPr id="16" name="TextBox 15">
+              <a:extLst>
+                <a:ext uri="{FF2B5EF4-FFF2-40B4-BE49-F238E27FC236}">
+                  <a16:creationId xmlns:a16="http://schemas.microsoft.com/office/drawing/2014/main" id="{912067F4-4607-26B0-30A4-9438C9FC05F4}"/>
+                </a:ext>
+              </a:extLst>
+            </p:cNvPr>
+            <p:cNvSpPr txBox="1"/>
+            <p:nvPr/>
+          </p:nvSpPr>
+          <p:spPr>
+            <a:xfrm>
+              <a:off x="1944687" y="1008461"/>
+              <a:ext cx="3849663" cy="276999"/>
+            </a:xfrm>
+            <a:prstGeom prst="rect">
+              <a:avLst/>
+            </a:prstGeom>
+            <a:noFill/>
+          </p:spPr>
+          <p:txBody>
+            <a:bodyPr wrap="square" rtlCol="0">
+              <a:spAutoFit/>
+            </a:bodyPr>
+            <a:lstStyle/>
+            <a:p>
+              <a:pPr algn="r"/>
+              <a:r>
+                <a:rPr lang="en-US" sz="1200" i="1" dirty="0">
+                  <a:solidFill>
+                    <a:schemeClr val="tx1">
+                      <a:lumMod val="95000"/>
+                      <a:lumOff val="5000"/>
+                    </a:schemeClr>
+                  </a:solidFill>
+                  <a:latin typeface="CMU Sans Serif Medium" panose="02000603000000000000" pitchFamily="2" charset="0"/>
+                  <a:ea typeface="CMU Sans Serif Medium" panose="02000603000000000000" pitchFamily="2" charset="0"/>
+                  <a:cs typeface="CMU Sans Serif Medium" panose="02000603000000000000" pitchFamily="2" charset="0"/>
+                </a:rPr>
+                <a:t>weak learning</a:t>
+              </a:r>
+            </a:p>
+          </p:txBody>
+        </p:sp>
+        <p:sp>
+          <p:nvSpPr>
+            <p:cNvPr id="44" name="TextBox 43">
+              <a:extLst>
+                <a:ext uri="{FF2B5EF4-FFF2-40B4-BE49-F238E27FC236}">
+                  <a16:creationId xmlns:a16="http://schemas.microsoft.com/office/drawing/2014/main" id="{7507DCB1-5408-F539-012E-1C560D5D4F09}"/>
+                </a:ext>
+              </a:extLst>
+            </p:cNvPr>
+            <p:cNvSpPr txBox="1"/>
+            <p:nvPr/>
+          </p:nvSpPr>
+          <p:spPr>
+            <a:xfrm>
+              <a:off x="118519" y="2530996"/>
+              <a:ext cx="1554750" cy="880369"/>
+            </a:xfrm>
+            <a:prstGeom prst="rect">
+              <a:avLst/>
+            </a:prstGeom>
+            <a:noFill/>
+          </p:spPr>
+          <p:txBody>
+            <a:bodyPr wrap="square" rtlCol="0">
+              <a:spAutoFit/>
+            </a:bodyPr>
+            <a:lstStyle/>
+            <a:p>
+              <a:pPr algn="ctr">
+                <a:lnSpc>
+                  <a:spcPct val="150000"/>
+                </a:lnSpc>
+              </a:pPr>
+              <a:r>
+                <a:rPr lang="en-US" b="1" dirty="0">
+                  <a:solidFill>
+                    <a:schemeClr val="tx1">
+                      <a:lumMod val="75000"/>
+                      <a:lumOff val="25000"/>
+                    </a:schemeClr>
+                  </a:solidFill>
+                  <a:latin typeface="Calibri" panose="020F0502020204030204" pitchFamily="34" charset="0"/>
+                  <a:cs typeface="Calibri" panose="020F0502020204030204" pitchFamily="34" charset="0"/>
+                </a:rPr>
+                <a:t>community </a:t>
+              </a:r>
+            </a:p>
+            <a:p>
+              <a:pPr algn="ctr">
+                <a:lnSpc>
+                  <a:spcPct val="150000"/>
+                </a:lnSpc>
+              </a:pPr>
+              <a:r>
+                <a:rPr lang="en-US" b="1" dirty="0">
+                  <a:solidFill>
+                    <a:schemeClr val="tx1">
+                      <a:lumMod val="75000"/>
+                      <a:lumOff val="25000"/>
+                    </a:schemeClr>
+                  </a:solidFill>
+                  <a:latin typeface="Calibri" panose="020F0502020204030204" pitchFamily="34" charset="0"/>
+                  <a:cs typeface="Calibri" panose="020F0502020204030204" pitchFamily="34" charset="0"/>
+                </a:rPr>
+                <a:t>comments</a:t>
+              </a:r>
+            </a:p>
+          </p:txBody>
+        </p:sp>
+        <p:sp>
+          <p:nvSpPr>
+            <p:cNvPr id="45" name="TextBox 44">
+              <a:extLst>
+                <a:ext uri="{FF2B5EF4-FFF2-40B4-BE49-F238E27FC236}">
+                  <a16:creationId xmlns:a16="http://schemas.microsoft.com/office/drawing/2014/main" id="{37D71351-DB11-9EF9-1118-5CEB938961E3}"/>
+                </a:ext>
+              </a:extLst>
+            </p:cNvPr>
+            <p:cNvSpPr txBox="1"/>
+            <p:nvPr/>
+          </p:nvSpPr>
+          <p:spPr>
+            <a:xfrm>
+              <a:off x="118519" y="2734938"/>
+              <a:ext cx="1554750" cy="523220"/>
+            </a:xfrm>
+            <a:prstGeom prst="rect">
+              <a:avLst/>
+            </a:prstGeom>
+            <a:noFill/>
+          </p:spPr>
+          <p:txBody>
+            <a:bodyPr wrap="square">
+              <a:spAutoFit/>
+            </a:bodyPr>
+            <a:lstStyle/>
+            <a:p>
+              <a:pPr algn="ctr"/>
+              <a:r>
+                <a:rPr lang="en-US" sz="2800" i="1" dirty="0">
+                  <a:solidFill>
+                    <a:srgbClr val="F657C9"/>
+                  </a:solidFill>
+                  <a:latin typeface="AngsanaUPC" panose="020B0604020202020204" pitchFamily="34" charset="0"/>
+                  <a:cs typeface="AngsanaUPC" panose="020B0604020202020204" pitchFamily="34" charset="0"/>
+                </a:rPr>
+                <a:t>web-scraped</a:t>
+              </a:r>
+              <a:endParaRPr lang="en-US" sz="2800" dirty="0">
+                <a:solidFill>
+                  <a:srgbClr val="F657C9"/>
+                </a:solidFill>
+              </a:endParaRPr>
+            </a:p>
+          </p:txBody>
+        </p:sp>
+        <p:pic>
+          <p:nvPicPr>
+            <p:cNvPr id="66" name="Picture 65" descr="A logo with colorful dots and lines&#10;&#10;AI-generated content may be incorrect.">
+              <a:extLst>
+                <a:ext uri="{FF2B5EF4-FFF2-40B4-BE49-F238E27FC236}">
+                  <a16:creationId xmlns:a16="http://schemas.microsoft.com/office/drawing/2014/main" id="{5F7AA59E-8505-E2E4-9F4D-639E3A6B600C}"/>
+                </a:ext>
+              </a:extLst>
+            </p:cNvPr>
+            <p:cNvPicPr>
+              <a:picLocks noChangeAspect="1"/>
+            </p:cNvPicPr>
+            <p:nvPr/>
+          </p:nvPicPr>
+          <p:blipFill>
+            <a:blip r:embed="rId2"/>
+            <a:stretch>
+              <a:fillRect/>
+            </a:stretch>
+          </p:blipFill>
+          <p:spPr>
+            <a:xfrm>
+              <a:off x="8098607" y="4076815"/>
+              <a:ext cx="1256270" cy="802617"/>
+            </a:xfrm>
+            <a:prstGeom prst="rect">
+              <a:avLst/>
+            </a:prstGeom>
+            <a:ln>
+              <a:noFill/>
+            </a:ln>
+          </p:spPr>
+        </p:pic>
+        <p:sp>
+          <p:nvSpPr>
+            <p:cNvPr id="138" name="Rectangle 137">
+              <a:extLst>
+                <a:ext uri="{FF2B5EF4-FFF2-40B4-BE49-F238E27FC236}">
+                  <a16:creationId xmlns:a16="http://schemas.microsoft.com/office/drawing/2014/main" id="{4BB85F3F-9E48-C736-1DB1-B8434E207FFF}"/>
+                </a:ext>
+              </a:extLst>
+            </p:cNvPr>
+            <p:cNvSpPr/>
+            <p:nvPr/>
+          </p:nvSpPr>
+          <p:spPr>
+            <a:xfrm>
+              <a:off x="10522941" y="4187084"/>
+              <a:ext cx="1102678" cy="637145"/>
+            </a:xfrm>
+            <a:prstGeom prst="rect">
+              <a:avLst/>
+            </a:prstGeom>
+            <a:solidFill>
+              <a:srgbClr val="894D9F"/>
+            </a:solidFill>
+            <a:ln>
+              <a:noFill/>
+            </a:ln>
+          </p:spPr>
+          <p:style>
+            <a:lnRef idx="2">
+              <a:schemeClr val="accent1">
+                <a:shade val="15000"/>
+              </a:schemeClr>
+            </a:lnRef>
+            <a:fillRef idx="1">
+              <a:schemeClr val="accent1"/>
+            </a:fillRef>
+            <a:effectRef idx="0">
+              <a:schemeClr val="accent1"/>
+            </a:effectRef>
+            <a:fontRef idx="minor">
+              <a:schemeClr val="lt1"/>
+            </a:fontRef>
+          </p:style>
+          <p:txBody>
+            <a:bodyPr rtlCol="0" anchor="ctr"/>
+            <a:lstStyle/>
+            <a:p>
+              <a:pPr algn="ctr"/>
+              <a:r>
+                <a:rPr lang="en-US" sz="1100" dirty="0">
+                  <a:solidFill>
+                    <a:schemeClr val="bg1"/>
+                  </a:solidFill>
+                  <a:latin typeface="CMU Sans Serif Medium" panose="02000603000000000000" pitchFamily="2" charset="0"/>
+                  <a:ea typeface="CMU Sans Serif Medium" panose="02000603000000000000" pitchFamily="2" charset="0"/>
+                  <a:cs typeface="CMU Sans Serif Medium" panose="02000603000000000000" pitchFamily="2" charset="0"/>
+                </a:rPr>
+                <a:t>planning application</a:t>
+              </a:r>
+            </a:p>
+            <a:p>
+              <a:pPr algn="ctr"/>
+              <a:r>
+                <a:rPr lang="en-US" sz="1100" dirty="0">
+                  <a:solidFill>
+                    <a:schemeClr val="bg1"/>
+                  </a:solidFill>
+                  <a:latin typeface="CMU Sans Serif Medium" panose="02000603000000000000" pitchFamily="2" charset="0"/>
+                  <a:ea typeface="CMU Sans Serif Medium" panose="02000603000000000000" pitchFamily="2" charset="0"/>
+                  <a:cs typeface="CMU Sans Serif Medium" panose="02000603000000000000" pitchFamily="2" charset="0"/>
+                </a:rPr>
+                <a:t>details</a:t>
+              </a:r>
+            </a:p>
+          </p:txBody>
+        </p:sp>
+        <p:sp>
+          <p:nvSpPr>
+            <p:cNvPr id="139" name="Parallelogram 138">
+              <a:extLst>
+                <a:ext uri="{FF2B5EF4-FFF2-40B4-BE49-F238E27FC236}">
+                  <a16:creationId xmlns:a16="http://schemas.microsoft.com/office/drawing/2014/main" id="{2C8B0943-1092-20C2-9245-9806310D500F}"/>
+                </a:ext>
+              </a:extLst>
+            </p:cNvPr>
+            <p:cNvSpPr/>
+            <p:nvPr/>
+          </p:nvSpPr>
+          <p:spPr>
+            <a:xfrm>
+              <a:off x="1815033" y="4163944"/>
+              <a:ext cx="1286396" cy="719883"/>
+            </a:xfrm>
+            <a:prstGeom prst="parallelogram">
+              <a:avLst/>
+            </a:prstGeom>
+            <a:solidFill>
+              <a:srgbClr val="868686"/>
+            </a:solidFill>
+            <a:ln>
+              <a:noFill/>
+            </a:ln>
+          </p:spPr>
+          <p:style>
+            <a:lnRef idx="2">
+              <a:schemeClr val="accent1">
+                <a:shade val="15000"/>
+              </a:schemeClr>
+            </a:lnRef>
+            <a:fillRef idx="1">
+              <a:schemeClr val="accent1"/>
+            </a:fillRef>
+            <a:effectRef idx="0">
+              <a:schemeClr val="accent1"/>
+            </a:effectRef>
+            <a:fontRef idx="minor">
+              <a:schemeClr val="lt1"/>
+            </a:fontRef>
+          </p:style>
+          <p:txBody>
+            <a:bodyPr rtlCol="0" anchor="ctr"/>
+            <a:lstStyle/>
+            <a:p>
+              <a:pPr algn="ctr"/>
+              <a:r>
+                <a:rPr lang="en-US" sz="1200" dirty="0">
+                  <a:latin typeface="CMU Sans Serif Medium" panose="02000603000000000000" pitchFamily="2" charset="0"/>
+                  <a:ea typeface="CMU Sans Serif Medium" panose="02000603000000000000" pitchFamily="2" charset="0"/>
+                  <a:cs typeface="CMU Sans Serif Medium" panose="02000603000000000000" pitchFamily="2" charset="0"/>
+                </a:rPr>
+                <a:t>planning application IDs</a:t>
+              </a:r>
+            </a:p>
+          </p:txBody>
+        </p:sp>
+        <p:sp>
+          <p:nvSpPr>
+            <p:cNvPr id="146" name="Rectangle 145">
+              <a:extLst>
+                <a:ext uri="{FF2B5EF4-FFF2-40B4-BE49-F238E27FC236}">
+                  <a16:creationId xmlns:a16="http://schemas.microsoft.com/office/drawing/2014/main" id="{2284D125-633F-7C99-2F93-9C488BADFDDB}"/>
+                </a:ext>
+              </a:extLst>
+            </p:cNvPr>
+            <p:cNvSpPr/>
+            <p:nvPr/>
+          </p:nvSpPr>
+          <p:spPr>
+            <a:xfrm>
+              <a:off x="372203" y="4233517"/>
+              <a:ext cx="1102678" cy="637145"/>
+            </a:xfrm>
+            <a:prstGeom prst="rect">
+              <a:avLst/>
+            </a:prstGeom>
+            <a:solidFill>
+              <a:srgbClr val="868686"/>
+            </a:solidFill>
+            <a:ln>
+              <a:noFill/>
+            </a:ln>
+          </p:spPr>
+          <p:style>
+            <a:lnRef idx="2">
+              <a:schemeClr val="accent1">
+                <a:shade val="15000"/>
+              </a:schemeClr>
+            </a:lnRef>
+            <a:fillRef idx="1">
+              <a:schemeClr val="accent1"/>
+            </a:fillRef>
+            <a:effectRef idx="0">
+              <a:schemeClr val="accent1"/>
+            </a:effectRef>
+            <a:fontRef idx="minor">
+              <a:schemeClr val="lt1"/>
+            </a:fontRef>
+          </p:style>
+          <p:txBody>
+            <a:bodyPr rtlCol="0" anchor="ctr"/>
+            <a:lstStyle/>
+            <a:p>
+              <a:pPr algn="ctr"/>
+              <a:r>
+                <a:rPr lang="en-US" sz="1200" dirty="0">
+                  <a:latin typeface="CMU Sans Serif Medium" panose="02000603000000000000" pitchFamily="2" charset="0"/>
+                  <a:ea typeface="CMU Sans Serif Medium" panose="02000603000000000000" pitchFamily="2" charset="0"/>
+                  <a:cs typeface="CMU Sans Serif Medium" panose="02000603000000000000" pitchFamily="2" charset="0"/>
+                </a:rPr>
+                <a:t>web-scraping pipeline</a:t>
+              </a:r>
+            </a:p>
+          </p:txBody>
+        </p:sp>
+        <p:sp>
+          <p:nvSpPr>
+            <p:cNvPr id="1051" name="Rounded Rectangle 1050">
+              <a:extLst>
+                <a:ext uri="{FF2B5EF4-FFF2-40B4-BE49-F238E27FC236}">
+                  <a16:creationId xmlns:a16="http://schemas.microsoft.com/office/drawing/2014/main" id="{0069CD0A-230B-6742-3D3B-CD8D94031E58}"/>
+                </a:ext>
+              </a:extLst>
+            </p:cNvPr>
+            <p:cNvSpPr/>
+            <p:nvPr/>
+          </p:nvSpPr>
+          <p:spPr>
+            <a:xfrm>
+              <a:off x="7977095" y="5039140"/>
+              <a:ext cx="1482815" cy="995863"/>
+            </a:xfrm>
+            <a:prstGeom prst="roundRect">
+              <a:avLst/>
+            </a:prstGeom>
+            <a:solidFill>
+              <a:schemeClr val="bg1"/>
+            </a:solidFill>
+            <a:ln>
+              <a:solidFill>
+                <a:schemeClr val="tx2"/>
+              </a:solidFill>
+            </a:ln>
+          </p:spPr>
+          <p:style>
+            <a:lnRef idx="2">
+              <a:schemeClr val="accent1">
+                <a:shade val="15000"/>
+              </a:schemeClr>
+            </a:lnRef>
+            <a:fillRef idx="1">
+              <a:schemeClr val="accent1"/>
+            </a:fillRef>
+            <a:effectRef idx="0">
+              <a:schemeClr val="accent1"/>
+            </a:effectRef>
+            <a:fontRef idx="minor">
+              <a:schemeClr val="lt1"/>
+            </a:fontRef>
+          </p:style>
+          <p:txBody>
+            <a:bodyPr rtlCol="0" anchor="ctr"/>
+            <a:lstStyle/>
+            <a:p>
+              <a:pPr algn="ctr"/>
+              <a:endParaRPr lang="en-US" sz="1400" dirty="0">
+                <a:latin typeface="CMU Sans Serif Medium" panose="02000603000000000000" pitchFamily="2" charset="0"/>
+                <a:ea typeface="CMU Sans Serif Medium" panose="02000603000000000000" pitchFamily="2" charset="0"/>
+                <a:cs typeface="CMU Sans Serif Medium" panose="02000603000000000000" pitchFamily="2" charset="0"/>
+              </a:endParaRPr>
+            </a:p>
+          </p:txBody>
+        </p:sp>
+        <p:pic>
+          <p:nvPicPr>
+            <p:cNvPr id="1026" name="Picture 2" descr="2021–2022 United Kingdom censuses - Wikipedia">
+              <a:extLst>
+                <a:ext uri="{FF2B5EF4-FFF2-40B4-BE49-F238E27FC236}">
+                  <a16:creationId xmlns:a16="http://schemas.microsoft.com/office/drawing/2014/main" id="{852F210A-1E87-ABC9-9E05-619DA7D82534}"/>
+                </a:ext>
+              </a:extLst>
+            </p:cNvPr>
+            <p:cNvPicPr>
+              <a:picLocks noChangeAspect="1" noChangeArrowheads="1"/>
+            </p:cNvPicPr>
+            <p:nvPr/>
+          </p:nvPicPr>
+          <p:blipFill>
+            <a:blip r:embed="rId3">
+              <a:extLst>
+                <a:ext uri="{28A0092B-C50C-407E-A947-70E740481C1C}">
+                  <a14:useLocalDpi xmlns:a14="http://schemas.microsoft.com/office/drawing/2010/main" val="0"/>
+                </a:ext>
+              </a:extLst>
+            </a:blip>
+            <a:srcRect/>
+            <a:stretch>
+              <a:fillRect/>
+            </a:stretch>
+          </p:blipFill>
+          <p:spPr bwMode="auto">
+            <a:xfrm>
+              <a:off x="8119589" y="5313640"/>
+              <a:ext cx="1123349" cy="443782"/>
+            </a:xfrm>
+            <a:prstGeom prst="rect">
+              <a:avLst/>
+            </a:prstGeom>
+            <a:noFill/>
+            <a:ln>
+              <a:noFill/>
+            </a:ln>
+            <a:extLst>
+              <a:ext uri="{909E8E84-426E-40DD-AFC4-6F175D3DCCD1}">
+                <a14:hiddenFill xmlns:a14="http://schemas.microsoft.com/office/drawing/2010/main">
+                  <a:solidFill>
+                    <a:srgbClr val="FFFFFF"/>
+                  </a:solidFill>
+                </a14:hiddenFill>
+              </a:ext>
+            </a:extLst>
+          </p:spPr>
+        </p:pic>
+        <p:cxnSp>
+          <p:nvCxnSpPr>
+            <p:cNvPr id="175" name="Elbow Connector 174">
+              <a:extLst>
+                <a:ext uri="{FF2B5EF4-FFF2-40B4-BE49-F238E27FC236}">
+                  <a16:creationId xmlns:a16="http://schemas.microsoft.com/office/drawing/2014/main" id="{D38D3062-AE30-73E8-FBA2-60E42FB09C3E}"/>
+                </a:ext>
+              </a:extLst>
+            </p:cNvPr>
+            <p:cNvCxnSpPr>
+              <a:cxnSpLocks/>
+              <a:stCxn id="3" idx="0"/>
+              <a:endCxn id="172" idx="2"/>
+            </p:cNvCxnSpPr>
+            <p:nvPr/>
+          </p:nvCxnSpPr>
+          <p:spPr>
+            <a:xfrm rot="16200000" flipV="1">
+              <a:off x="4799063" y="1112859"/>
+              <a:ext cx="282518" cy="2139006"/>
+            </a:xfrm>
+            <a:prstGeom prst="bentConnector3">
+              <a:avLst>
+                <a:gd name="adj1" fmla="val 50000"/>
+              </a:avLst>
+            </a:prstGeom>
+            <a:ln w="19050">
+              <a:solidFill>
+                <a:schemeClr val="tx1"/>
+              </a:solidFill>
+              <a:tailEnd type="triangle"/>
+            </a:ln>
+          </p:spPr>
+          <p:style>
+            <a:lnRef idx="1">
+              <a:schemeClr val="accent1"/>
+            </a:lnRef>
+            <a:fillRef idx="0">
+              <a:schemeClr val="accent1"/>
+            </a:fillRef>
+            <a:effectRef idx="0">
+              <a:schemeClr val="accent1"/>
+            </a:effectRef>
+            <a:fontRef idx="minor">
+              <a:schemeClr val="tx1"/>
+            </a:fontRef>
+          </p:style>
+        </p:cxnSp>
+        <p:sp>
+          <p:nvSpPr>
+            <p:cNvPr id="183" name="TextBox 182">
+              <a:extLst>
+                <a:ext uri="{FF2B5EF4-FFF2-40B4-BE49-F238E27FC236}">
+                  <a16:creationId xmlns:a16="http://schemas.microsoft.com/office/drawing/2014/main" id="{29F9E86D-FBB8-D2DB-EFF9-1F173795ED99}"/>
+                </a:ext>
+              </a:extLst>
+            </p:cNvPr>
+            <p:cNvSpPr txBox="1"/>
+            <p:nvPr/>
+          </p:nvSpPr>
+          <p:spPr>
+            <a:xfrm rot="16200000">
+              <a:off x="10936542" y="4913522"/>
+              <a:ext cx="1965963" cy="276999"/>
+            </a:xfrm>
+            <a:prstGeom prst="rect">
+              <a:avLst/>
+            </a:prstGeom>
+            <a:noFill/>
+          </p:spPr>
+          <p:txBody>
+            <a:bodyPr wrap="square" rtlCol="0">
+              <a:spAutoFit/>
+            </a:bodyPr>
+            <a:lstStyle/>
+            <a:p>
+              <a:pPr algn="l"/>
+              <a:r>
+                <a:rPr lang="en-US" sz="1200" dirty="0">
+                  <a:solidFill>
+                    <a:schemeClr val="tx1">
+                      <a:lumMod val="95000"/>
+                      <a:lumOff val="5000"/>
+                    </a:schemeClr>
+                  </a:solidFill>
+                  <a:latin typeface="CMU Sans Serif Medium" panose="02000603000000000000" pitchFamily="2" charset="0"/>
+                  <a:ea typeface="CMU Sans Serif Medium" panose="02000603000000000000" pitchFamily="2" charset="0"/>
+                  <a:cs typeface="CMU Sans Serif Medium" panose="02000603000000000000" pitchFamily="2" charset="0"/>
+                </a:rPr>
+                <a:t>variables used in analysis</a:t>
+              </a:r>
+            </a:p>
+          </p:txBody>
+        </p:sp>
+        <p:sp>
+          <p:nvSpPr>
+            <p:cNvPr id="1035" name="TextBox 1034">
+              <a:extLst>
+                <a:ext uri="{FF2B5EF4-FFF2-40B4-BE49-F238E27FC236}">
+                  <a16:creationId xmlns:a16="http://schemas.microsoft.com/office/drawing/2014/main" id="{5DD27A08-DCFB-75BD-1B9E-5C67539B92CA}"/>
+                </a:ext>
+              </a:extLst>
+            </p:cNvPr>
+            <p:cNvSpPr txBox="1"/>
+            <p:nvPr/>
+          </p:nvSpPr>
+          <p:spPr>
+            <a:xfrm>
+              <a:off x="8868715" y="2117660"/>
+              <a:ext cx="1150023" cy="246221"/>
+            </a:xfrm>
+            <a:prstGeom prst="rect">
+              <a:avLst/>
+            </a:prstGeom>
+            <a:noFill/>
+          </p:spPr>
+          <p:txBody>
+            <a:bodyPr wrap="square" rtlCol="0">
+              <a:spAutoFit/>
+            </a:bodyPr>
+            <a:lstStyle/>
+            <a:p>
+              <a:pPr algn="r"/>
+              <a:r>
+                <a:rPr lang="en-US" sz="1000" i="1" dirty="0">
+                  <a:solidFill>
+                    <a:schemeClr val="tx1">
+                      <a:lumMod val="95000"/>
+                      <a:lumOff val="5000"/>
+                    </a:schemeClr>
+                  </a:solidFill>
+                  <a:latin typeface="CMU Sans Serif Medium" panose="02000603000000000000" pitchFamily="2" charset="0"/>
+                  <a:ea typeface="CMU Sans Serif Medium" panose="02000603000000000000" pitchFamily="2" charset="0"/>
+                  <a:cs typeface="CMU Sans Serif Medium" panose="02000603000000000000" pitchFamily="2" charset="0"/>
+                </a:rPr>
+                <a:t>All-MiniLM-L6-v2</a:t>
+              </a:r>
+            </a:p>
+          </p:txBody>
+        </p:sp>
+        <p:cxnSp>
+          <p:nvCxnSpPr>
+            <p:cNvPr id="40" name="Straight Arrow Connector 39">
+              <a:extLst>
+                <a:ext uri="{FF2B5EF4-FFF2-40B4-BE49-F238E27FC236}">
+                  <a16:creationId xmlns:a16="http://schemas.microsoft.com/office/drawing/2014/main" id="{082802F0-4D7C-B5BF-634A-F970828260CF}"/>
+                </a:ext>
+              </a:extLst>
+            </p:cNvPr>
+            <p:cNvCxnSpPr>
+              <a:cxnSpLocks/>
+            </p:cNvCxnSpPr>
+            <p:nvPr/>
+          </p:nvCxnSpPr>
+          <p:spPr>
+            <a:xfrm flipV="1">
+              <a:off x="900392" y="3533949"/>
+              <a:ext cx="0" cy="718998"/>
+            </a:xfrm>
+            <a:prstGeom prst="straightConnector1">
+              <a:avLst/>
+            </a:prstGeom>
+            <a:ln>
+              <a:solidFill>
+                <a:schemeClr val="tx1"/>
+              </a:solidFill>
+              <a:tailEnd type="triangle"/>
+            </a:ln>
+          </p:spPr>
+          <p:style>
+            <a:lnRef idx="2">
+              <a:schemeClr val="accent1"/>
+            </a:lnRef>
+            <a:fillRef idx="0">
+              <a:schemeClr val="accent1"/>
+            </a:fillRef>
+            <a:effectRef idx="1">
+              <a:schemeClr val="accent1"/>
+            </a:effectRef>
+            <a:fontRef idx="minor">
+              <a:schemeClr val="tx1"/>
+            </a:fontRef>
+          </p:style>
+        </p:cxnSp>
+        <p:cxnSp>
+          <p:nvCxnSpPr>
+            <p:cNvPr id="22" name="Elbow Connector 21">
+              <a:extLst>
+                <a:ext uri="{FF2B5EF4-FFF2-40B4-BE49-F238E27FC236}">
+                  <a16:creationId xmlns:a16="http://schemas.microsoft.com/office/drawing/2014/main" id="{8E873633-55BC-5B33-D852-6CF0D1261799}"/>
+                </a:ext>
+              </a:extLst>
+            </p:cNvPr>
+            <p:cNvCxnSpPr>
+              <a:cxnSpLocks/>
+              <a:endCxn id="10" idx="2"/>
+            </p:cNvCxnSpPr>
+            <p:nvPr/>
+          </p:nvCxnSpPr>
+          <p:spPr>
+            <a:xfrm flipV="1">
+              <a:off x="6454850" y="1978199"/>
+              <a:ext cx="1627574" cy="543702"/>
+            </a:xfrm>
+            <a:prstGeom prst="bentConnector2">
+              <a:avLst/>
+            </a:prstGeom>
+            <a:ln w="19050">
+              <a:solidFill>
+                <a:schemeClr val="tx1"/>
+              </a:solidFill>
+              <a:tailEnd type="triangle"/>
+            </a:ln>
+          </p:spPr>
+          <p:style>
+            <a:lnRef idx="1">
+              <a:schemeClr val="accent1"/>
+            </a:lnRef>
+            <a:fillRef idx="0">
+              <a:schemeClr val="accent1"/>
+            </a:fillRef>
+            <a:effectRef idx="0">
+              <a:schemeClr val="accent1"/>
+            </a:effectRef>
+            <a:fontRef idx="minor">
+              <a:schemeClr val="tx1"/>
+            </a:fontRef>
+          </p:style>
+        </p:cxnSp>
+        <p:cxnSp>
+          <p:nvCxnSpPr>
+            <p:cNvPr id="60" name="Straight Arrow Connector 59">
+              <a:extLst>
+                <a:ext uri="{FF2B5EF4-FFF2-40B4-BE49-F238E27FC236}">
+                  <a16:creationId xmlns:a16="http://schemas.microsoft.com/office/drawing/2014/main" id="{CD913903-7FED-AD43-9EDE-7317190C1F09}"/>
+                </a:ext>
+              </a:extLst>
+            </p:cNvPr>
+            <p:cNvCxnSpPr>
+              <a:cxnSpLocks/>
+            </p:cNvCxnSpPr>
+            <p:nvPr/>
+          </p:nvCxnSpPr>
+          <p:spPr>
+            <a:xfrm>
+              <a:off x="6487322" y="2644139"/>
+              <a:ext cx="2428505" cy="0"/>
+            </a:xfrm>
+            <a:prstGeom prst="straightConnector1">
+              <a:avLst/>
+            </a:prstGeom>
+            <a:ln w="19050">
+              <a:solidFill>
+                <a:schemeClr val="tx1"/>
+              </a:solidFill>
+              <a:tailEnd type="triangle"/>
+            </a:ln>
+          </p:spPr>
+          <p:style>
+            <a:lnRef idx="2">
+              <a:schemeClr val="accent1"/>
+            </a:lnRef>
+            <a:fillRef idx="0">
+              <a:schemeClr val="accent1"/>
+            </a:fillRef>
+            <a:effectRef idx="1">
+              <a:schemeClr val="accent1"/>
+            </a:effectRef>
+            <a:fontRef idx="minor">
+              <a:schemeClr val="tx1"/>
+            </a:fontRef>
+          </p:style>
+        </p:cxnSp>
+        <p:cxnSp>
+          <p:nvCxnSpPr>
+            <p:cNvPr id="67" name="Straight Arrow Connector 66">
+              <a:extLst>
+                <a:ext uri="{FF2B5EF4-FFF2-40B4-BE49-F238E27FC236}">
+                  <a16:creationId xmlns:a16="http://schemas.microsoft.com/office/drawing/2014/main" id="{85356EBF-F5C2-BE4B-24FA-19A38DD908B5}"/>
+                </a:ext>
+              </a:extLst>
+            </p:cNvPr>
+            <p:cNvCxnSpPr>
+              <a:cxnSpLocks/>
+            </p:cNvCxnSpPr>
+            <p:nvPr/>
+          </p:nvCxnSpPr>
+          <p:spPr>
+            <a:xfrm>
+              <a:off x="10003042" y="2609414"/>
+              <a:ext cx="617920" cy="0"/>
+            </a:xfrm>
+            <a:prstGeom prst="straightConnector1">
+              <a:avLst/>
+            </a:prstGeom>
+            <a:ln>
+              <a:solidFill>
+                <a:schemeClr val="tx1"/>
+              </a:solidFill>
+              <a:tailEnd type="triangle"/>
+            </a:ln>
+          </p:spPr>
+          <p:style>
+            <a:lnRef idx="2">
+              <a:schemeClr val="accent1"/>
+            </a:lnRef>
+            <a:fillRef idx="0">
+              <a:schemeClr val="accent1"/>
+            </a:fillRef>
+            <a:effectRef idx="1">
+              <a:schemeClr val="accent1"/>
+            </a:effectRef>
+            <a:fontRef idx="minor">
+              <a:schemeClr val="tx1"/>
+            </a:fontRef>
+          </p:style>
+        </p:cxnSp>
+        <p:cxnSp>
+          <p:nvCxnSpPr>
+            <p:cNvPr id="69" name="Straight Arrow Connector 68">
+              <a:extLst>
+                <a:ext uri="{FF2B5EF4-FFF2-40B4-BE49-F238E27FC236}">
+                  <a16:creationId xmlns:a16="http://schemas.microsoft.com/office/drawing/2014/main" id="{0F32E9CA-5F74-AE22-553F-842A4BA68AC1}"/>
+                </a:ext>
+              </a:extLst>
+            </p:cNvPr>
+            <p:cNvCxnSpPr>
+              <a:cxnSpLocks/>
+            </p:cNvCxnSpPr>
+            <p:nvPr/>
+          </p:nvCxnSpPr>
+          <p:spPr>
+            <a:xfrm>
+              <a:off x="10003042" y="1659985"/>
+              <a:ext cx="617920" cy="0"/>
+            </a:xfrm>
+            <a:prstGeom prst="straightConnector1">
+              <a:avLst/>
+            </a:prstGeom>
+            <a:ln>
+              <a:solidFill>
+                <a:schemeClr val="tx1"/>
+              </a:solidFill>
+              <a:tailEnd type="triangle"/>
+            </a:ln>
+          </p:spPr>
+          <p:style>
+            <a:lnRef idx="2">
+              <a:schemeClr val="accent1"/>
+            </a:lnRef>
+            <a:fillRef idx="0">
+              <a:schemeClr val="accent1"/>
+            </a:fillRef>
+            <a:effectRef idx="1">
+              <a:schemeClr val="accent1"/>
+            </a:effectRef>
+            <a:fontRef idx="minor">
+              <a:schemeClr val="tx1"/>
+            </a:fontRef>
+          </p:style>
+        </p:cxnSp>
+        <p:cxnSp>
+          <p:nvCxnSpPr>
+            <p:cNvPr id="70" name="Straight Arrow Connector 69">
+              <a:extLst>
+                <a:ext uri="{FF2B5EF4-FFF2-40B4-BE49-F238E27FC236}">
+                  <a16:creationId xmlns:a16="http://schemas.microsoft.com/office/drawing/2014/main" id="{26A2DCBF-2340-66B2-A591-E3A0973EA66A}"/>
+                </a:ext>
+              </a:extLst>
+            </p:cNvPr>
+            <p:cNvCxnSpPr>
+              <a:cxnSpLocks/>
+            </p:cNvCxnSpPr>
+            <p:nvPr/>
+          </p:nvCxnSpPr>
+          <p:spPr>
+            <a:xfrm>
+              <a:off x="8521714" y="1634701"/>
+              <a:ext cx="400878" cy="0"/>
+            </a:xfrm>
+            <a:prstGeom prst="straightConnector1">
+              <a:avLst/>
+            </a:prstGeom>
+            <a:ln>
+              <a:solidFill>
+                <a:schemeClr val="tx1"/>
+              </a:solidFill>
+              <a:tailEnd type="triangle"/>
+            </a:ln>
+          </p:spPr>
+          <p:style>
+            <a:lnRef idx="2">
+              <a:schemeClr val="accent1"/>
+            </a:lnRef>
+            <a:fillRef idx="0">
+              <a:schemeClr val="accent1"/>
+            </a:fillRef>
+            <a:effectRef idx="1">
+              <a:schemeClr val="accent1"/>
+            </a:effectRef>
+            <a:fontRef idx="minor">
+              <a:schemeClr val="tx1"/>
+            </a:fontRef>
+          </p:style>
+        </p:cxnSp>
+        <p:cxnSp>
+          <p:nvCxnSpPr>
+            <p:cNvPr id="72" name="Straight Arrow Connector 71">
+              <a:extLst>
+                <a:ext uri="{FF2B5EF4-FFF2-40B4-BE49-F238E27FC236}">
+                  <a16:creationId xmlns:a16="http://schemas.microsoft.com/office/drawing/2014/main" id="{1D13E44D-441E-98B2-CFA4-4A522ECE5E54}"/>
+                </a:ext>
+              </a:extLst>
+            </p:cNvPr>
+            <p:cNvCxnSpPr>
+              <a:cxnSpLocks/>
+            </p:cNvCxnSpPr>
+            <p:nvPr/>
+          </p:nvCxnSpPr>
+          <p:spPr>
+            <a:xfrm>
+              <a:off x="7133336" y="1634701"/>
+              <a:ext cx="400878" cy="0"/>
+            </a:xfrm>
+            <a:prstGeom prst="straightConnector1">
+              <a:avLst/>
+            </a:prstGeom>
+            <a:ln>
+              <a:solidFill>
+                <a:schemeClr val="tx1"/>
+              </a:solidFill>
+              <a:tailEnd type="triangle"/>
+            </a:ln>
+          </p:spPr>
+          <p:style>
+            <a:lnRef idx="2">
+              <a:schemeClr val="accent1"/>
+            </a:lnRef>
+            <a:fillRef idx="0">
+              <a:schemeClr val="accent1"/>
+            </a:fillRef>
+            <a:effectRef idx="1">
+              <a:schemeClr val="accent1"/>
+            </a:effectRef>
+            <a:fontRef idx="minor">
+              <a:schemeClr val="tx1"/>
+            </a:fontRef>
+          </p:style>
+        </p:cxnSp>
+        <p:sp>
+          <p:nvSpPr>
+            <p:cNvPr id="3" name="Parallelogram 2">
+              <a:extLst>
+                <a:ext uri="{FF2B5EF4-FFF2-40B4-BE49-F238E27FC236}">
+                  <a16:creationId xmlns:a16="http://schemas.microsoft.com/office/drawing/2014/main" id="{42B78AF9-3C0C-AE9C-CD0A-C42187BC2EDE}"/>
+                </a:ext>
+              </a:extLst>
+            </p:cNvPr>
+            <p:cNvSpPr/>
+            <p:nvPr/>
+          </p:nvSpPr>
+          <p:spPr>
+            <a:xfrm>
+              <a:off x="5382842" y="2323621"/>
+              <a:ext cx="1253965" cy="708229"/>
+            </a:xfrm>
+            <a:prstGeom prst="parallelogram">
+              <a:avLst/>
+            </a:prstGeom>
+            <a:solidFill>
+              <a:srgbClr val="868686"/>
+            </a:solidFill>
+            <a:ln>
+              <a:noFill/>
+            </a:ln>
+          </p:spPr>
+          <p:style>
+            <a:lnRef idx="2">
+              <a:schemeClr val="accent1">
+                <a:shade val="15000"/>
+              </a:schemeClr>
+            </a:lnRef>
+            <a:fillRef idx="1">
+              <a:schemeClr val="accent1"/>
+            </a:fillRef>
+            <a:effectRef idx="0">
+              <a:schemeClr val="accent1"/>
+            </a:effectRef>
+            <a:fontRef idx="minor">
+              <a:schemeClr val="lt1"/>
+            </a:fontRef>
+          </p:style>
+          <p:txBody>
+            <a:bodyPr rtlCol="0" anchor="ctr"/>
+            <a:lstStyle/>
+            <a:p>
+              <a:pPr algn="ctr"/>
+              <a:r>
+                <a:rPr lang="en-US" sz="1200" dirty="0">
+                  <a:latin typeface="CMU Sans Serif Medium" panose="02000603000000000000" pitchFamily="2" charset="0"/>
+                  <a:ea typeface="CMU Sans Serif Medium" panose="02000603000000000000" pitchFamily="2" charset="0"/>
+                  <a:cs typeface="CMU Sans Serif Medium" panose="02000603000000000000" pitchFamily="2" charset="0"/>
+                </a:rPr>
+                <a:t>cleaned comment text</a:t>
+              </a:r>
+            </a:p>
+          </p:txBody>
+        </p:sp>
+        <p:sp>
+          <p:nvSpPr>
+            <p:cNvPr id="9" name="Rectangle 8">
+              <a:extLst>
+                <a:ext uri="{FF2B5EF4-FFF2-40B4-BE49-F238E27FC236}">
+                  <a16:creationId xmlns:a16="http://schemas.microsoft.com/office/drawing/2014/main" id="{392DCB18-7586-F217-0D41-E0B01C3A3E5C}"/>
+                </a:ext>
+              </a:extLst>
+            </p:cNvPr>
+            <p:cNvSpPr/>
+            <p:nvPr/>
+          </p:nvSpPr>
+          <p:spPr>
+            <a:xfrm>
+              <a:off x="8915827" y="2285490"/>
+              <a:ext cx="1102678" cy="657567"/>
+            </a:xfrm>
+            <a:prstGeom prst="rect">
+              <a:avLst/>
+            </a:prstGeom>
+            <a:solidFill>
+              <a:srgbClr val="868686"/>
+            </a:solidFill>
+            <a:ln>
+              <a:noFill/>
+            </a:ln>
+          </p:spPr>
+          <p:style>
+            <a:lnRef idx="2">
+              <a:schemeClr val="accent1">
+                <a:shade val="15000"/>
+              </a:schemeClr>
+            </a:lnRef>
+            <a:fillRef idx="1">
+              <a:schemeClr val="accent1"/>
+            </a:fillRef>
+            <a:effectRef idx="0">
+              <a:schemeClr val="accent1"/>
+            </a:effectRef>
+            <a:fontRef idx="minor">
+              <a:schemeClr val="lt1"/>
+            </a:fontRef>
+          </p:style>
+          <p:txBody>
+            <a:bodyPr rtlCol="0" anchor="ctr"/>
+            <a:lstStyle/>
+            <a:p>
+              <a:pPr algn="ctr"/>
+              <a:r>
+                <a:rPr lang="en-US" sz="1200" dirty="0">
+                  <a:latin typeface="CMU Sans Serif Medium" panose="02000603000000000000" pitchFamily="2" charset="0"/>
+                  <a:ea typeface="CMU Sans Serif Medium" panose="02000603000000000000" pitchFamily="2" charset="0"/>
+                  <a:cs typeface="CMU Sans Serif Medium" panose="02000603000000000000" pitchFamily="2" charset="0"/>
+                </a:rPr>
+                <a:t>sentiment model</a:t>
+              </a:r>
+            </a:p>
+          </p:txBody>
+        </p:sp>
+        <p:sp>
+          <p:nvSpPr>
+            <p:cNvPr id="108" name="Rectangle 107">
+              <a:extLst>
+                <a:ext uri="{FF2B5EF4-FFF2-40B4-BE49-F238E27FC236}">
+                  <a16:creationId xmlns:a16="http://schemas.microsoft.com/office/drawing/2014/main" id="{544448E6-D959-4B0E-1D9A-06B8B7FFA12E}"/>
+                </a:ext>
+              </a:extLst>
+            </p:cNvPr>
+            <p:cNvSpPr/>
+            <p:nvPr/>
+          </p:nvSpPr>
+          <p:spPr>
+            <a:xfrm>
+              <a:off x="8915827" y="1265546"/>
+              <a:ext cx="1120345" cy="714460"/>
+            </a:xfrm>
+            <a:prstGeom prst="rect">
+              <a:avLst/>
+            </a:prstGeom>
+            <a:solidFill>
+              <a:srgbClr val="868686"/>
+            </a:solidFill>
+            <a:ln>
+              <a:noFill/>
+            </a:ln>
+          </p:spPr>
+          <p:style>
+            <a:lnRef idx="2">
+              <a:schemeClr val="accent1">
+                <a:shade val="15000"/>
+              </a:schemeClr>
+            </a:lnRef>
+            <a:fillRef idx="1">
+              <a:schemeClr val="accent1"/>
+            </a:fillRef>
+            <a:effectRef idx="0">
+              <a:schemeClr val="accent1"/>
+            </a:effectRef>
+            <a:fontRef idx="minor">
+              <a:schemeClr val="lt1"/>
+            </a:fontRef>
+          </p:style>
+          <p:txBody>
+            <a:bodyPr rtlCol="0" anchor="ctr"/>
+            <a:lstStyle/>
+            <a:p>
+              <a:pPr algn="ctr"/>
+              <a:r>
+                <a:rPr lang="en-US" sz="1200" dirty="0">
+                  <a:latin typeface="CMU Sans Serif Medium" panose="02000603000000000000" pitchFamily="2" charset="0"/>
+                  <a:ea typeface="CMU Sans Serif Medium" panose="02000603000000000000" pitchFamily="2" charset="0"/>
+                  <a:cs typeface="CMU Sans Serif Medium" panose="02000603000000000000" pitchFamily="2" charset="0"/>
+                </a:rPr>
+                <a:t>manual topic reduction</a:t>
+              </a:r>
+            </a:p>
+          </p:txBody>
+        </p:sp>
+        <p:sp>
+          <p:nvSpPr>
+            <p:cNvPr id="10" name="Rectangle 9">
+              <a:extLst>
+                <a:ext uri="{FF2B5EF4-FFF2-40B4-BE49-F238E27FC236}">
+                  <a16:creationId xmlns:a16="http://schemas.microsoft.com/office/drawing/2014/main" id="{D9403BE5-EB04-AAE4-94F1-3650BA5CA24C}"/>
+                </a:ext>
+              </a:extLst>
+            </p:cNvPr>
+            <p:cNvSpPr/>
+            <p:nvPr/>
+          </p:nvSpPr>
+          <p:spPr>
+            <a:xfrm>
+              <a:off x="7522251" y="1263739"/>
+              <a:ext cx="1120345" cy="714460"/>
+            </a:xfrm>
+            <a:prstGeom prst="rect">
+              <a:avLst/>
+            </a:prstGeom>
+            <a:solidFill>
+              <a:srgbClr val="868686"/>
+            </a:solidFill>
+            <a:ln>
+              <a:noFill/>
+            </a:ln>
+          </p:spPr>
+          <p:style>
+            <a:lnRef idx="2">
+              <a:schemeClr val="accent1">
+                <a:shade val="15000"/>
+              </a:schemeClr>
+            </a:lnRef>
+            <a:fillRef idx="1">
+              <a:schemeClr val="accent1"/>
+            </a:fillRef>
+            <a:effectRef idx="0">
+              <a:schemeClr val="accent1"/>
+            </a:effectRef>
+            <a:fontRef idx="minor">
+              <a:schemeClr val="lt1"/>
+            </a:fontRef>
+          </p:style>
+          <p:txBody>
+            <a:bodyPr rtlCol="0" anchor="ctr"/>
+            <a:lstStyle/>
+            <a:p>
+              <a:pPr algn="ctr"/>
+              <a:r>
+                <a:rPr lang="en-US" sz="1200" dirty="0">
+                  <a:latin typeface="CMU Sans Serif Medium" panose="02000603000000000000" pitchFamily="2" charset="0"/>
+                  <a:ea typeface="CMU Sans Serif Medium" panose="02000603000000000000" pitchFamily="2" charset="0"/>
+                  <a:cs typeface="CMU Sans Serif Medium" panose="02000603000000000000" pitchFamily="2" charset="0"/>
+                </a:rPr>
+                <a:t>topic model</a:t>
+              </a:r>
+            </a:p>
+          </p:txBody>
+        </p:sp>
+        <p:sp>
+          <p:nvSpPr>
+            <p:cNvPr id="2" name="Parallelogram 1">
+              <a:extLst>
+                <a:ext uri="{FF2B5EF4-FFF2-40B4-BE49-F238E27FC236}">
+                  <a16:creationId xmlns:a16="http://schemas.microsoft.com/office/drawing/2014/main" id="{C0B718A1-71B2-9810-8E2C-C0AF7B27300A}"/>
+                </a:ext>
+              </a:extLst>
+            </p:cNvPr>
+            <p:cNvSpPr/>
+            <p:nvPr/>
+          </p:nvSpPr>
+          <p:spPr>
+            <a:xfrm>
+              <a:off x="6014431" y="1252042"/>
+              <a:ext cx="1253965" cy="708229"/>
+            </a:xfrm>
+            <a:prstGeom prst="parallelogram">
+              <a:avLst/>
+            </a:prstGeom>
+            <a:solidFill>
+              <a:srgbClr val="868686"/>
+            </a:solidFill>
+            <a:ln>
+              <a:noFill/>
+            </a:ln>
+          </p:spPr>
+          <p:style>
+            <a:lnRef idx="2">
+              <a:schemeClr val="accent1">
+                <a:shade val="15000"/>
+              </a:schemeClr>
+            </a:lnRef>
+            <a:fillRef idx="1">
+              <a:schemeClr val="accent1"/>
+            </a:fillRef>
+            <a:effectRef idx="0">
+              <a:schemeClr val="accent1"/>
+            </a:effectRef>
+            <a:fontRef idx="minor">
+              <a:schemeClr val="lt1"/>
+            </a:fontRef>
+          </p:style>
+          <p:txBody>
+            <a:bodyPr rtlCol="0" anchor="ctr"/>
+            <a:lstStyle/>
+            <a:p>
+              <a:pPr algn="ctr"/>
+              <a:r>
+                <a:rPr lang="en-US" sz="1100" dirty="0">
+                  <a:latin typeface="CMU Sans Serif Medium" panose="02000603000000000000" pitchFamily="2" charset="0"/>
+                  <a:ea typeface="CMU Sans Serif Medium" panose="02000603000000000000" pitchFamily="2" charset="0"/>
+                  <a:cs typeface="CMU Sans Serif Medium" panose="02000603000000000000" pitchFamily="2" charset="0"/>
+                </a:rPr>
+                <a:t>fine-tuned sentence transformer</a:t>
+              </a:r>
+            </a:p>
+          </p:txBody>
+        </p:sp>
+        <p:sp>
+          <p:nvSpPr>
+            <p:cNvPr id="1034" name="TextBox 1033">
+              <a:extLst>
+                <a:ext uri="{FF2B5EF4-FFF2-40B4-BE49-F238E27FC236}">
+                  <a16:creationId xmlns:a16="http://schemas.microsoft.com/office/drawing/2014/main" id="{07C08A38-16A6-F55C-9808-9BAF2A46DEF8}"/>
+                </a:ext>
+              </a:extLst>
+            </p:cNvPr>
+            <p:cNvSpPr txBox="1"/>
+            <p:nvPr/>
+          </p:nvSpPr>
+          <p:spPr>
+            <a:xfrm>
+              <a:off x="7522251" y="1098774"/>
+              <a:ext cx="1117746" cy="246221"/>
+            </a:xfrm>
+            <a:prstGeom prst="rect">
+              <a:avLst/>
+            </a:prstGeom>
+            <a:noFill/>
+          </p:spPr>
+          <p:txBody>
+            <a:bodyPr wrap="square" rtlCol="0">
+              <a:spAutoFit/>
+            </a:bodyPr>
+            <a:lstStyle/>
+            <a:p>
+              <a:pPr algn="r"/>
+              <a:r>
+                <a:rPr lang="en-US" sz="1000" i="1" dirty="0">
+                  <a:solidFill>
+                    <a:schemeClr val="tx1">
+                      <a:lumMod val="95000"/>
+                      <a:lumOff val="5000"/>
+                    </a:schemeClr>
+                  </a:solidFill>
+                  <a:latin typeface="CMU Sans Serif Medium" panose="02000603000000000000" pitchFamily="2" charset="0"/>
+                  <a:ea typeface="CMU Sans Serif Medium" panose="02000603000000000000" pitchFamily="2" charset="0"/>
+                  <a:cs typeface="CMU Sans Serif Medium" panose="02000603000000000000" pitchFamily="2" charset="0"/>
+                </a:rPr>
+                <a:t>BERTopic</a:t>
+              </a:r>
+            </a:p>
+          </p:txBody>
+        </p:sp>
+        <p:sp>
+          <p:nvSpPr>
+            <p:cNvPr id="56" name="TextBox 55">
+              <a:extLst>
+                <a:ext uri="{FF2B5EF4-FFF2-40B4-BE49-F238E27FC236}">
+                  <a16:creationId xmlns:a16="http://schemas.microsoft.com/office/drawing/2014/main" id="{A481ED49-417E-76A2-6981-4241EC0A4B42}"/>
+                </a:ext>
+              </a:extLst>
+            </p:cNvPr>
+            <p:cNvSpPr txBox="1"/>
+            <p:nvPr/>
+          </p:nvSpPr>
+          <p:spPr>
+            <a:xfrm>
+              <a:off x="10414953" y="3435784"/>
+              <a:ext cx="1258455" cy="261610"/>
+            </a:xfrm>
+            <a:prstGeom prst="rect">
+              <a:avLst/>
+            </a:prstGeom>
+            <a:noFill/>
+          </p:spPr>
+          <p:txBody>
+            <a:bodyPr wrap="square">
+              <a:spAutoFit/>
+            </a:bodyPr>
+            <a:lstStyle/>
+            <a:p>
+              <a:pPr algn="ctr"/>
+              <a:r>
+                <a:rPr lang="en-US" sz="1100" dirty="0">
+                  <a:solidFill>
+                    <a:schemeClr val="bg1"/>
+                  </a:solidFill>
+                  <a:latin typeface="CMU Sans Serif Medium" panose="02000603000000000000" pitchFamily="2" charset="0"/>
+                  <a:ea typeface="CMU Sans Serif Medium" panose="02000603000000000000" pitchFamily="2" charset="0"/>
+                  <a:cs typeface="CMU Sans Serif Medium" panose="02000603000000000000" pitchFamily="2" charset="0"/>
+                </a:rPr>
+                <a:t>coordinates</a:t>
+              </a:r>
+            </a:p>
+          </p:txBody>
+        </p:sp>
+        <p:sp>
+          <p:nvSpPr>
+            <p:cNvPr id="58" name="TextBox 57">
+              <a:extLst>
+                <a:ext uri="{FF2B5EF4-FFF2-40B4-BE49-F238E27FC236}">
+                  <a16:creationId xmlns:a16="http://schemas.microsoft.com/office/drawing/2014/main" id="{19141F96-08AA-7AAF-9314-2EF7E2912FD6}"/>
+                </a:ext>
+              </a:extLst>
+            </p:cNvPr>
+            <p:cNvSpPr txBox="1"/>
+            <p:nvPr/>
+          </p:nvSpPr>
+          <p:spPr>
+            <a:xfrm>
+              <a:off x="10393158" y="5350575"/>
+              <a:ext cx="1364222" cy="430887"/>
+            </a:xfrm>
+            <a:prstGeom prst="rect">
+              <a:avLst/>
+            </a:prstGeom>
+            <a:noFill/>
+          </p:spPr>
+          <p:txBody>
+            <a:bodyPr wrap="square">
+              <a:spAutoFit/>
+            </a:bodyPr>
+            <a:lstStyle/>
+            <a:p>
+              <a:pPr algn="ctr"/>
+              <a:r>
+                <a:rPr lang="en-US" sz="1100" dirty="0">
+                  <a:solidFill>
+                    <a:schemeClr val="bg1"/>
+                  </a:solidFill>
+                  <a:latin typeface="CMU Sans Serif Medium" panose="02000603000000000000" pitchFamily="2" charset="0"/>
+                  <a:ea typeface="CMU Sans Serif Medium" panose="02000603000000000000" pitchFamily="2" charset="0"/>
+                  <a:cs typeface="CMU Sans Serif Medium" panose="02000603000000000000" pitchFamily="2" charset="0"/>
+                </a:rPr>
+                <a:t>sociodemographic variables</a:t>
+              </a:r>
+            </a:p>
+          </p:txBody>
+        </p:sp>
+        <p:sp>
+          <p:nvSpPr>
+            <p:cNvPr id="59" name="Rectangle 58">
+              <a:extLst>
+                <a:ext uri="{FF2B5EF4-FFF2-40B4-BE49-F238E27FC236}">
+                  <a16:creationId xmlns:a16="http://schemas.microsoft.com/office/drawing/2014/main" id="{B2E8F593-22EE-EBCA-AC46-8AC3256B51CD}"/>
+                </a:ext>
+              </a:extLst>
+            </p:cNvPr>
+            <p:cNvSpPr/>
+            <p:nvPr/>
+          </p:nvSpPr>
+          <p:spPr>
+            <a:xfrm>
+              <a:off x="4071763" y="2334265"/>
+              <a:ext cx="1120345" cy="714460"/>
+            </a:xfrm>
+            <a:prstGeom prst="rect">
+              <a:avLst/>
+            </a:prstGeom>
+            <a:solidFill>
+              <a:srgbClr val="868686"/>
+            </a:solidFill>
+            <a:ln>
+              <a:noFill/>
+            </a:ln>
+          </p:spPr>
+          <p:style>
+            <a:lnRef idx="2">
+              <a:schemeClr val="accent1">
+                <a:shade val="15000"/>
+              </a:schemeClr>
+            </a:lnRef>
+            <a:fillRef idx="1">
+              <a:schemeClr val="accent1"/>
+            </a:fillRef>
+            <a:effectRef idx="0">
+              <a:schemeClr val="accent1"/>
+            </a:effectRef>
+            <a:fontRef idx="minor">
+              <a:schemeClr val="lt1"/>
+            </a:fontRef>
+          </p:style>
+          <p:txBody>
+            <a:bodyPr rtlCol="0" anchor="ctr"/>
+            <a:lstStyle/>
+            <a:p>
+              <a:pPr algn="ctr"/>
+              <a:r>
+                <a:rPr lang="en-US" sz="1200" dirty="0">
+                  <a:latin typeface="CMU Sans Serif Medium" panose="02000603000000000000" pitchFamily="2" charset="0"/>
+                  <a:ea typeface="CMU Sans Serif Medium" panose="02000603000000000000" pitchFamily="2" charset="0"/>
+                  <a:cs typeface="CMU Sans Serif Medium" panose="02000603000000000000" pitchFamily="2" charset="0"/>
+                </a:rPr>
+                <a:t>anonymisation</a:t>
+              </a:r>
+            </a:p>
+          </p:txBody>
+        </p:sp>
+        <p:sp>
+          <p:nvSpPr>
+            <p:cNvPr id="68" name="TextBox 67">
+              <a:extLst>
+                <a:ext uri="{FF2B5EF4-FFF2-40B4-BE49-F238E27FC236}">
+                  <a16:creationId xmlns:a16="http://schemas.microsoft.com/office/drawing/2014/main" id="{3F3EABED-67C3-4F85-7E89-E25279217614}"/>
+                </a:ext>
+              </a:extLst>
+            </p:cNvPr>
+            <p:cNvSpPr txBox="1"/>
+            <p:nvPr/>
+          </p:nvSpPr>
+          <p:spPr>
+            <a:xfrm>
+              <a:off x="4127181" y="2178094"/>
+              <a:ext cx="1117746" cy="246221"/>
+            </a:xfrm>
+            <a:prstGeom prst="rect">
+              <a:avLst/>
+            </a:prstGeom>
+            <a:noFill/>
+          </p:spPr>
+          <p:txBody>
+            <a:bodyPr wrap="square" rtlCol="0">
+              <a:spAutoFit/>
+            </a:bodyPr>
+            <a:lstStyle/>
+            <a:p>
+              <a:pPr algn="r"/>
+              <a:r>
+                <a:rPr lang="en-US" sz="1000" i="1" dirty="0">
+                  <a:solidFill>
+                    <a:schemeClr val="tx1">
+                      <a:lumMod val="95000"/>
+                      <a:lumOff val="5000"/>
+                    </a:schemeClr>
+                  </a:solidFill>
+                  <a:latin typeface="CMU Sans Serif Medium" panose="02000603000000000000" pitchFamily="2" charset="0"/>
+                  <a:ea typeface="CMU Sans Serif Medium" panose="02000603000000000000" pitchFamily="2" charset="0"/>
+                  <a:cs typeface="CMU Sans Serif Medium" panose="02000603000000000000" pitchFamily="2" charset="0"/>
+                </a:rPr>
+                <a:t>NER</a:t>
+              </a:r>
+            </a:p>
+          </p:txBody>
+        </p:sp>
+      </p:grpSp>
+    </p:spTree>
+    <p:extLst>
+      <p:ext uri="{BB962C8B-B14F-4D97-AF65-F5344CB8AC3E}">
+        <p14:creationId xmlns:p14="http://schemas.microsoft.com/office/powerpoint/2010/main" val="1020780937"/>
+      </p:ext>
+    </p:extLst>
+  </p:cSld>
+  <p:clrMapOvr>
+    <a:masterClrMapping/>
+  </p:clrMapOvr>
+</p:sld>
+</file>
+
 <file path=ppt/theme/theme1.xml><?xml version="1.0" encoding="utf-8"?>
 <a:theme xmlns:a="http://schemas.openxmlformats.org/drawingml/2006/main" name="Office Theme">
   <a:themeElements>
